--- a/assets/figures-editable/c1-c2/c1-e12.pptx
+++ b/assets/figures-editable/c1-c2/c1-e12.pptx
@@ -7,7 +7,7 @@
   <p:sldIdLst>
     <p:sldId id="256" r:id="rId7"/>
   </p:sldIdLst>
-  <p:sldSz cx="11948160" cy="7924799" type="screen4x3"/>
+  <p:sldSz cx="12191695" cy="6858000" type="screen4x3"/>
   <p:notesSz cx="6858000" cy="9144000"/>
   <p:defaultTextStyle>
     <a:defPPr>
@@ -3098,14 +3098,14 @@
       <p:grpSpPr/>
       <p:sp>
         <p:nvSpPr>
-          <p:cNvPr id="2" name="text1" descr="sci-ppt:C1-E12-001"/>
+          <p:cNvPr id="2" name="C1-E12 text 0" descr="sci-ppt:o000"/>
           <p:cNvSpPr txBox="1"/>
           <p:nvPr/>
         </p:nvSpPr>
         <p:spPr>
           <a:xfrm>
-            <a:off x="316992" y="268224"/>
-            <a:ext cx="11277600" cy="359054"/>
+            <a:off x="274320" y="118872"/>
+            <a:ext cx="11612880" cy="340105"/>
           </a:xfrm>
           <a:prstGeom prst="rect">
             <a:avLst/>
@@ -3114,7 +3114,7 @@
           <a:effectLst/>
         </p:spPr>
         <p:txBody>
-          <a:bodyPr wrap="none" lIns="27432" rIns="27432" tIns="18288" bIns="18288" anchor="ctr">
+          <a:bodyPr wrap="none" lIns="18288" rIns="18288" tIns="18288" bIns="18288" anchor="t">
             <a:spAutoFit/>
           </a:bodyPr>
           <a:lstStyle/>
@@ -3125,119 +3125,115 @@
               </a:spcAft>
             </a:pPr>
             <a:r>
-              <a:rPr sz="1823" b="0" i="0">
+              <a:rPr sz="1900" b="1" i="0">
                 <a:solidFill>
                   <a:srgbClr val="8EDBD4"/>
                 </a:solidFill>
                 <a:latin typeface="Arial"/>
               </a:rPr>
-              <a:t>C1-E12 | Physical-variable diagram</a:t>
-            </a:r>
-          </a:p>
-        </p:txBody>
-      </p:sp>
-      <p:sp>
-        <p:nvSpPr>
-          <p:cNvPr id="3" name="ellipse2" descr="sci-ppt:C1-E12-002"/>
-          <p:cNvSpPr/>
-          <p:nvPr/>
-        </p:nvSpPr>
-        <p:spPr>
-          <a:xfrm>
-            <a:off x="2438400" y="1645920"/>
-            <a:ext cx="1950720" cy="1950720"/>
-          </a:xfrm>
-          <a:prstGeom prst="ellipse">
-            <a:avLst/>
-          </a:prstGeom>
-          <a:solidFill>
-            <a:srgbClr val="213E4B"/>
-          </a:solidFill>
-          <a:ln w="21590">
+              <a:t>C1-E12 · Independent dissipation and conservation check</a:t>
+            </a:r>
+          </a:p>
+        </p:txBody>
+      </p:sp>
+      <p:cxnSp>
+        <p:nvCxnSpPr>
+          <p:cNvPr id="3" name="C1-E12 line 1" descr="sci-ppt:o001"/>
+          <p:cNvCxnSpPr/>
+          <p:nvPr/>
+        </p:nvCxnSpPr>
+        <p:spPr>
+          <a:xfrm>
+            <a:off x="914400" y="4800600"/>
+            <a:ext cx="4754880" cy="0"/>
+          </a:xfrm>
+          <a:prstGeom prst="line">
+            <a:avLst/>
+          </a:prstGeom>
+          <a:ln w="19050">
             <a:solidFill>
               <a:srgbClr val="B4C7D2"/>
             </a:solidFill>
           </a:ln>
           <a:effectLst/>
         </p:spPr>
-        <p:txBody>
-          <a:bodyPr rtlCol="0" anchor="ctr"/>
-          <a:lstStyle/>
-          <a:p>
-            <a:pPr algn="ctr"/>
-          </a:p>
-        </p:txBody>
-      </p:sp>
-      <p:sp>
-        <p:nvSpPr>
-          <p:cNvPr id="4" name="ellipse3" descr="sci-ppt:C1-E12-003"/>
-          <p:cNvSpPr/>
-          <p:nvPr/>
-        </p:nvSpPr>
-        <p:spPr>
-          <a:xfrm>
-            <a:off x="1706880" y="914400"/>
-            <a:ext cx="3413760" cy="3413760"/>
-          </a:xfrm>
-          <a:prstGeom prst="ellipse">
-            <a:avLst/>
-          </a:prstGeom>
-          <a:noFill/>
-          <a:ln w="21590">
+      </p:cxnSp>
+      <p:cxnSp>
+        <p:nvCxnSpPr>
+          <p:cNvPr id="4" name="C1-E12 line 2" descr="sci-ppt:o002"/>
+          <p:cNvCxnSpPr/>
+          <p:nvPr/>
+        </p:nvCxnSpPr>
+        <p:spPr>
+          <a:xfrm>
+            <a:off x="914400" y="1417320"/>
+            <a:ext cx="0" cy="3383280"/>
+          </a:xfrm>
+          <a:prstGeom prst="line">
+            <a:avLst/>
+          </a:prstGeom>
+          <a:ln w="19050">
             <a:solidFill>
               <a:srgbClr val="B4C7D2"/>
             </a:solidFill>
           </a:ln>
           <a:effectLst/>
         </p:spPr>
-        <p:txBody>
-          <a:bodyPr rtlCol="0" anchor="ctr"/>
-          <a:lstStyle/>
-          <a:p>
-            <a:pPr algn="ctr"/>
-          </a:p>
-        </p:txBody>
-      </p:sp>
-      <p:sp>
-        <p:nvSpPr>
-          <p:cNvPr id="5" name="ellipse4" descr="sci-ppt:C1-E12-004"/>
-          <p:cNvSpPr/>
-          <p:nvPr/>
-        </p:nvSpPr>
-        <p:spPr>
-          <a:xfrm>
-            <a:off x="1524000" y="731520"/>
-            <a:ext cx="3779520" cy="3779520"/>
-          </a:xfrm>
-          <a:prstGeom prst="ellipse">
-            <a:avLst/>
-          </a:prstGeom>
-          <a:noFill/>
-          <a:ln w="21590">
+      </p:cxnSp>
+      <p:cxnSp>
+        <p:nvCxnSpPr>
+          <p:cNvPr id="5" name="C1-E12 line 3" descr="sci-ppt:o003"/>
+          <p:cNvCxnSpPr/>
+          <p:nvPr/>
+        </p:nvCxnSpPr>
+        <p:spPr>
+          <a:xfrm>
+            <a:off x="914400" y="4800600"/>
+            <a:ext cx="0" cy="64008"/>
+          </a:xfrm>
+          <a:prstGeom prst="line">
+            <a:avLst/>
+          </a:prstGeom>
+          <a:ln w="12700">
             <a:solidFill>
               <a:srgbClr val="B4C7D2"/>
             </a:solidFill>
           </a:ln>
           <a:effectLst/>
         </p:spPr>
-        <p:txBody>
-          <a:bodyPr rtlCol="0" anchor="ctr"/>
-          <a:lstStyle/>
-          <a:p>
-            <a:pPr algn="ctr"/>
-          </a:p>
-        </p:txBody>
-      </p:sp>
-      <p:sp>
-        <p:nvSpPr>
-          <p:cNvPr id="6" name="text5" descr="sci-ppt:C1-E12-005"/>
+      </p:cxnSp>
+      <p:cxnSp>
+        <p:nvCxnSpPr>
+          <p:cNvPr id="6" name="C1-E12 line 4" descr="sci-ppt:o004"/>
+          <p:cNvCxnSpPr/>
+          <p:nvPr/>
+        </p:nvCxnSpPr>
+        <p:spPr>
+          <a:xfrm>
+            <a:off x="914400" y="1417320"/>
+            <a:ext cx="0" cy="3383280"/>
+          </a:xfrm>
+          <a:prstGeom prst="line">
+            <a:avLst/>
+          </a:prstGeom>
+          <a:ln w="7620">
+            <a:solidFill>
+              <a:srgbClr val="2E4756"/>
+            </a:solidFill>
+          </a:ln>
+          <a:effectLst/>
+        </p:spPr>
+      </p:cxnSp>
+      <p:sp>
+        <p:nvSpPr>
+          <p:cNvPr id="7" name="C1-E12 text 5" descr="sci-ppt:o005"/>
           <p:cNvSpPr txBox="1"/>
           <p:nvPr/>
         </p:nvSpPr>
         <p:spPr>
           <a:xfrm>
-            <a:off x="2438400" y="2560320"/>
-            <a:ext cx="2438400" cy="415747"/>
+            <a:off x="457200" y="4882896"/>
+            <a:ext cx="914400" cy="208407"/>
           </a:xfrm>
           <a:prstGeom prst="rect">
             <a:avLst/>
@@ -3246,7 +3242,675 @@
           <a:effectLst/>
         </p:spPr>
         <p:txBody>
-          <a:bodyPr wrap="none" lIns="27432" rIns="27432" tIns="18288" bIns="18288" anchor="ctr">
+          <a:bodyPr wrap="none" lIns="18288" rIns="18288" tIns="18288" bIns="18288" anchor="t">
+            <a:spAutoFit/>
+          </a:bodyPr>
+          <a:lstStyle/>
+          <a:p>
+            <a:pPr algn="ctr">
+              <a:spcAft>
+                <a:spcPts val="0"/>
+              </a:spcAft>
+            </a:pPr>
+            <a:r>
+              <a:rPr sz="1050" b="0" i="0">
+                <a:solidFill>
+                  <a:srgbClr val="B4C7D2"/>
+                </a:solidFill>
+                <a:latin typeface="Arial"/>
+              </a:rPr>
+              <a:t>1</a:t>
+            </a:r>
+          </a:p>
+        </p:txBody>
+      </p:sp>
+      <p:cxnSp>
+        <p:nvCxnSpPr>
+          <p:cNvPr id="8" name="C1-E12 line 6" descr="sci-ppt:o006"/>
+          <p:cNvCxnSpPr/>
+          <p:nvPr/>
+        </p:nvCxnSpPr>
+        <p:spPr>
+          <a:xfrm>
+            <a:off x="2499360" y="4800600"/>
+            <a:ext cx="0" cy="64008"/>
+          </a:xfrm>
+          <a:prstGeom prst="line">
+            <a:avLst/>
+          </a:prstGeom>
+          <a:ln w="12700">
+            <a:solidFill>
+              <a:srgbClr val="B4C7D2"/>
+            </a:solidFill>
+          </a:ln>
+          <a:effectLst/>
+        </p:spPr>
+      </p:cxnSp>
+      <p:cxnSp>
+        <p:nvCxnSpPr>
+          <p:cNvPr id="9" name="C1-E12 line 7" descr="sci-ppt:o007"/>
+          <p:cNvCxnSpPr/>
+          <p:nvPr/>
+        </p:nvCxnSpPr>
+        <p:spPr>
+          <a:xfrm>
+            <a:off x="2499360" y="1417320"/>
+            <a:ext cx="0" cy="3383280"/>
+          </a:xfrm>
+          <a:prstGeom prst="line">
+            <a:avLst/>
+          </a:prstGeom>
+          <a:ln w="7620">
+            <a:solidFill>
+              <a:srgbClr val="2E4756"/>
+            </a:solidFill>
+          </a:ln>
+          <a:effectLst/>
+        </p:spPr>
+      </p:cxnSp>
+      <p:sp>
+        <p:nvSpPr>
+          <p:cNvPr id="10" name="C1-E12 text 8" descr="sci-ppt:o008"/>
+          <p:cNvSpPr txBox="1"/>
+          <p:nvPr/>
+        </p:nvSpPr>
+        <p:spPr>
+          <a:xfrm>
+            <a:off x="2042160" y="4882896"/>
+            <a:ext cx="914400" cy="208407"/>
+          </a:xfrm>
+          <a:prstGeom prst="rect">
+            <a:avLst/>
+          </a:prstGeom>
+          <a:noFill/>
+          <a:effectLst/>
+        </p:spPr>
+        <p:txBody>
+          <a:bodyPr wrap="none" lIns="18288" rIns="18288" tIns="18288" bIns="18288" anchor="t">
+            <a:spAutoFit/>
+          </a:bodyPr>
+          <a:lstStyle/>
+          <a:p>
+            <a:pPr algn="ctr">
+              <a:spcAft>
+                <a:spcPts val="0"/>
+              </a:spcAft>
+            </a:pPr>
+            <a:r>
+              <a:rPr sz="1050" b="0" i="0">
+                <a:solidFill>
+                  <a:srgbClr val="B4C7D2"/>
+                </a:solidFill>
+                <a:latin typeface="Arial"/>
+              </a:rPr>
+              <a:t>2</a:t>
+            </a:r>
+          </a:p>
+        </p:txBody>
+      </p:sp>
+      <p:cxnSp>
+        <p:nvCxnSpPr>
+          <p:cNvPr id="11" name="C1-E12 line 9" descr="sci-ppt:o009"/>
+          <p:cNvCxnSpPr/>
+          <p:nvPr/>
+        </p:nvCxnSpPr>
+        <p:spPr>
+          <a:xfrm>
+            <a:off x="4084320" y="4800600"/>
+            <a:ext cx="0" cy="64008"/>
+          </a:xfrm>
+          <a:prstGeom prst="line">
+            <a:avLst/>
+          </a:prstGeom>
+          <a:ln w="12700">
+            <a:solidFill>
+              <a:srgbClr val="B4C7D2"/>
+            </a:solidFill>
+          </a:ln>
+          <a:effectLst/>
+        </p:spPr>
+      </p:cxnSp>
+      <p:cxnSp>
+        <p:nvCxnSpPr>
+          <p:cNvPr id="12" name="C1-E12 line 10" descr="sci-ppt:o010"/>
+          <p:cNvCxnSpPr/>
+          <p:nvPr/>
+        </p:nvCxnSpPr>
+        <p:spPr>
+          <a:xfrm>
+            <a:off x="4084320" y="1417320"/>
+            <a:ext cx="0" cy="3383280"/>
+          </a:xfrm>
+          <a:prstGeom prst="line">
+            <a:avLst/>
+          </a:prstGeom>
+          <a:ln w="7620">
+            <a:solidFill>
+              <a:srgbClr val="2E4756"/>
+            </a:solidFill>
+          </a:ln>
+          <a:effectLst/>
+        </p:spPr>
+      </p:cxnSp>
+      <p:sp>
+        <p:nvSpPr>
+          <p:cNvPr id="13" name="C1-E12 text 11" descr="sci-ppt:o011"/>
+          <p:cNvSpPr txBox="1"/>
+          <p:nvPr/>
+        </p:nvSpPr>
+        <p:spPr>
+          <a:xfrm>
+            <a:off x="3627120" y="4882896"/>
+            <a:ext cx="914400" cy="208407"/>
+          </a:xfrm>
+          <a:prstGeom prst="rect">
+            <a:avLst/>
+          </a:prstGeom>
+          <a:noFill/>
+          <a:effectLst/>
+        </p:spPr>
+        <p:txBody>
+          <a:bodyPr wrap="none" lIns="18288" rIns="18288" tIns="18288" bIns="18288" anchor="t">
+            <a:spAutoFit/>
+          </a:bodyPr>
+          <a:lstStyle/>
+          <a:p>
+            <a:pPr algn="ctr">
+              <a:spcAft>
+                <a:spcPts val="0"/>
+              </a:spcAft>
+            </a:pPr>
+            <a:r>
+              <a:rPr sz="1050" b="0" i="0">
+                <a:solidFill>
+                  <a:srgbClr val="B4C7D2"/>
+                </a:solidFill>
+                <a:latin typeface="Arial"/>
+              </a:rPr>
+              <a:t>3</a:t>
+            </a:r>
+          </a:p>
+        </p:txBody>
+      </p:sp>
+      <p:cxnSp>
+        <p:nvCxnSpPr>
+          <p:cNvPr id="14" name="C1-E12 line 12" descr="sci-ppt:o012"/>
+          <p:cNvCxnSpPr/>
+          <p:nvPr/>
+        </p:nvCxnSpPr>
+        <p:spPr>
+          <a:xfrm>
+            <a:off x="5669280" y="4800600"/>
+            <a:ext cx="0" cy="64008"/>
+          </a:xfrm>
+          <a:prstGeom prst="line">
+            <a:avLst/>
+          </a:prstGeom>
+          <a:ln w="12700">
+            <a:solidFill>
+              <a:srgbClr val="B4C7D2"/>
+            </a:solidFill>
+          </a:ln>
+          <a:effectLst/>
+        </p:spPr>
+      </p:cxnSp>
+      <p:cxnSp>
+        <p:nvCxnSpPr>
+          <p:cNvPr id="15" name="C1-E12 line 13" descr="sci-ppt:o013"/>
+          <p:cNvCxnSpPr/>
+          <p:nvPr/>
+        </p:nvCxnSpPr>
+        <p:spPr>
+          <a:xfrm>
+            <a:off x="5669280" y="1417320"/>
+            <a:ext cx="0" cy="3383280"/>
+          </a:xfrm>
+          <a:prstGeom prst="line">
+            <a:avLst/>
+          </a:prstGeom>
+          <a:ln w="7620">
+            <a:solidFill>
+              <a:srgbClr val="2E4756"/>
+            </a:solidFill>
+          </a:ln>
+          <a:effectLst/>
+        </p:spPr>
+      </p:cxnSp>
+      <p:sp>
+        <p:nvSpPr>
+          <p:cNvPr id="16" name="C1-E12 text 14" descr="sci-ppt:o014"/>
+          <p:cNvSpPr txBox="1"/>
+          <p:nvPr/>
+        </p:nvSpPr>
+        <p:spPr>
+          <a:xfrm>
+            <a:off x="5212080" y="4882896"/>
+            <a:ext cx="914400" cy="208407"/>
+          </a:xfrm>
+          <a:prstGeom prst="rect">
+            <a:avLst/>
+          </a:prstGeom>
+          <a:noFill/>
+          <a:effectLst/>
+        </p:spPr>
+        <p:txBody>
+          <a:bodyPr wrap="none" lIns="18288" rIns="18288" tIns="18288" bIns="18288" anchor="t">
+            <a:spAutoFit/>
+          </a:bodyPr>
+          <a:lstStyle/>
+          <a:p>
+            <a:pPr algn="ctr">
+              <a:spcAft>
+                <a:spcPts val="0"/>
+              </a:spcAft>
+            </a:pPr>
+            <a:r>
+              <a:rPr sz="1050" b="0" i="0">
+                <a:solidFill>
+                  <a:srgbClr val="B4C7D2"/>
+                </a:solidFill>
+                <a:latin typeface="Arial"/>
+              </a:rPr>
+              <a:t>4</a:t>
+            </a:r>
+          </a:p>
+        </p:txBody>
+      </p:sp>
+      <p:cxnSp>
+        <p:nvCxnSpPr>
+          <p:cNvPr id="17" name="C1-E12 line 15" descr="sci-ppt:o015"/>
+          <p:cNvCxnSpPr/>
+          <p:nvPr/>
+        </p:nvCxnSpPr>
+        <p:spPr>
+          <a:xfrm>
+            <a:off x="850392" y="4601583"/>
+            <a:ext cx="64008" cy="0"/>
+          </a:xfrm>
+          <a:prstGeom prst="line">
+            <a:avLst/>
+          </a:prstGeom>
+          <a:ln w="12700">
+            <a:solidFill>
+              <a:srgbClr val="B4C7D2"/>
+            </a:solidFill>
+          </a:ln>
+          <a:effectLst/>
+        </p:spPr>
+      </p:cxnSp>
+      <p:cxnSp>
+        <p:nvCxnSpPr>
+          <p:cNvPr id="18" name="C1-E12 line 16" descr="sci-ppt:o016"/>
+          <p:cNvCxnSpPr/>
+          <p:nvPr/>
+        </p:nvCxnSpPr>
+        <p:spPr>
+          <a:xfrm>
+            <a:off x="914400" y="4601583"/>
+            <a:ext cx="4754880" cy="0"/>
+          </a:xfrm>
+          <a:prstGeom prst="line">
+            <a:avLst/>
+          </a:prstGeom>
+          <a:ln w="7620">
+            <a:solidFill>
+              <a:srgbClr val="2E4756"/>
+            </a:solidFill>
+          </a:ln>
+          <a:effectLst/>
+        </p:spPr>
+      </p:cxnSp>
+      <p:sp>
+        <p:nvSpPr>
+          <p:cNvPr id="19" name="C1-E12 text 17" descr="sci-ppt:o017"/>
+          <p:cNvSpPr txBox="1"/>
+          <p:nvPr/>
+        </p:nvSpPr>
+        <p:spPr>
+          <a:xfrm>
+            <a:off x="45720" y="4519287"/>
+            <a:ext cx="777240" cy="208407"/>
+          </a:xfrm>
+          <a:prstGeom prst="rect">
+            <a:avLst/>
+          </a:prstGeom>
+          <a:noFill/>
+          <a:effectLst/>
+        </p:spPr>
+        <p:txBody>
+          <a:bodyPr wrap="none" lIns="18288" rIns="18288" tIns="18288" bIns="18288" anchor="t">
+            <a:spAutoFit/>
+          </a:bodyPr>
+          <a:lstStyle/>
+          <a:p>
+            <a:pPr algn="r">
+              <a:spcAft>
+                <a:spcPts val="0"/>
+              </a:spcAft>
+            </a:pPr>
+            <a:r>
+              <a:rPr sz="1050" b="0" i="0">
+                <a:solidFill>
+                  <a:srgbClr val="B4C7D2"/>
+                </a:solidFill>
+                <a:latin typeface="Arial"/>
+              </a:rPr>
+              <a:t>-2</a:t>
+            </a:r>
+          </a:p>
+        </p:txBody>
+      </p:sp>
+      <p:cxnSp>
+        <p:nvCxnSpPr>
+          <p:cNvPr id="20" name="C1-E12 line 18" descr="sci-ppt:o018"/>
+          <p:cNvCxnSpPr/>
+          <p:nvPr/>
+        </p:nvCxnSpPr>
+        <p:spPr>
+          <a:xfrm>
+            <a:off x="850392" y="3606501"/>
+            <a:ext cx="64008" cy="0"/>
+          </a:xfrm>
+          <a:prstGeom prst="line">
+            <a:avLst/>
+          </a:prstGeom>
+          <a:ln w="12700">
+            <a:solidFill>
+              <a:srgbClr val="B4C7D2"/>
+            </a:solidFill>
+          </a:ln>
+          <a:effectLst/>
+        </p:spPr>
+      </p:cxnSp>
+      <p:cxnSp>
+        <p:nvCxnSpPr>
+          <p:cNvPr id="21" name="C1-E12 line 19" descr="sci-ppt:o019"/>
+          <p:cNvCxnSpPr/>
+          <p:nvPr/>
+        </p:nvCxnSpPr>
+        <p:spPr>
+          <a:xfrm>
+            <a:off x="914400" y="3606501"/>
+            <a:ext cx="4754880" cy="0"/>
+          </a:xfrm>
+          <a:prstGeom prst="line">
+            <a:avLst/>
+          </a:prstGeom>
+          <a:ln w="7620">
+            <a:solidFill>
+              <a:srgbClr val="2E4756"/>
+            </a:solidFill>
+          </a:ln>
+          <a:effectLst/>
+        </p:spPr>
+      </p:cxnSp>
+      <p:sp>
+        <p:nvSpPr>
+          <p:cNvPr id="22" name="C1-E12 text 20" descr="sci-ppt:o020"/>
+          <p:cNvSpPr txBox="1"/>
+          <p:nvPr/>
+        </p:nvSpPr>
+        <p:spPr>
+          <a:xfrm>
+            <a:off x="45720" y="3524205"/>
+            <a:ext cx="777240" cy="208407"/>
+          </a:xfrm>
+          <a:prstGeom prst="rect">
+            <a:avLst/>
+          </a:prstGeom>
+          <a:noFill/>
+          <a:effectLst/>
+        </p:spPr>
+        <p:txBody>
+          <a:bodyPr wrap="none" lIns="18288" rIns="18288" tIns="18288" bIns="18288" anchor="t">
+            <a:spAutoFit/>
+          </a:bodyPr>
+          <a:lstStyle/>
+          <a:p>
+            <a:pPr algn="r">
+              <a:spcAft>
+                <a:spcPts val="0"/>
+              </a:spcAft>
+            </a:pPr>
+            <a:r>
+              <a:rPr sz="1050" b="0" i="0">
+                <a:solidFill>
+                  <a:srgbClr val="B4C7D2"/>
+                </a:solidFill>
+                <a:latin typeface="Arial"/>
+              </a:rPr>
+              <a:t>-1</a:t>
+            </a:r>
+          </a:p>
+        </p:txBody>
+      </p:sp>
+      <p:cxnSp>
+        <p:nvCxnSpPr>
+          <p:cNvPr id="23" name="C1-E12 line 21" descr="sci-ppt:o021"/>
+          <p:cNvCxnSpPr/>
+          <p:nvPr/>
+        </p:nvCxnSpPr>
+        <p:spPr>
+          <a:xfrm>
+            <a:off x="850392" y="2611418"/>
+            <a:ext cx="64008" cy="0"/>
+          </a:xfrm>
+          <a:prstGeom prst="line">
+            <a:avLst/>
+          </a:prstGeom>
+          <a:ln w="12700">
+            <a:solidFill>
+              <a:srgbClr val="B4C7D2"/>
+            </a:solidFill>
+          </a:ln>
+          <a:effectLst/>
+        </p:spPr>
+      </p:cxnSp>
+      <p:cxnSp>
+        <p:nvCxnSpPr>
+          <p:cNvPr id="24" name="C1-E12 line 22" descr="sci-ppt:o022"/>
+          <p:cNvCxnSpPr/>
+          <p:nvPr/>
+        </p:nvCxnSpPr>
+        <p:spPr>
+          <a:xfrm>
+            <a:off x="914400" y="2611418"/>
+            <a:ext cx="4754880" cy="0"/>
+          </a:xfrm>
+          <a:prstGeom prst="line">
+            <a:avLst/>
+          </a:prstGeom>
+          <a:ln w="7620">
+            <a:solidFill>
+              <a:srgbClr val="2E4756"/>
+            </a:solidFill>
+          </a:ln>
+          <a:effectLst/>
+        </p:spPr>
+      </p:cxnSp>
+      <p:sp>
+        <p:nvSpPr>
+          <p:cNvPr id="25" name="C1-E12 text 23" descr="sci-ppt:o023"/>
+          <p:cNvSpPr txBox="1"/>
+          <p:nvPr/>
+        </p:nvSpPr>
+        <p:spPr>
+          <a:xfrm>
+            <a:off x="45720" y="2529122"/>
+            <a:ext cx="777240" cy="208407"/>
+          </a:xfrm>
+          <a:prstGeom prst="rect">
+            <a:avLst/>
+          </a:prstGeom>
+          <a:noFill/>
+          <a:effectLst/>
+        </p:spPr>
+        <p:txBody>
+          <a:bodyPr wrap="none" lIns="18288" rIns="18288" tIns="18288" bIns="18288" anchor="t">
+            <a:spAutoFit/>
+          </a:bodyPr>
+          <a:lstStyle/>
+          <a:p>
+            <a:pPr algn="r">
+              <a:spcAft>
+                <a:spcPts val="0"/>
+              </a:spcAft>
+            </a:pPr>
+            <a:r>
+              <a:rPr sz="1050" b="0" i="0">
+                <a:solidFill>
+                  <a:srgbClr val="B4C7D2"/>
+                </a:solidFill>
+                <a:latin typeface="Arial"/>
+              </a:rPr>
+              <a:t>0</a:t>
+            </a:r>
+          </a:p>
+        </p:txBody>
+      </p:sp>
+      <p:cxnSp>
+        <p:nvCxnSpPr>
+          <p:cNvPr id="26" name="C1-E12 line 24" descr="sci-ppt:o024"/>
+          <p:cNvCxnSpPr/>
+          <p:nvPr/>
+        </p:nvCxnSpPr>
+        <p:spPr>
+          <a:xfrm>
+            <a:off x="850392" y="1616336"/>
+            <a:ext cx="64008" cy="0"/>
+          </a:xfrm>
+          <a:prstGeom prst="line">
+            <a:avLst/>
+          </a:prstGeom>
+          <a:ln w="12700">
+            <a:solidFill>
+              <a:srgbClr val="B4C7D2"/>
+            </a:solidFill>
+          </a:ln>
+          <a:effectLst/>
+        </p:spPr>
+      </p:cxnSp>
+      <p:cxnSp>
+        <p:nvCxnSpPr>
+          <p:cNvPr id="27" name="C1-E12 line 25" descr="sci-ppt:o025"/>
+          <p:cNvCxnSpPr/>
+          <p:nvPr/>
+        </p:nvCxnSpPr>
+        <p:spPr>
+          <a:xfrm>
+            <a:off x="914400" y="1616336"/>
+            <a:ext cx="4754880" cy="0"/>
+          </a:xfrm>
+          <a:prstGeom prst="line">
+            <a:avLst/>
+          </a:prstGeom>
+          <a:ln w="7620">
+            <a:solidFill>
+              <a:srgbClr val="2E4756"/>
+            </a:solidFill>
+          </a:ln>
+          <a:effectLst/>
+        </p:spPr>
+      </p:cxnSp>
+      <p:sp>
+        <p:nvSpPr>
+          <p:cNvPr id="28" name="C1-E12 text 26" descr="sci-ppt:o026"/>
+          <p:cNvSpPr txBox="1"/>
+          <p:nvPr/>
+        </p:nvSpPr>
+        <p:spPr>
+          <a:xfrm>
+            <a:off x="45720" y="1534040"/>
+            <a:ext cx="777240" cy="208407"/>
+          </a:xfrm>
+          <a:prstGeom prst="rect">
+            <a:avLst/>
+          </a:prstGeom>
+          <a:noFill/>
+          <a:effectLst/>
+        </p:spPr>
+        <p:txBody>
+          <a:bodyPr wrap="none" lIns="18288" rIns="18288" tIns="18288" bIns="18288" anchor="t">
+            <a:spAutoFit/>
+          </a:bodyPr>
+          <a:lstStyle/>
+          <a:p>
+            <a:pPr algn="r">
+              <a:spcAft>
+                <a:spcPts val="0"/>
+              </a:spcAft>
+            </a:pPr>
+            <a:r>
+              <a:rPr sz="1050" b="0" i="0">
+                <a:solidFill>
+                  <a:srgbClr val="B4C7D2"/>
+                </a:solidFill>
+                <a:latin typeface="Arial"/>
+              </a:rPr>
+              <a:t>1</a:t>
+            </a:r>
+          </a:p>
+        </p:txBody>
+      </p:sp>
+      <p:sp>
+        <p:nvSpPr>
+          <p:cNvPr id="29" name="C1-E12 text 27" descr="sci-ppt:o027"/>
+          <p:cNvSpPr txBox="1"/>
+          <p:nvPr/>
+        </p:nvSpPr>
+        <p:spPr>
+          <a:xfrm>
+            <a:off x="914400" y="5084064"/>
+            <a:ext cx="4754880" cy="231648"/>
+          </a:xfrm>
+          <a:prstGeom prst="rect">
+            <a:avLst/>
+          </a:prstGeom>
+          <a:noFill/>
+          <a:effectLst/>
+        </p:spPr>
+        <p:txBody>
+          <a:bodyPr wrap="none" lIns="18288" rIns="18288" tIns="18288" bIns="18288" anchor="t">
+            <a:spAutoFit/>
+          </a:bodyPr>
+          <a:lstStyle/>
+          <a:p>
+            <a:pPr algn="ctr">
+              <a:spcAft>
+                <a:spcPts val="0"/>
+              </a:spcAft>
+            </a:pPr>
+            <a:r>
+              <a:rPr sz="1200" b="0" i="0">
+                <a:solidFill>
+                  <a:srgbClr val="E7F0F3"/>
+                </a:solidFill>
+                <a:latin typeface="Arial"/>
+              </a:rPr>
+              <a:t>r / R</a:t>
+            </a:r>
+          </a:p>
+        </p:txBody>
+      </p:sp>
+      <p:sp>
+        <p:nvSpPr>
+          <p:cNvPr id="30" name="C1-E12 text 28" descr="sci-ppt:o028"/>
+          <p:cNvSpPr txBox="1"/>
+          <p:nvPr/>
+        </p:nvSpPr>
+        <p:spPr>
+          <a:xfrm>
+            <a:off x="365760" y="1069848"/>
+            <a:ext cx="4754880" cy="231648"/>
+          </a:xfrm>
+          <a:prstGeom prst="rect">
+            <a:avLst/>
+          </a:prstGeom>
+          <a:noFill/>
+          <a:effectLst/>
+        </p:spPr>
+        <p:txBody>
+          <a:bodyPr wrap="none" lIns="18288" rIns="18288" tIns="18288" bIns="18288" anchor="t">
             <a:spAutoFit/>
           </a:bodyPr>
           <a:lstStyle/>
@@ -3257,27 +3921,3095 @@
               </a:spcAft>
             </a:pPr>
             <a:r>
-              <a:rPr sz="2111" b="0" i="0">
+              <a:rPr sz="1200" b="0" i="0">
                 <a:solidFill>
                   <a:srgbClr val="E7F0F3"/>
                 </a:solidFill>
                 <a:latin typeface="Arial"/>
               </a:rPr>
-              <a:t>Cavity</a:t>
+              <a:t>strain rate / (Ṙ/R)</a:t>
             </a:r>
           </a:p>
         </p:txBody>
       </p:sp>
       <p:cxnSp>
         <p:nvCxnSpPr>
-          <p:cNvPr id="7" name="arrow6" descr="sci-ppt:C1-E12-006"/>
+          <p:cNvPr id="31" name="C1-E12 line 29" descr="sci-ppt:o029"/>
           <p:cNvCxnSpPr/>
           <p:nvPr/>
         </p:nvCxnSpPr>
         <p:spPr>
           <a:xfrm>
-            <a:off x="3413760" y="2621280"/>
-            <a:ext cx="1767840" cy="0"/>
+            <a:off x="914400" y="2611418"/>
+            <a:ext cx="4754880" cy="0"/>
+          </a:xfrm>
+          <a:prstGeom prst="line">
+            <a:avLst/>
+          </a:prstGeom>
+          <a:ln w="15240">
+            <a:solidFill>
+              <a:srgbClr val="2E4756"/>
+            </a:solidFill>
+          </a:ln>
+          <a:effectLst/>
+        </p:spPr>
+      </p:cxnSp>
+      <p:sp>
+        <p:nvSpPr>
+          <p:cNvPr id="32" name="C1-E12 polygon 30" descr="sci-ppt:o030"/>
+          <p:cNvSpPr/>
+          <p:nvPr/>
+        </p:nvSpPr>
+        <p:spPr>
+          <a:xfrm>
+            <a:off x="914400" y="2642515"/>
+            <a:ext cx="4754880" cy="1959068"/>
+          </a:xfrm>
+          <a:custGeom>
+            <a:avLst/>
+            <a:gdLst/>
+            <a:ahLst/>
+            <a:cxnLst/>
+            <a:rect l="l" t="t" r="r" b="b"/>
+            <a:pathLst>
+              <a:path w="4754880" h="1959068">
+                <a:moveTo>
+                  <a:pt x="0" y="1959068"/>
+                </a:moveTo>
+                <a:lnTo>
+                  <a:pt x="23893" y="1871708"/>
+                </a:lnTo>
+                <a:lnTo>
+                  <a:pt x="47787" y="1789386"/>
+                </a:lnTo>
+                <a:lnTo>
+                  <a:pt x="71681" y="1711746"/>
+                </a:lnTo>
+                <a:lnTo>
+                  <a:pt x="95575" y="1638459"/>
+                </a:lnTo>
+                <a:lnTo>
+                  <a:pt x="119469" y="1569224"/>
+                </a:lnTo>
+                <a:lnTo>
+                  <a:pt x="143363" y="1503764"/>
+                </a:lnTo>
+                <a:lnTo>
+                  <a:pt x="167257" y="1441827"/>
+                </a:lnTo>
+                <a:lnTo>
+                  <a:pt x="191150" y="1383178"/>
+                </a:lnTo>
+                <a:lnTo>
+                  <a:pt x="215044" y="1327601"/>
+                </a:lnTo>
+                <a:lnTo>
+                  <a:pt x="238938" y="1274899"/>
+                </a:lnTo>
+                <a:lnTo>
+                  <a:pt x="262832" y="1224888"/>
+                </a:lnTo>
+                <a:lnTo>
+                  <a:pt x="286726" y="1177398"/>
+                </a:lnTo>
+                <a:lnTo>
+                  <a:pt x="310620" y="1132272"/>
+                </a:lnTo>
+                <a:lnTo>
+                  <a:pt x="334514" y="1089365"/>
+                </a:lnTo>
+                <a:lnTo>
+                  <a:pt x="358408" y="1048543"/>
+                </a:lnTo>
+                <a:lnTo>
+                  <a:pt x="382301" y="1009680"/>
+                </a:lnTo>
+                <a:lnTo>
+                  <a:pt x="406195" y="972659"/>
+                </a:lnTo>
+                <a:lnTo>
+                  <a:pt x="430089" y="937374"/>
+                </a:lnTo>
+                <a:lnTo>
+                  <a:pt x="453983" y="903724"/>
+                </a:lnTo>
+                <a:lnTo>
+                  <a:pt x="477877" y="871615"/>
+                </a:lnTo>
+                <a:lnTo>
+                  <a:pt x="501771" y="840959"/>
+                </a:lnTo>
+                <a:lnTo>
+                  <a:pt x="525665" y="811676"/>
+                </a:lnTo>
+                <a:lnTo>
+                  <a:pt x="549558" y="783690"/>
+                </a:lnTo>
+                <a:lnTo>
+                  <a:pt x="573452" y="756929"/>
+                </a:lnTo>
+                <a:lnTo>
+                  <a:pt x="597346" y="731327"/>
+                </a:lnTo>
+                <a:lnTo>
+                  <a:pt x="621240" y="706823"/>
+                </a:lnTo>
+                <a:lnTo>
+                  <a:pt x="645134" y="683357"/>
+                </a:lnTo>
+                <a:lnTo>
+                  <a:pt x="669028" y="660876"/>
+                </a:lnTo>
+                <a:lnTo>
+                  <a:pt x="692922" y="639328"/>
+                </a:lnTo>
+                <a:lnTo>
+                  <a:pt x="716816" y="618666"/>
+                </a:lnTo>
+                <a:lnTo>
+                  <a:pt x="740709" y="598844"/>
+                </a:lnTo>
+                <a:lnTo>
+                  <a:pt x="764603" y="579820"/>
+                </a:lnTo>
+                <a:lnTo>
+                  <a:pt x="788497" y="561555"/>
+                </a:lnTo>
+                <a:lnTo>
+                  <a:pt x="812391" y="544010"/>
+                </a:lnTo>
+                <a:lnTo>
+                  <a:pt x="836285" y="527152"/>
+                </a:lnTo>
+                <a:lnTo>
+                  <a:pt x="860179" y="510946"/>
+                </a:lnTo>
+                <a:lnTo>
+                  <a:pt x="884073" y="495361"/>
+                </a:lnTo>
+                <a:lnTo>
+                  <a:pt x="907967" y="480368"/>
+                </a:lnTo>
+                <a:lnTo>
+                  <a:pt x="931860" y="465938"/>
+                </a:lnTo>
+                <a:lnTo>
+                  <a:pt x="955754" y="452047"/>
+                </a:lnTo>
+                <a:lnTo>
+                  <a:pt x="979648" y="438668"/>
+                </a:lnTo>
+                <a:lnTo>
+                  <a:pt x="1003542" y="425779"/>
+                </a:lnTo>
+                <a:lnTo>
+                  <a:pt x="1027436" y="413357"/>
+                </a:lnTo>
+                <a:lnTo>
+                  <a:pt x="1051330" y="401382"/>
+                </a:lnTo>
+                <a:lnTo>
+                  <a:pt x="1075224" y="389832"/>
+                </a:lnTo>
+                <a:lnTo>
+                  <a:pt x="1099117" y="378691"/>
+                </a:lnTo>
+                <a:lnTo>
+                  <a:pt x="1123011" y="367939"/>
+                </a:lnTo>
+                <a:lnTo>
+                  <a:pt x="1146905" y="357560"/>
+                </a:lnTo>
+                <a:lnTo>
+                  <a:pt x="1170799" y="347538"/>
+                </a:lnTo>
+                <a:lnTo>
+                  <a:pt x="1194693" y="337857"/>
+                </a:lnTo>
+                <a:lnTo>
+                  <a:pt x="1218587" y="328504"/>
+                </a:lnTo>
+                <a:lnTo>
+                  <a:pt x="1242481" y="319464"/>
+                </a:lnTo>
+                <a:lnTo>
+                  <a:pt x="1266375" y="310725"/>
+                </a:lnTo>
+                <a:lnTo>
+                  <a:pt x="1290268" y="302273"/>
+                </a:lnTo>
+                <a:lnTo>
+                  <a:pt x="1314162" y="294099"/>
+                </a:lnTo>
+                <a:lnTo>
+                  <a:pt x="1338056" y="286189"/>
+                </a:lnTo>
+                <a:lnTo>
+                  <a:pt x="1361950" y="278533"/>
+                </a:lnTo>
+                <a:lnTo>
+                  <a:pt x="1385844" y="271122"/>
+                </a:lnTo>
+                <a:lnTo>
+                  <a:pt x="1409738" y="263946"/>
+                </a:lnTo>
+                <a:lnTo>
+                  <a:pt x="1433632" y="256995"/>
+                </a:lnTo>
+                <a:lnTo>
+                  <a:pt x="1457526" y="250261"/>
+                </a:lnTo>
+                <a:lnTo>
+                  <a:pt x="1481419" y="243735"/>
+                </a:lnTo>
+                <a:lnTo>
+                  <a:pt x="1505313" y="237409"/>
+                </a:lnTo>
+                <a:lnTo>
+                  <a:pt x="1529207" y="231276"/>
+                </a:lnTo>
+                <a:lnTo>
+                  <a:pt x="1553101" y="225328"/>
+                </a:lnTo>
+                <a:lnTo>
+                  <a:pt x="1576995" y="219559"/>
+                </a:lnTo>
+                <a:lnTo>
+                  <a:pt x="1600889" y="213961"/>
+                </a:lnTo>
+                <a:lnTo>
+                  <a:pt x="1624783" y="208529"/>
+                </a:lnTo>
+                <a:lnTo>
+                  <a:pt x="1648676" y="203256"/>
+                </a:lnTo>
+                <a:lnTo>
+                  <a:pt x="1672570" y="198137"/>
+                </a:lnTo>
+                <a:lnTo>
+                  <a:pt x="1696464" y="193166"/>
+                </a:lnTo>
+                <a:lnTo>
+                  <a:pt x="1720358" y="188337"/>
+                </a:lnTo>
+                <a:lnTo>
+                  <a:pt x="1744252" y="183647"/>
+                </a:lnTo>
+                <a:lnTo>
+                  <a:pt x="1768146" y="179088"/>
+                </a:lnTo>
+                <a:lnTo>
+                  <a:pt x="1792040" y="174658"/>
+                </a:lnTo>
+                <a:lnTo>
+                  <a:pt x="1815934" y="170352"/>
+                </a:lnTo>
+                <a:lnTo>
+                  <a:pt x="1839827" y="166165"/>
+                </a:lnTo>
+                <a:lnTo>
+                  <a:pt x="1863721" y="162093"/>
+                </a:lnTo>
+                <a:lnTo>
+                  <a:pt x="1887615" y="158133"/>
+                </a:lnTo>
+                <a:lnTo>
+                  <a:pt x="1911509" y="154280"/>
+                </a:lnTo>
+                <a:lnTo>
+                  <a:pt x="1935403" y="150531"/>
+                </a:lnTo>
+                <a:lnTo>
+                  <a:pt x="1959297" y="146882"/>
+                </a:lnTo>
+                <a:lnTo>
+                  <a:pt x="1983191" y="143331"/>
+                </a:lnTo>
+                <a:lnTo>
+                  <a:pt x="2007085" y="139873"/>
+                </a:lnTo>
+                <a:lnTo>
+                  <a:pt x="2030978" y="136506"/>
+                </a:lnTo>
+                <a:lnTo>
+                  <a:pt x="2054872" y="133227"/>
+                </a:lnTo>
+                <a:lnTo>
+                  <a:pt x="2078766" y="130033"/>
+                </a:lnTo>
+                <a:lnTo>
+                  <a:pt x="2102660" y="126921"/>
+                </a:lnTo>
+                <a:lnTo>
+                  <a:pt x="2126554" y="123889"/>
+                </a:lnTo>
+                <a:lnTo>
+                  <a:pt x="2150448" y="120933"/>
+                </a:lnTo>
+                <a:lnTo>
+                  <a:pt x="2174342" y="118053"/>
+                </a:lnTo>
+                <a:lnTo>
+                  <a:pt x="2198235" y="115245"/>
+                </a:lnTo>
+                <a:lnTo>
+                  <a:pt x="2222129" y="112507"/>
+                </a:lnTo>
+                <a:lnTo>
+                  <a:pt x="2246023" y="109836"/>
+                </a:lnTo>
+                <a:lnTo>
+                  <a:pt x="2269917" y="107232"/>
+                </a:lnTo>
+                <a:lnTo>
+                  <a:pt x="2293811" y="104691"/>
+                </a:lnTo>
+                <a:lnTo>
+                  <a:pt x="2317705" y="102212"/>
+                </a:lnTo>
+                <a:lnTo>
+                  <a:pt x="2341599" y="99794"/>
+                </a:lnTo>
+                <a:lnTo>
+                  <a:pt x="2365493" y="97433"/>
+                </a:lnTo>
+                <a:lnTo>
+                  <a:pt x="2389386" y="95129"/>
+                </a:lnTo>
+                <a:lnTo>
+                  <a:pt x="2413280" y="92879"/>
+                </a:lnTo>
+                <a:lnTo>
+                  <a:pt x="2437174" y="90683"/>
+                </a:lnTo>
+                <a:lnTo>
+                  <a:pt x="2461068" y="88538"/>
+                </a:lnTo>
+                <a:lnTo>
+                  <a:pt x="2484962" y="86443"/>
+                </a:lnTo>
+                <a:lnTo>
+                  <a:pt x="2508856" y="84397"/>
+                </a:lnTo>
+                <a:lnTo>
+                  <a:pt x="2532750" y="82398"/>
+                </a:lnTo>
+                <a:lnTo>
+                  <a:pt x="2556644" y="80445"/>
+                </a:lnTo>
+                <a:lnTo>
+                  <a:pt x="2580537" y="78537"/>
+                </a:lnTo>
+                <a:lnTo>
+                  <a:pt x="2604431" y="76672"/>
+                </a:lnTo>
+                <a:lnTo>
+                  <a:pt x="2628325" y="74849"/>
+                </a:lnTo>
+                <a:lnTo>
+                  <a:pt x="2652219" y="73066"/>
+                </a:lnTo>
+                <a:lnTo>
+                  <a:pt x="2676113" y="71324"/>
+                </a:lnTo>
+                <a:lnTo>
+                  <a:pt x="2700007" y="69620"/>
+                </a:lnTo>
+                <a:lnTo>
+                  <a:pt x="2723901" y="67954"/>
+                </a:lnTo>
+                <a:lnTo>
+                  <a:pt x="2747794" y="66324"/>
+                </a:lnTo>
+                <a:lnTo>
+                  <a:pt x="2771688" y="64730"/>
+                </a:lnTo>
+                <a:lnTo>
+                  <a:pt x="2795582" y="63170"/>
+                </a:lnTo>
+                <a:lnTo>
+                  <a:pt x="2819476" y="61645"/>
+                </a:lnTo>
+                <a:lnTo>
+                  <a:pt x="2843370" y="60151"/>
+                </a:lnTo>
+                <a:lnTo>
+                  <a:pt x="2867264" y="58690"/>
+                </a:lnTo>
+                <a:lnTo>
+                  <a:pt x="2891158" y="57260"/>
+                </a:lnTo>
+                <a:lnTo>
+                  <a:pt x="2915052" y="55860"/>
+                </a:lnTo>
+                <a:lnTo>
+                  <a:pt x="2938945" y="54489"/>
+                </a:lnTo>
+                <a:lnTo>
+                  <a:pt x="2962839" y="53148"/>
+                </a:lnTo>
+                <a:lnTo>
+                  <a:pt x="2986733" y="51833"/>
+                </a:lnTo>
+                <a:lnTo>
+                  <a:pt x="3010627" y="50547"/>
+                </a:lnTo>
+                <a:lnTo>
+                  <a:pt x="3034521" y="49286"/>
+                </a:lnTo>
+                <a:lnTo>
+                  <a:pt x="3058415" y="48052"/>
+                </a:lnTo>
+                <a:lnTo>
+                  <a:pt x="3082309" y="46842"/>
+                </a:lnTo>
+                <a:lnTo>
+                  <a:pt x="3106203" y="45658"/>
+                </a:lnTo>
+                <a:lnTo>
+                  <a:pt x="3130096" y="44497"/>
+                </a:lnTo>
+                <a:lnTo>
+                  <a:pt x="3153990" y="43359"/>
+                </a:lnTo>
+                <a:lnTo>
+                  <a:pt x="3177884" y="42244"/>
+                </a:lnTo>
+                <a:lnTo>
+                  <a:pt x="3201778" y="41151"/>
+                </a:lnTo>
+                <a:lnTo>
+                  <a:pt x="3225672" y="40080"/>
+                </a:lnTo>
+                <a:lnTo>
+                  <a:pt x="3249566" y="39030"/>
+                </a:lnTo>
+                <a:lnTo>
+                  <a:pt x="3273460" y="38000"/>
+                </a:lnTo>
+                <a:lnTo>
+                  <a:pt x="3297353" y="36991"/>
+                </a:lnTo>
+                <a:lnTo>
+                  <a:pt x="3321247" y="36001"/>
+                </a:lnTo>
+                <a:lnTo>
+                  <a:pt x="3345141" y="35030"/>
+                </a:lnTo>
+                <a:lnTo>
+                  <a:pt x="3369035" y="34078"/>
+                </a:lnTo>
+                <a:lnTo>
+                  <a:pt x="3392929" y="33144"/>
+                </a:lnTo>
+                <a:lnTo>
+                  <a:pt x="3416823" y="32227"/>
+                </a:lnTo>
+                <a:lnTo>
+                  <a:pt x="3440717" y="31329"/>
+                </a:lnTo>
+                <a:lnTo>
+                  <a:pt x="3464611" y="30447"/>
+                </a:lnTo>
+                <a:lnTo>
+                  <a:pt x="3488504" y="29581"/>
+                </a:lnTo>
+                <a:lnTo>
+                  <a:pt x="3512398" y="28732"/>
+                </a:lnTo>
+                <a:lnTo>
+                  <a:pt x="3536292" y="27898"/>
+                </a:lnTo>
+                <a:lnTo>
+                  <a:pt x="3560186" y="27080"/>
+                </a:lnTo>
+                <a:lnTo>
+                  <a:pt x="3584080" y="26277"/>
+                </a:lnTo>
+                <a:lnTo>
+                  <a:pt x="3607974" y="25489"/>
+                </a:lnTo>
+                <a:lnTo>
+                  <a:pt x="3631868" y="24715"/>
+                </a:lnTo>
+                <a:lnTo>
+                  <a:pt x="3655762" y="23955"/>
+                </a:lnTo>
+                <a:lnTo>
+                  <a:pt x="3679655" y="23209"/>
+                </a:lnTo>
+                <a:lnTo>
+                  <a:pt x="3703549" y="22476"/>
+                </a:lnTo>
+                <a:lnTo>
+                  <a:pt x="3727443" y="21756"/>
+                </a:lnTo>
+                <a:lnTo>
+                  <a:pt x="3751337" y="21050"/>
+                </a:lnTo>
+                <a:lnTo>
+                  <a:pt x="3775231" y="20355"/>
+                </a:lnTo>
+                <a:lnTo>
+                  <a:pt x="3799125" y="19673"/>
+                </a:lnTo>
+                <a:lnTo>
+                  <a:pt x="3823019" y="19003"/>
+                </a:lnTo>
+                <a:lnTo>
+                  <a:pt x="3846912" y="18345"/>
+                </a:lnTo>
+                <a:lnTo>
+                  <a:pt x="3870806" y="17698"/>
+                </a:lnTo>
+                <a:lnTo>
+                  <a:pt x="3894700" y="17063"/>
+                </a:lnTo>
+                <a:lnTo>
+                  <a:pt x="3918594" y="16438"/>
+                </a:lnTo>
+                <a:lnTo>
+                  <a:pt x="3942488" y="15825"/>
+                </a:lnTo>
+                <a:lnTo>
+                  <a:pt x="3966382" y="15221"/>
+                </a:lnTo>
+                <a:lnTo>
+                  <a:pt x="3990276" y="14628"/>
+                </a:lnTo>
+                <a:lnTo>
+                  <a:pt x="4014170" y="14045"/>
+                </a:lnTo>
+                <a:lnTo>
+                  <a:pt x="4038063" y="13472"/>
+                </a:lnTo>
+                <a:lnTo>
+                  <a:pt x="4061957" y="12909"/>
+                </a:lnTo>
+                <a:lnTo>
+                  <a:pt x="4085851" y="12355"/>
+                </a:lnTo>
+                <a:lnTo>
+                  <a:pt x="4109745" y="11811"/>
+                </a:lnTo>
+                <a:lnTo>
+                  <a:pt x="4133639" y="11275"/>
+                </a:lnTo>
+                <a:lnTo>
+                  <a:pt x="4157533" y="10748"/>
+                </a:lnTo>
+                <a:lnTo>
+                  <a:pt x="4181427" y="10230"/>
+                </a:lnTo>
+                <a:lnTo>
+                  <a:pt x="4205321" y="9721"/>
+                </a:lnTo>
+                <a:lnTo>
+                  <a:pt x="4229214" y="9220"/>
+                </a:lnTo>
+                <a:lnTo>
+                  <a:pt x="4253108" y="8727"/>
+                </a:lnTo>
+                <a:lnTo>
+                  <a:pt x="4277002" y="8242"/>
+                </a:lnTo>
+                <a:lnTo>
+                  <a:pt x="4300896" y="7764"/>
+                </a:lnTo>
+                <a:lnTo>
+                  <a:pt x="4324790" y="7295"/>
+                </a:lnTo>
+                <a:lnTo>
+                  <a:pt x="4348684" y="6833"/>
+                </a:lnTo>
+                <a:lnTo>
+                  <a:pt x="4372578" y="6378"/>
+                </a:lnTo>
+                <a:lnTo>
+                  <a:pt x="4396471" y="5931"/>
+                </a:lnTo>
+                <a:lnTo>
+                  <a:pt x="4420365" y="5491"/>
+                </a:lnTo>
+                <a:lnTo>
+                  <a:pt x="4444259" y="5058"/>
+                </a:lnTo>
+                <a:lnTo>
+                  <a:pt x="4468153" y="4631"/>
+                </a:lnTo>
+                <a:lnTo>
+                  <a:pt x="4492047" y="4211"/>
+                </a:lnTo>
+                <a:lnTo>
+                  <a:pt x="4515941" y="3798"/>
+                </a:lnTo>
+                <a:lnTo>
+                  <a:pt x="4539835" y="3391"/>
+                </a:lnTo>
+                <a:lnTo>
+                  <a:pt x="4563729" y="2991"/>
+                </a:lnTo>
+                <a:lnTo>
+                  <a:pt x="4587622" y="2597"/>
+                </a:lnTo>
+                <a:lnTo>
+                  <a:pt x="4611516" y="2208"/>
+                </a:lnTo>
+                <a:lnTo>
+                  <a:pt x="4635410" y="1826"/>
+                </a:lnTo>
+                <a:lnTo>
+                  <a:pt x="4659304" y="1450"/>
+                </a:lnTo>
+                <a:lnTo>
+                  <a:pt x="4683198" y="1079"/>
+                </a:lnTo>
+                <a:lnTo>
+                  <a:pt x="4707092" y="714"/>
+                </a:lnTo>
+                <a:lnTo>
+                  <a:pt x="4730986" y="354"/>
+                </a:lnTo>
+                <a:lnTo>
+                  <a:pt x="4754880" y="0"/>
+                </a:lnTo>
+              </a:path>
+            </a:pathLst>
+          </a:custGeom>
+          <a:noFill/>
+          <a:ln w="38100">
+            <a:solidFill>
+              <a:srgbClr val="F28BA0"/>
+            </a:solidFill>
+          </a:ln>
+          <a:effectLst/>
+        </p:spPr>
+        <p:txBody>
+          <a:bodyPr rtlCol="0" anchor="ctr"/>
+          <a:lstStyle/>
+          <a:p>
+            <a:pPr algn="ctr"/>
+          </a:p>
+        </p:txBody>
+      </p:sp>
+      <p:sp>
+        <p:nvSpPr>
+          <p:cNvPr id="33" name="C1-E12 polygon 31" descr="sci-ppt:o031"/>
+          <p:cNvSpPr/>
+          <p:nvPr/>
+        </p:nvSpPr>
+        <p:spPr>
+          <a:xfrm>
+            <a:off x="914400" y="1616336"/>
+            <a:ext cx="4754880" cy="979534"/>
+          </a:xfrm>
+          <a:custGeom>
+            <a:avLst/>
+            <a:gdLst/>
+            <a:ahLst/>
+            <a:cxnLst/>
+            <a:rect l="l" t="t" r="r" b="b"/>
+            <a:pathLst>
+              <a:path w="4754880" h="979534">
+                <a:moveTo>
+                  <a:pt x="0" y="0"/>
+                </a:moveTo>
+                <a:lnTo>
+                  <a:pt x="23893" y="43680"/>
+                </a:lnTo>
+                <a:lnTo>
+                  <a:pt x="47787" y="84841"/>
+                </a:lnTo>
+                <a:lnTo>
+                  <a:pt x="71681" y="123661"/>
+                </a:lnTo>
+                <a:lnTo>
+                  <a:pt x="95575" y="160305"/>
+                </a:lnTo>
+                <a:lnTo>
+                  <a:pt x="119469" y="194922"/>
+                </a:lnTo>
+                <a:lnTo>
+                  <a:pt x="143363" y="227652"/>
+                </a:lnTo>
+                <a:lnTo>
+                  <a:pt x="167257" y="258621"/>
+                </a:lnTo>
+                <a:lnTo>
+                  <a:pt x="191150" y="287945"/>
+                </a:lnTo>
+                <a:lnTo>
+                  <a:pt x="215044" y="315733"/>
+                </a:lnTo>
+                <a:lnTo>
+                  <a:pt x="238938" y="342084"/>
+                </a:lnTo>
+                <a:lnTo>
+                  <a:pt x="262832" y="367090"/>
+                </a:lnTo>
+                <a:lnTo>
+                  <a:pt x="286726" y="390835"/>
+                </a:lnTo>
+                <a:lnTo>
+                  <a:pt x="310620" y="413398"/>
+                </a:lnTo>
+                <a:lnTo>
+                  <a:pt x="334514" y="434851"/>
+                </a:lnTo>
+                <a:lnTo>
+                  <a:pt x="358408" y="455263"/>
+                </a:lnTo>
+                <a:lnTo>
+                  <a:pt x="382301" y="474694"/>
+                </a:lnTo>
+                <a:lnTo>
+                  <a:pt x="406195" y="493204"/>
+                </a:lnTo>
+                <a:lnTo>
+                  <a:pt x="430089" y="510847"/>
+                </a:lnTo>
+                <a:lnTo>
+                  <a:pt x="453983" y="527672"/>
+                </a:lnTo>
+                <a:lnTo>
+                  <a:pt x="477877" y="543727"/>
+                </a:lnTo>
+                <a:lnTo>
+                  <a:pt x="501771" y="559054"/>
+                </a:lnTo>
+                <a:lnTo>
+                  <a:pt x="525665" y="573696"/>
+                </a:lnTo>
+                <a:lnTo>
+                  <a:pt x="549558" y="587689"/>
+                </a:lnTo>
+                <a:lnTo>
+                  <a:pt x="573452" y="601069"/>
+                </a:lnTo>
+                <a:lnTo>
+                  <a:pt x="597346" y="613870"/>
+                </a:lnTo>
+                <a:lnTo>
+                  <a:pt x="621240" y="626123"/>
+                </a:lnTo>
+                <a:lnTo>
+                  <a:pt x="645134" y="637855"/>
+                </a:lnTo>
+                <a:lnTo>
+                  <a:pt x="669028" y="649096"/>
+                </a:lnTo>
+                <a:lnTo>
+                  <a:pt x="692922" y="659870"/>
+                </a:lnTo>
+                <a:lnTo>
+                  <a:pt x="716816" y="670201"/>
+                </a:lnTo>
+                <a:lnTo>
+                  <a:pt x="740709" y="680112"/>
+                </a:lnTo>
+                <a:lnTo>
+                  <a:pt x="764603" y="689624"/>
+                </a:lnTo>
+                <a:lnTo>
+                  <a:pt x="788497" y="698757"/>
+                </a:lnTo>
+                <a:lnTo>
+                  <a:pt x="812391" y="707529"/>
+                </a:lnTo>
+                <a:lnTo>
+                  <a:pt x="836285" y="715958"/>
+                </a:lnTo>
+                <a:lnTo>
+                  <a:pt x="860179" y="724061"/>
+                </a:lnTo>
+                <a:lnTo>
+                  <a:pt x="884073" y="731854"/>
+                </a:lnTo>
+                <a:lnTo>
+                  <a:pt x="907967" y="739350"/>
+                </a:lnTo>
+                <a:lnTo>
+                  <a:pt x="931860" y="746565"/>
+                </a:lnTo>
+                <a:lnTo>
+                  <a:pt x="955754" y="753511"/>
+                </a:lnTo>
+                <a:lnTo>
+                  <a:pt x="979648" y="760200"/>
+                </a:lnTo>
+                <a:lnTo>
+                  <a:pt x="1003542" y="766644"/>
+                </a:lnTo>
+                <a:lnTo>
+                  <a:pt x="1027436" y="772855"/>
+                </a:lnTo>
+                <a:lnTo>
+                  <a:pt x="1051330" y="778843"/>
+                </a:lnTo>
+                <a:lnTo>
+                  <a:pt x="1075224" y="784618"/>
+                </a:lnTo>
+                <a:lnTo>
+                  <a:pt x="1099117" y="790189"/>
+                </a:lnTo>
+                <a:lnTo>
+                  <a:pt x="1123011" y="795565"/>
+                </a:lnTo>
+                <a:lnTo>
+                  <a:pt x="1146905" y="800754"/>
+                </a:lnTo>
+                <a:lnTo>
+                  <a:pt x="1170799" y="805765"/>
+                </a:lnTo>
+                <a:lnTo>
+                  <a:pt x="1194693" y="810605"/>
+                </a:lnTo>
+                <a:lnTo>
+                  <a:pt x="1218587" y="815282"/>
+                </a:lnTo>
+                <a:lnTo>
+                  <a:pt x="1242481" y="819802"/>
+                </a:lnTo>
+                <a:lnTo>
+                  <a:pt x="1266375" y="824172"/>
+                </a:lnTo>
+                <a:lnTo>
+                  <a:pt x="1290268" y="828397"/>
+                </a:lnTo>
+                <a:lnTo>
+                  <a:pt x="1314162" y="832485"/>
+                </a:lnTo>
+                <a:lnTo>
+                  <a:pt x="1338056" y="836440"/>
+                </a:lnTo>
+                <a:lnTo>
+                  <a:pt x="1361950" y="840267"/>
+                </a:lnTo>
+                <a:lnTo>
+                  <a:pt x="1385844" y="843973"/>
+                </a:lnTo>
+                <a:lnTo>
+                  <a:pt x="1409738" y="847561"/>
+                </a:lnTo>
+                <a:lnTo>
+                  <a:pt x="1433632" y="851037"/>
+                </a:lnTo>
+                <a:lnTo>
+                  <a:pt x="1457526" y="854404"/>
+                </a:lnTo>
+                <a:lnTo>
+                  <a:pt x="1481419" y="857667"/>
+                </a:lnTo>
+                <a:lnTo>
+                  <a:pt x="1505313" y="860830"/>
+                </a:lnTo>
+                <a:lnTo>
+                  <a:pt x="1529207" y="863896"/>
+                </a:lnTo>
+                <a:lnTo>
+                  <a:pt x="1553101" y="866870"/>
+                </a:lnTo>
+                <a:lnTo>
+                  <a:pt x="1576995" y="869755"/>
+                </a:lnTo>
+                <a:lnTo>
+                  <a:pt x="1600889" y="872553"/>
+                </a:lnTo>
+                <a:lnTo>
+                  <a:pt x="1624783" y="875270"/>
+                </a:lnTo>
+                <a:lnTo>
+                  <a:pt x="1648676" y="877906"/>
+                </a:lnTo>
+                <a:lnTo>
+                  <a:pt x="1672570" y="880466"/>
+                </a:lnTo>
+                <a:lnTo>
+                  <a:pt x="1696464" y="882951"/>
+                </a:lnTo>
+                <a:lnTo>
+                  <a:pt x="1720358" y="885365"/>
+                </a:lnTo>
+                <a:lnTo>
+                  <a:pt x="1744252" y="887711"/>
+                </a:lnTo>
+                <a:lnTo>
+                  <a:pt x="1768146" y="889990"/>
+                </a:lnTo>
+                <a:lnTo>
+                  <a:pt x="1792040" y="892205"/>
+                </a:lnTo>
+                <a:lnTo>
+                  <a:pt x="1815934" y="894358"/>
+                </a:lnTo>
+                <a:lnTo>
+                  <a:pt x="1839827" y="896451"/>
+                </a:lnTo>
+                <a:lnTo>
+                  <a:pt x="1863721" y="898487"/>
+                </a:lnTo>
+                <a:lnTo>
+                  <a:pt x="1887615" y="900468"/>
+                </a:lnTo>
+                <a:lnTo>
+                  <a:pt x="1911509" y="902394"/>
+                </a:lnTo>
+                <a:lnTo>
+                  <a:pt x="1935403" y="904269"/>
+                </a:lnTo>
+                <a:lnTo>
+                  <a:pt x="1959297" y="906093"/>
+                </a:lnTo>
+                <a:lnTo>
+                  <a:pt x="1983191" y="907869"/>
+                </a:lnTo>
+                <a:lnTo>
+                  <a:pt x="2007085" y="909598"/>
+                </a:lnTo>
+                <a:lnTo>
+                  <a:pt x="2030978" y="911281"/>
+                </a:lnTo>
+                <a:lnTo>
+                  <a:pt x="2054872" y="912921"/>
+                </a:lnTo>
+                <a:lnTo>
+                  <a:pt x="2078766" y="914518"/>
+                </a:lnTo>
+                <a:lnTo>
+                  <a:pt x="2102660" y="916074"/>
+                </a:lnTo>
+                <a:lnTo>
+                  <a:pt x="2126554" y="917590"/>
+                </a:lnTo>
+                <a:lnTo>
+                  <a:pt x="2150448" y="919067"/>
+                </a:lnTo>
+                <a:lnTo>
+                  <a:pt x="2174342" y="920507"/>
+                </a:lnTo>
+                <a:lnTo>
+                  <a:pt x="2198235" y="921912"/>
+                </a:lnTo>
+                <a:lnTo>
+                  <a:pt x="2222129" y="923281"/>
+                </a:lnTo>
+                <a:lnTo>
+                  <a:pt x="2246023" y="924616"/>
+                </a:lnTo>
+                <a:lnTo>
+                  <a:pt x="2269917" y="925918"/>
+                </a:lnTo>
+                <a:lnTo>
+                  <a:pt x="2293811" y="927188"/>
+                </a:lnTo>
+                <a:lnTo>
+                  <a:pt x="2317705" y="928428"/>
+                </a:lnTo>
+                <a:lnTo>
+                  <a:pt x="2341599" y="929637"/>
+                </a:lnTo>
+                <a:lnTo>
+                  <a:pt x="2365493" y="930818"/>
+                </a:lnTo>
+                <a:lnTo>
+                  <a:pt x="2389386" y="931970"/>
+                </a:lnTo>
+                <a:lnTo>
+                  <a:pt x="2413280" y="933094"/>
+                </a:lnTo>
+                <a:lnTo>
+                  <a:pt x="2437174" y="934193"/>
+                </a:lnTo>
+                <a:lnTo>
+                  <a:pt x="2461068" y="935265"/>
+                </a:lnTo>
+                <a:lnTo>
+                  <a:pt x="2484962" y="936312"/>
+                </a:lnTo>
+                <a:lnTo>
+                  <a:pt x="2508856" y="937335"/>
+                </a:lnTo>
+                <a:lnTo>
+                  <a:pt x="2532750" y="938335"/>
+                </a:lnTo>
+                <a:lnTo>
+                  <a:pt x="2556644" y="939311"/>
+                </a:lnTo>
+                <a:lnTo>
+                  <a:pt x="2580537" y="940266"/>
+                </a:lnTo>
+                <a:lnTo>
+                  <a:pt x="2604431" y="941198"/>
+                </a:lnTo>
+                <a:lnTo>
+                  <a:pt x="2628325" y="942110"/>
+                </a:lnTo>
+                <a:lnTo>
+                  <a:pt x="2652219" y="943001"/>
+                </a:lnTo>
+                <a:lnTo>
+                  <a:pt x="2676113" y="943872"/>
+                </a:lnTo>
+                <a:lnTo>
+                  <a:pt x="2700007" y="944724"/>
+                </a:lnTo>
+                <a:lnTo>
+                  <a:pt x="2723901" y="945557"/>
+                </a:lnTo>
+                <a:lnTo>
+                  <a:pt x="2747794" y="946372"/>
+                </a:lnTo>
+                <a:lnTo>
+                  <a:pt x="2771688" y="947169"/>
+                </a:lnTo>
+                <a:lnTo>
+                  <a:pt x="2795582" y="947949"/>
+                </a:lnTo>
+                <a:lnTo>
+                  <a:pt x="2819476" y="948712"/>
+                </a:lnTo>
+                <a:lnTo>
+                  <a:pt x="2843370" y="949458"/>
+                </a:lnTo>
+                <a:lnTo>
+                  <a:pt x="2867264" y="950189"/>
+                </a:lnTo>
+                <a:lnTo>
+                  <a:pt x="2891158" y="950904"/>
+                </a:lnTo>
+                <a:lnTo>
+                  <a:pt x="2915052" y="951604"/>
+                </a:lnTo>
+                <a:lnTo>
+                  <a:pt x="2938945" y="952289"/>
+                </a:lnTo>
+                <a:lnTo>
+                  <a:pt x="2962839" y="952960"/>
+                </a:lnTo>
+                <a:lnTo>
+                  <a:pt x="2986733" y="953617"/>
+                </a:lnTo>
+                <a:lnTo>
+                  <a:pt x="3010627" y="954261"/>
+                </a:lnTo>
+                <a:lnTo>
+                  <a:pt x="3034521" y="954891"/>
+                </a:lnTo>
+                <a:lnTo>
+                  <a:pt x="3058415" y="955508"/>
+                </a:lnTo>
+                <a:lnTo>
+                  <a:pt x="3082309" y="956113"/>
+                </a:lnTo>
+                <a:lnTo>
+                  <a:pt x="3106203" y="956705"/>
+                </a:lnTo>
+                <a:lnTo>
+                  <a:pt x="3130096" y="957286"/>
+                </a:lnTo>
+                <a:lnTo>
+                  <a:pt x="3153990" y="957855"/>
+                </a:lnTo>
+                <a:lnTo>
+                  <a:pt x="3177884" y="958412"/>
+                </a:lnTo>
+                <a:lnTo>
+                  <a:pt x="3201778" y="958958"/>
+                </a:lnTo>
+                <a:lnTo>
+                  <a:pt x="3225672" y="959494"/>
+                </a:lnTo>
+                <a:lnTo>
+                  <a:pt x="3249566" y="960019"/>
+                </a:lnTo>
+                <a:lnTo>
+                  <a:pt x="3273460" y="960534"/>
+                </a:lnTo>
+                <a:lnTo>
+                  <a:pt x="3297353" y="961039"/>
+                </a:lnTo>
+                <a:lnTo>
+                  <a:pt x="3321247" y="961534"/>
+                </a:lnTo>
+                <a:lnTo>
+                  <a:pt x="3345141" y="962019"/>
+                </a:lnTo>
+                <a:lnTo>
+                  <a:pt x="3369035" y="962495"/>
+                </a:lnTo>
+                <a:lnTo>
+                  <a:pt x="3392929" y="962962"/>
+                </a:lnTo>
+                <a:lnTo>
+                  <a:pt x="3416823" y="963420"/>
+                </a:lnTo>
+                <a:lnTo>
+                  <a:pt x="3440717" y="963870"/>
+                </a:lnTo>
+                <a:lnTo>
+                  <a:pt x="3464611" y="964311"/>
+                </a:lnTo>
+                <a:lnTo>
+                  <a:pt x="3488504" y="964743"/>
+                </a:lnTo>
+                <a:lnTo>
+                  <a:pt x="3512398" y="965168"/>
+                </a:lnTo>
+                <a:lnTo>
+                  <a:pt x="3536292" y="965585"/>
+                </a:lnTo>
+                <a:lnTo>
+                  <a:pt x="3560186" y="965994"/>
+                </a:lnTo>
+                <a:lnTo>
+                  <a:pt x="3584080" y="966395"/>
+                </a:lnTo>
+                <a:lnTo>
+                  <a:pt x="3607974" y="966790"/>
+                </a:lnTo>
+                <a:lnTo>
+                  <a:pt x="3631868" y="967177"/>
+                </a:lnTo>
+                <a:lnTo>
+                  <a:pt x="3655762" y="967556"/>
+                </a:lnTo>
+                <a:lnTo>
+                  <a:pt x="3679655" y="967930"/>
+                </a:lnTo>
+                <a:lnTo>
+                  <a:pt x="3703549" y="968296"/>
+                </a:lnTo>
+                <a:lnTo>
+                  <a:pt x="3727443" y="968656"/>
+                </a:lnTo>
+                <a:lnTo>
+                  <a:pt x="3751337" y="969009"/>
+                </a:lnTo>
+                <a:lnTo>
+                  <a:pt x="3775231" y="969356"/>
+                </a:lnTo>
+                <a:lnTo>
+                  <a:pt x="3799125" y="969697"/>
+                </a:lnTo>
+                <a:lnTo>
+                  <a:pt x="3823019" y="970032"/>
+                </a:lnTo>
+                <a:lnTo>
+                  <a:pt x="3846912" y="970361"/>
+                </a:lnTo>
+                <a:lnTo>
+                  <a:pt x="3870806" y="970685"/>
+                </a:lnTo>
+                <a:lnTo>
+                  <a:pt x="3894700" y="971003"/>
+                </a:lnTo>
+                <a:lnTo>
+                  <a:pt x="3918594" y="971315"/>
+                </a:lnTo>
+                <a:lnTo>
+                  <a:pt x="3942488" y="971622"/>
+                </a:lnTo>
+                <a:lnTo>
+                  <a:pt x="3966382" y="971923"/>
+                </a:lnTo>
+                <a:lnTo>
+                  <a:pt x="3990276" y="972220"/>
+                </a:lnTo>
+                <a:lnTo>
+                  <a:pt x="4014170" y="972511"/>
+                </a:lnTo>
+                <a:lnTo>
+                  <a:pt x="4038063" y="972798"/>
+                </a:lnTo>
+                <a:lnTo>
+                  <a:pt x="4061957" y="973079"/>
+                </a:lnTo>
+                <a:lnTo>
+                  <a:pt x="4085851" y="973356"/>
+                </a:lnTo>
+                <a:lnTo>
+                  <a:pt x="4109745" y="973629"/>
+                </a:lnTo>
+                <a:lnTo>
+                  <a:pt x="4133639" y="973897"/>
+                </a:lnTo>
+                <a:lnTo>
+                  <a:pt x="4157533" y="974160"/>
+                </a:lnTo>
+                <a:lnTo>
+                  <a:pt x="4181427" y="974419"/>
+                </a:lnTo>
+                <a:lnTo>
+                  <a:pt x="4205321" y="974674"/>
+                </a:lnTo>
+                <a:lnTo>
+                  <a:pt x="4229214" y="974924"/>
+                </a:lnTo>
+                <a:lnTo>
+                  <a:pt x="4253108" y="975171"/>
+                </a:lnTo>
+                <a:lnTo>
+                  <a:pt x="4277002" y="975413"/>
+                </a:lnTo>
+                <a:lnTo>
+                  <a:pt x="4300896" y="975652"/>
+                </a:lnTo>
+                <a:lnTo>
+                  <a:pt x="4324790" y="975887"/>
+                </a:lnTo>
+                <a:lnTo>
+                  <a:pt x="4348684" y="976117"/>
+                </a:lnTo>
+                <a:lnTo>
+                  <a:pt x="4372578" y="976345"/>
+                </a:lnTo>
+                <a:lnTo>
+                  <a:pt x="4396471" y="976568"/>
+                </a:lnTo>
+                <a:lnTo>
+                  <a:pt x="4420365" y="976789"/>
+                </a:lnTo>
+                <a:lnTo>
+                  <a:pt x="4444259" y="977005"/>
+                </a:lnTo>
+                <a:lnTo>
+                  <a:pt x="4468153" y="977218"/>
+                </a:lnTo>
+                <a:lnTo>
+                  <a:pt x="4492047" y="977428"/>
+                </a:lnTo>
+                <a:lnTo>
+                  <a:pt x="4515941" y="977635"/>
+                </a:lnTo>
+                <a:lnTo>
+                  <a:pt x="4539835" y="977838"/>
+                </a:lnTo>
+                <a:lnTo>
+                  <a:pt x="4563729" y="978039"/>
+                </a:lnTo>
+                <a:lnTo>
+                  <a:pt x="4587622" y="978236"/>
+                </a:lnTo>
+                <a:lnTo>
+                  <a:pt x="4611516" y="978430"/>
+                </a:lnTo>
+                <a:lnTo>
+                  <a:pt x="4635410" y="978621"/>
+                </a:lnTo>
+                <a:lnTo>
+                  <a:pt x="4659304" y="978809"/>
+                </a:lnTo>
+                <a:lnTo>
+                  <a:pt x="4683198" y="978995"/>
+                </a:lnTo>
+                <a:lnTo>
+                  <a:pt x="4707092" y="979177"/>
+                </a:lnTo>
+                <a:lnTo>
+                  <a:pt x="4730986" y="979357"/>
+                </a:lnTo>
+                <a:lnTo>
+                  <a:pt x="4754880" y="979534"/>
+                </a:lnTo>
+              </a:path>
+            </a:pathLst>
+          </a:custGeom>
+          <a:noFill/>
+          <a:ln w="38100">
+            <a:solidFill>
+              <a:srgbClr val="8EDBD4"/>
+            </a:solidFill>
+          </a:ln>
+          <a:effectLst/>
+        </p:spPr>
+        <p:txBody>
+          <a:bodyPr rtlCol="0" anchor="ctr"/>
+          <a:lstStyle/>
+          <a:p>
+            <a:pPr algn="ctr"/>
+          </a:p>
+        </p:txBody>
+      </p:sp>
+      <p:sp>
+        <p:nvSpPr>
+          <p:cNvPr id="34" name="C1-E12 text 32" descr="sci-ppt:o032"/>
+          <p:cNvSpPr txBox="1"/>
+          <p:nvPr/>
+        </p:nvSpPr>
+        <p:spPr>
+          <a:xfrm>
+            <a:off x="1463040" y="3962848"/>
+            <a:ext cx="2743200" cy="231648"/>
+          </a:xfrm>
+          <a:prstGeom prst="rect">
+            <a:avLst/>
+          </a:prstGeom>
+          <a:noFill/>
+          <a:effectLst/>
+        </p:spPr>
+        <p:txBody>
+          <a:bodyPr wrap="none" lIns="18288" rIns="18288" tIns="18288" bIns="18288" anchor="t">
+            <a:spAutoFit/>
+          </a:bodyPr>
+          <a:lstStyle/>
+          <a:p>
+            <a:pPr algn="l">
+              <a:spcAft>
+                <a:spcPts val="0"/>
+              </a:spcAft>
+            </a:pPr>
+            <a:r>
+              <a:rPr sz="1200" b="0" i="0">
+                <a:solidFill>
+                  <a:srgbClr val="F28BA0"/>
+                </a:solidFill>
+                <a:latin typeface="Arial"/>
+              </a:rPr>
+              <a:t>Dᵣᵣ = −2R²Ṙ/r³ (radial)</a:t>
+            </a:r>
+          </a:p>
+        </p:txBody>
+      </p:sp>
+      <p:sp>
+        <p:nvSpPr>
+          <p:cNvPr id="35" name="C1-E12 text 33" descr="sci-ppt:o033"/>
+          <p:cNvSpPr txBox="1"/>
+          <p:nvPr/>
+        </p:nvSpPr>
+        <p:spPr>
+          <a:xfrm>
+            <a:off x="1780032" y="1532964"/>
+            <a:ext cx="3108960" cy="231648"/>
+          </a:xfrm>
+          <a:prstGeom prst="rect">
+            <a:avLst/>
+          </a:prstGeom>
+          <a:noFill/>
+          <a:effectLst/>
+        </p:spPr>
+        <p:txBody>
+          <a:bodyPr wrap="none" lIns="18288" rIns="18288" tIns="18288" bIns="18288" anchor="t">
+            <a:spAutoFit/>
+          </a:bodyPr>
+          <a:lstStyle/>
+          <a:p>
+            <a:pPr algn="l">
+              <a:spcAft>
+                <a:spcPts val="0"/>
+              </a:spcAft>
+            </a:pPr>
+            <a:r>
+              <a:rPr sz="1200" b="0" i="0">
+                <a:solidFill>
+                  <a:srgbClr val="8EDBD4"/>
+                </a:solidFill>
+                <a:latin typeface="Arial"/>
+              </a:rPr>
+              <a:t>D_θθ = D_ψψ = R²Ṙ/r³ (tangential)</a:t>
+            </a:r>
+          </a:p>
+        </p:txBody>
+      </p:sp>
+      <p:sp>
+        <p:nvSpPr>
+          <p:cNvPr id="36" name="C1-E12 text 34" descr="sci-ppt:o034"/>
+          <p:cNvSpPr txBox="1"/>
+          <p:nvPr/>
+        </p:nvSpPr>
+        <p:spPr>
+          <a:xfrm>
+            <a:off x="914400" y="5440680"/>
+            <a:ext cx="4846320" cy="239395"/>
+          </a:xfrm>
+          <a:prstGeom prst="rect">
+            <a:avLst/>
+          </a:prstGeom>
+          <a:noFill/>
+          <a:effectLst/>
+        </p:spPr>
+        <p:txBody>
+          <a:bodyPr wrap="none" lIns="18288" rIns="18288" tIns="18288" bIns="18288" anchor="t">
+            <a:spAutoFit/>
+          </a:bodyPr>
+          <a:lstStyle/>
+          <a:p>
+            <a:pPr algn="l">
+              <a:spcAft>
+                <a:spcPts val="0"/>
+              </a:spcAft>
+            </a:pPr>
+            <a:r>
+              <a:rPr sz="1250" b="0" i="0">
+                <a:solidFill>
+                  <a:srgbClr val="E7F0F3"/>
+                </a:solidFill>
+                <a:latin typeface="Arial"/>
+              </a:rPr>
+              <a:t>Dᵣᵣ + 2D_θθ = 0: no net volume change (incompressible).</a:t>
+            </a:r>
+          </a:p>
+        </p:txBody>
+      </p:sp>
+      <p:cxnSp>
+        <p:nvCxnSpPr>
+          <p:cNvPr id="37" name="C1-E12 line 35" descr="sci-ppt:o035"/>
+          <p:cNvCxnSpPr/>
+          <p:nvPr/>
+        </p:nvCxnSpPr>
+        <p:spPr>
+          <a:xfrm>
+            <a:off x="6583680" y="4800600"/>
+            <a:ext cx="5120640" cy="0"/>
+          </a:xfrm>
+          <a:prstGeom prst="line">
+            <a:avLst/>
+          </a:prstGeom>
+          <a:ln w="19050">
+            <a:solidFill>
+              <a:srgbClr val="B4C7D2"/>
+            </a:solidFill>
+          </a:ln>
+          <a:effectLst/>
+        </p:spPr>
+      </p:cxnSp>
+      <p:cxnSp>
+        <p:nvCxnSpPr>
+          <p:cNvPr id="38" name="C1-E12 line 36" descr="sci-ppt:o036"/>
+          <p:cNvCxnSpPr/>
+          <p:nvPr/>
+        </p:nvCxnSpPr>
+        <p:spPr>
+          <a:xfrm>
+            <a:off x="6583680" y="1417320"/>
+            <a:ext cx="0" cy="3383280"/>
+          </a:xfrm>
+          <a:prstGeom prst="line">
+            <a:avLst/>
+          </a:prstGeom>
+          <a:ln w="19050">
+            <a:solidFill>
+              <a:srgbClr val="B4C7D2"/>
+            </a:solidFill>
+          </a:ln>
+          <a:effectLst/>
+        </p:spPr>
+      </p:cxnSp>
+      <p:cxnSp>
+        <p:nvCxnSpPr>
+          <p:cNvPr id="39" name="C1-E12 line 37" descr="sci-ppt:o037"/>
+          <p:cNvCxnSpPr/>
+          <p:nvPr/>
+        </p:nvCxnSpPr>
+        <p:spPr>
+          <a:xfrm>
+            <a:off x="6583680" y="4800600"/>
+            <a:ext cx="0" cy="64008"/>
+          </a:xfrm>
+          <a:prstGeom prst="line">
+            <a:avLst/>
+          </a:prstGeom>
+          <a:ln w="12700">
+            <a:solidFill>
+              <a:srgbClr val="B4C7D2"/>
+            </a:solidFill>
+          </a:ln>
+          <a:effectLst/>
+        </p:spPr>
+      </p:cxnSp>
+      <p:cxnSp>
+        <p:nvCxnSpPr>
+          <p:cNvPr id="40" name="C1-E12 line 38" descr="sci-ppt:o038"/>
+          <p:cNvCxnSpPr/>
+          <p:nvPr/>
+        </p:nvCxnSpPr>
+        <p:spPr>
+          <a:xfrm>
+            <a:off x="6583680" y="1417320"/>
+            <a:ext cx="0" cy="3383280"/>
+          </a:xfrm>
+          <a:prstGeom prst="line">
+            <a:avLst/>
+          </a:prstGeom>
+          <a:ln w="7620">
+            <a:solidFill>
+              <a:srgbClr val="2E4756"/>
+            </a:solidFill>
+          </a:ln>
+          <a:effectLst/>
+        </p:spPr>
+      </p:cxnSp>
+      <p:sp>
+        <p:nvSpPr>
+          <p:cNvPr id="41" name="C1-E12 text 39" descr="sci-ppt:o039"/>
+          <p:cNvSpPr txBox="1"/>
+          <p:nvPr/>
+        </p:nvSpPr>
+        <p:spPr>
+          <a:xfrm>
+            <a:off x="6126480" y="4882896"/>
+            <a:ext cx="914400" cy="208407"/>
+          </a:xfrm>
+          <a:prstGeom prst="rect">
+            <a:avLst/>
+          </a:prstGeom>
+          <a:noFill/>
+          <a:effectLst/>
+        </p:spPr>
+        <p:txBody>
+          <a:bodyPr wrap="none" lIns="18288" rIns="18288" tIns="18288" bIns="18288" anchor="t">
+            <a:spAutoFit/>
+          </a:bodyPr>
+          <a:lstStyle/>
+          <a:p>
+            <a:pPr algn="ctr">
+              <a:spcAft>
+                <a:spcPts val="0"/>
+              </a:spcAft>
+            </a:pPr>
+            <a:r>
+              <a:rPr sz="1050" b="0" i="0">
+                <a:solidFill>
+                  <a:srgbClr val="B4C7D2"/>
+                </a:solidFill>
+                <a:latin typeface="Arial"/>
+              </a:rPr>
+              <a:t>1</a:t>
+            </a:r>
+          </a:p>
+        </p:txBody>
+      </p:sp>
+      <p:cxnSp>
+        <p:nvCxnSpPr>
+          <p:cNvPr id="42" name="C1-E12 line 40" descr="sci-ppt:o040"/>
+          <p:cNvCxnSpPr/>
+          <p:nvPr/>
+        </p:nvCxnSpPr>
+        <p:spPr>
+          <a:xfrm>
+            <a:off x="8290560" y="4800600"/>
+            <a:ext cx="0" cy="64008"/>
+          </a:xfrm>
+          <a:prstGeom prst="line">
+            <a:avLst/>
+          </a:prstGeom>
+          <a:ln w="12700">
+            <a:solidFill>
+              <a:srgbClr val="B4C7D2"/>
+            </a:solidFill>
+          </a:ln>
+          <a:effectLst/>
+        </p:spPr>
+      </p:cxnSp>
+      <p:cxnSp>
+        <p:nvCxnSpPr>
+          <p:cNvPr id="43" name="C1-E12 line 41" descr="sci-ppt:o041"/>
+          <p:cNvCxnSpPr/>
+          <p:nvPr/>
+        </p:nvCxnSpPr>
+        <p:spPr>
+          <a:xfrm>
+            <a:off x="8290560" y="1417320"/>
+            <a:ext cx="0" cy="3383280"/>
+          </a:xfrm>
+          <a:prstGeom prst="line">
+            <a:avLst/>
+          </a:prstGeom>
+          <a:ln w="7620">
+            <a:solidFill>
+              <a:srgbClr val="2E4756"/>
+            </a:solidFill>
+          </a:ln>
+          <a:effectLst/>
+        </p:spPr>
+      </p:cxnSp>
+      <p:sp>
+        <p:nvSpPr>
+          <p:cNvPr id="44" name="C1-E12 text 42" descr="sci-ppt:o042"/>
+          <p:cNvSpPr txBox="1"/>
+          <p:nvPr/>
+        </p:nvSpPr>
+        <p:spPr>
+          <a:xfrm>
+            <a:off x="7833360" y="4882896"/>
+            <a:ext cx="914400" cy="208407"/>
+          </a:xfrm>
+          <a:prstGeom prst="rect">
+            <a:avLst/>
+          </a:prstGeom>
+          <a:noFill/>
+          <a:effectLst/>
+        </p:spPr>
+        <p:txBody>
+          <a:bodyPr wrap="none" lIns="18288" rIns="18288" tIns="18288" bIns="18288" anchor="t">
+            <a:spAutoFit/>
+          </a:bodyPr>
+          <a:lstStyle/>
+          <a:p>
+            <a:pPr algn="ctr">
+              <a:spcAft>
+                <a:spcPts val="0"/>
+              </a:spcAft>
+            </a:pPr>
+            <a:r>
+              <a:rPr sz="1050" b="0" i="0">
+                <a:solidFill>
+                  <a:srgbClr val="B4C7D2"/>
+                </a:solidFill>
+                <a:latin typeface="Arial"/>
+              </a:rPr>
+              <a:t>2</a:t>
+            </a:r>
+          </a:p>
+        </p:txBody>
+      </p:sp>
+      <p:cxnSp>
+        <p:nvCxnSpPr>
+          <p:cNvPr id="45" name="C1-E12 line 43" descr="sci-ppt:o043"/>
+          <p:cNvCxnSpPr/>
+          <p:nvPr/>
+        </p:nvCxnSpPr>
+        <p:spPr>
+          <a:xfrm>
+            <a:off x="9997440" y="4800600"/>
+            <a:ext cx="0" cy="64008"/>
+          </a:xfrm>
+          <a:prstGeom prst="line">
+            <a:avLst/>
+          </a:prstGeom>
+          <a:ln w="12700">
+            <a:solidFill>
+              <a:srgbClr val="B4C7D2"/>
+            </a:solidFill>
+          </a:ln>
+          <a:effectLst/>
+        </p:spPr>
+      </p:cxnSp>
+      <p:cxnSp>
+        <p:nvCxnSpPr>
+          <p:cNvPr id="46" name="C1-E12 line 44" descr="sci-ppt:o044"/>
+          <p:cNvCxnSpPr/>
+          <p:nvPr/>
+        </p:nvCxnSpPr>
+        <p:spPr>
+          <a:xfrm>
+            <a:off x="9997440" y="1417320"/>
+            <a:ext cx="0" cy="3383280"/>
+          </a:xfrm>
+          <a:prstGeom prst="line">
+            <a:avLst/>
+          </a:prstGeom>
+          <a:ln w="7620">
+            <a:solidFill>
+              <a:srgbClr val="2E4756"/>
+            </a:solidFill>
+          </a:ln>
+          <a:effectLst/>
+        </p:spPr>
+      </p:cxnSp>
+      <p:sp>
+        <p:nvSpPr>
+          <p:cNvPr id="47" name="C1-E12 text 45" descr="sci-ppt:o045"/>
+          <p:cNvSpPr txBox="1"/>
+          <p:nvPr/>
+        </p:nvSpPr>
+        <p:spPr>
+          <a:xfrm>
+            <a:off x="9540240" y="4882896"/>
+            <a:ext cx="914400" cy="208407"/>
+          </a:xfrm>
+          <a:prstGeom prst="rect">
+            <a:avLst/>
+          </a:prstGeom>
+          <a:noFill/>
+          <a:effectLst/>
+        </p:spPr>
+        <p:txBody>
+          <a:bodyPr wrap="none" lIns="18288" rIns="18288" tIns="18288" bIns="18288" anchor="t">
+            <a:spAutoFit/>
+          </a:bodyPr>
+          <a:lstStyle/>
+          <a:p>
+            <a:pPr algn="ctr">
+              <a:spcAft>
+                <a:spcPts val="0"/>
+              </a:spcAft>
+            </a:pPr>
+            <a:r>
+              <a:rPr sz="1050" b="0" i="0">
+                <a:solidFill>
+                  <a:srgbClr val="B4C7D2"/>
+                </a:solidFill>
+                <a:latin typeface="Arial"/>
+              </a:rPr>
+              <a:t>3</a:t>
+            </a:r>
+          </a:p>
+        </p:txBody>
+      </p:sp>
+      <p:cxnSp>
+        <p:nvCxnSpPr>
+          <p:cNvPr id="48" name="C1-E12 line 46" descr="sci-ppt:o046"/>
+          <p:cNvCxnSpPr/>
+          <p:nvPr/>
+        </p:nvCxnSpPr>
+        <p:spPr>
+          <a:xfrm>
+            <a:off x="11704320" y="4800600"/>
+            <a:ext cx="0" cy="64008"/>
+          </a:xfrm>
+          <a:prstGeom prst="line">
+            <a:avLst/>
+          </a:prstGeom>
+          <a:ln w="12700">
+            <a:solidFill>
+              <a:srgbClr val="B4C7D2"/>
+            </a:solidFill>
+          </a:ln>
+          <a:effectLst/>
+        </p:spPr>
+      </p:cxnSp>
+      <p:cxnSp>
+        <p:nvCxnSpPr>
+          <p:cNvPr id="49" name="C1-E12 line 47" descr="sci-ppt:o047"/>
+          <p:cNvCxnSpPr/>
+          <p:nvPr/>
+        </p:nvCxnSpPr>
+        <p:spPr>
+          <a:xfrm>
+            <a:off x="11704320" y="1417320"/>
+            <a:ext cx="0" cy="3383280"/>
+          </a:xfrm>
+          <a:prstGeom prst="line">
+            <a:avLst/>
+          </a:prstGeom>
+          <a:ln w="7620">
+            <a:solidFill>
+              <a:srgbClr val="2E4756"/>
+            </a:solidFill>
+          </a:ln>
+          <a:effectLst/>
+        </p:spPr>
+      </p:cxnSp>
+      <p:sp>
+        <p:nvSpPr>
+          <p:cNvPr id="50" name="C1-E12 text 48" descr="sci-ppt:o048"/>
+          <p:cNvSpPr txBox="1"/>
+          <p:nvPr/>
+        </p:nvSpPr>
+        <p:spPr>
+          <a:xfrm>
+            <a:off x="11247120" y="4882896"/>
+            <a:ext cx="914400" cy="208407"/>
+          </a:xfrm>
+          <a:prstGeom prst="rect">
+            <a:avLst/>
+          </a:prstGeom>
+          <a:noFill/>
+          <a:effectLst/>
+        </p:spPr>
+        <p:txBody>
+          <a:bodyPr wrap="none" lIns="18288" rIns="18288" tIns="18288" bIns="18288" anchor="t">
+            <a:spAutoFit/>
+          </a:bodyPr>
+          <a:lstStyle/>
+          <a:p>
+            <a:pPr algn="ctr">
+              <a:spcAft>
+                <a:spcPts val="0"/>
+              </a:spcAft>
+            </a:pPr>
+            <a:r>
+              <a:rPr sz="1050" b="0" i="0">
+                <a:solidFill>
+                  <a:srgbClr val="B4C7D2"/>
+                </a:solidFill>
+                <a:latin typeface="Arial"/>
+              </a:rPr>
+              <a:t>4</a:t>
+            </a:r>
+          </a:p>
+        </p:txBody>
+      </p:sp>
+      <p:cxnSp>
+        <p:nvCxnSpPr>
+          <p:cNvPr id="51" name="C1-E12 line 49" descr="sci-ppt:o049"/>
+          <p:cNvCxnSpPr/>
+          <p:nvPr/>
+        </p:nvCxnSpPr>
+        <p:spPr>
+          <a:xfrm>
+            <a:off x="6519672" y="4800600"/>
+            <a:ext cx="64008" cy="0"/>
+          </a:xfrm>
+          <a:prstGeom prst="line">
+            <a:avLst/>
+          </a:prstGeom>
+          <a:ln w="12700">
+            <a:solidFill>
+              <a:srgbClr val="B4C7D2"/>
+            </a:solidFill>
+          </a:ln>
+          <a:effectLst/>
+        </p:spPr>
+      </p:cxnSp>
+      <p:cxnSp>
+        <p:nvCxnSpPr>
+          <p:cNvPr id="52" name="C1-E12 line 50" descr="sci-ppt:o050"/>
+          <p:cNvCxnSpPr/>
+          <p:nvPr/>
+        </p:nvCxnSpPr>
+        <p:spPr>
+          <a:xfrm>
+            <a:off x="6519672" y="3995057"/>
+            <a:ext cx="64008" cy="0"/>
+          </a:xfrm>
+          <a:prstGeom prst="line">
+            <a:avLst/>
+          </a:prstGeom>
+          <a:ln w="12700">
+            <a:solidFill>
+              <a:srgbClr val="B4C7D2"/>
+            </a:solidFill>
+          </a:ln>
+          <a:effectLst/>
+        </p:spPr>
+      </p:cxnSp>
+      <p:cxnSp>
+        <p:nvCxnSpPr>
+          <p:cNvPr id="53" name="C1-E12 line 51" descr="sci-ppt:o051"/>
+          <p:cNvCxnSpPr/>
+          <p:nvPr/>
+        </p:nvCxnSpPr>
+        <p:spPr>
+          <a:xfrm>
+            <a:off x="6583680" y="3995057"/>
+            <a:ext cx="5120640" cy="0"/>
+          </a:xfrm>
+          <a:prstGeom prst="line">
+            <a:avLst/>
+          </a:prstGeom>
+          <a:ln w="7620">
+            <a:solidFill>
+              <a:srgbClr val="2E4756"/>
+            </a:solidFill>
+          </a:ln>
+          <a:effectLst/>
+        </p:spPr>
+      </p:cxnSp>
+      <p:sp>
+        <p:nvSpPr>
+          <p:cNvPr id="54" name="C1-E12 text 52" descr="sci-ppt:o052"/>
+          <p:cNvSpPr txBox="1"/>
+          <p:nvPr/>
+        </p:nvSpPr>
+        <p:spPr>
+          <a:xfrm>
+            <a:off x="5715000" y="3912761"/>
+            <a:ext cx="777240" cy="208407"/>
+          </a:xfrm>
+          <a:prstGeom prst="rect">
+            <a:avLst/>
+          </a:prstGeom>
+          <a:noFill/>
+          <a:effectLst/>
+        </p:spPr>
+        <p:txBody>
+          <a:bodyPr wrap="none" lIns="18288" rIns="18288" tIns="18288" bIns="18288" anchor="t">
+            <a:spAutoFit/>
+          </a:bodyPr>
+          <a:lstStyle/>
+          <a:p>
+            <a:pPr algn="r">
+              <a:spcAft>
+                <a:spcPts val="0"/>
+              </a:spcAft>
+            </a:pPr>
+            <a:r>
+              <a:rPr sz="1050" b="0" i="0">
+                <a:solidFill>
+                  <a:srgbClr val="B4C7D2"/>
+                </a:solidFill>
+                <a:latin typeface="Arial"/>
+              </a:rPr>
+              <a:t>0.25</a:t>
+            </a:r>
+          </a:p>
+        </p:txBody>
+      </p:sp>
+      <p:cxnSp>
+        <p:nvCxnSpPr>
+          <p:cNvPr id="55" name="C1-E12 line 53" descr="sci-ppt:o053"/>
+          <p:cNvCxnSpPr/>
+          <p:nvPr/>
+        </p:nvCxnSpPr>
+        <p:spPr>
+          <a:xfrm>
+            <a:off x="6519672" y="3189514"/>
+            <a:ext cx="64008" cy="0"/>
+          </a:xfrm>
+          <a:prstGeom prst="line">
+            <a:avLst/>
+          </a:prstGeom>
+          <a:ln w="12700">
+            <a:solidFill>
+              <a:srgbClr val="B4C7D2"/>
+            </a:solidFill>
+          </a:ln>
+          <a:effectLst/>
+        </p:spPr>
+      </p:cxnSp>
+      <p:cxnSp>
+        <p:nvCxnSpPr>
+          <p:cNvPr id="56" name="C1-E12 line 54" descr="sci-ppt:o054"/>
+          <p:cNvCxnSpPr/>
+          <p:nvPr/>
+        </p:nvCxnSpPr>
+        <p:spPr>
+          <a:xfrm>
+            <a:off x="6583680" y="3189514"/>
+            <a:ext cx="5120640" cy="0"/>
+          </a:xfrm>
+          <a:prstGeom prst="line">
+            <a:avLst/>
+          </a:prstGeom>
+          <a:ln w="7620">
+            <a:solidFill>
+              <a:srgbClr val="2E4756"/>
+            </a:solidFill>
+          </a:ln>
+          <a:effectLst/>
+        </p:spPr>
+      </p:cxnSp>
+      <p:sp>
+        <p:nvSpPr>
+          <p:cNvPr id="57" name="C1-E12 text 55" descr="sci-ppt:o055"/>
+          <p:cNvSpPr txBox="1"/>
+          <p:nvPr/>
+        </p:nvSpPr>
+        <p:spPr>
+          <a:xfrm>
+            <a:off x="5715000" y="3107218"/>
+            <a:ext cx="777240" cy="208407"/>
+          </a:xfrm>
+          <a:prstGeom prst="rect">
+            <a:avLst/>
+          </a:prstGeom>
+          <a:noFill/>
+          <a:effectLst/>
+        </p:spPr>
+        <p:txBody>
+          <a:bodyPr wrap="none" lIns="18288" rIns="18288" tIns="18288" bIns="18288" anchor="t">
+            <a:spAutoFit/>
+          </a:bodyPr>
+          <a:lstStyle/>
+          <a:p>
+            <a:pPr algn="r">
+              <a:spcAft>
+                <a:spcPts val="0"/>
+              </a:spcAft>
+            </a:pPr>
+            <a:r>
+              <a:rPr sz="1050" b="0" i="0">
+                <a:solidFill>
+                  <a:srgbClr val="B4C7D2"/>
+                </a:solidFill>
+                <a:latin typeface="Arial"/>
+              </a:rPr>
+              <a:t>0.50</a:t>
+            </a:r>
+          </a:p>
+        </p:txBody>
+      </p:sp>
+      <p:cxnSp>
+        <p:nvCxnSpPr>
+          <p:cNvPr id="58" name="C1-E12 line 56" descr="sci-ppt:o056"/>
+          <p:cNvCxnSpPr/>
+          <p:nvPr/>
+        </p:nvCxnSpPr>
+        <p:spPr>
+          <a:xfrm>
+            <a:off x="6519672" y="2383971"/>
+            <a:ext cx="64008" cy="0"/>
+          </a:xfrm>
+          <a:prstGeom prst="line">
+            <a:avLst/>
+          </a:prstGeom>
+          <a:ln w="12700">
+            <a:solidFill>
+              <a:srgbClr val="B4C7D2"/>
+            </a:solidFill>
+          </a:ln>
+          <a:effectLst/>
+        </p:spPr>
+      </p:cxnSp>
+      <p:cxnSp>
+        <p:nvCxnSpPr>
+          <p:cNvPr id="59" name="C1-E12 line 57" descr="sci-ppt:o057"/>
+          <p:cNvCxnSpPr/>
+          <p:nvPr/>
+        </p:nvCxnSpPr>
+        <p:spPr>
+          <a:xfrm>
+            <a:off x="6583680" y="2383971"/>
+            <a:ext cx="5120640" cy="0"/>
+          </a:xfrm>
+          <a:prstGeom prst="line">
+            <a:avLst/>
+          </a:prstGeom>
+          <a:ln w="7620">
+            <a:solidFill>
+              <a:srgbClr val="2E4756"/>
+            </a:solidFill>
+          </a:ln>
+          <a:effectLst/>
+        </p:spPr>
+      </p:cxnSp>
+      <p:sp>
+        <p:nvSpPr>
+          <p:cNvPr id="60" name="C1-E12 text 58" descr="sci-ppt:o058"/>
+          <p:cNvSpPr txBox="1"/>
+          <p:nvPr/>
+        </p:nvSpPr>
+        <p:spPr>
+          <a:xfrm>
+            <a:off x="5715000" y="2301675"/>
+            <a:ext cx="777240" cy="208407"/>
+          </a:xfrm>
+          <a:prstGeom prst="rect">
+            <a:avLst/>
+          </a:prstGeom>
+          <a:noFill/>
+          <a:effectLst/>
+        </p:spPr>
+        <p:txBody>
+          <a:bodyPr wrap="none" lIns="18288" rIns="18288" tIns="18288" bIns="18288" anchor="t">
+            <a:spAutoFit/>
+          </a:bodyPr>
+          <a:lstStyle/>
+          <a:p>
+            <a:pPr algn="r">
+              <a:spcAft>
+                <a:spcPts val="0"/>
+              </a:spcAft>
+            </a:pPr>
+            <a:r>
+              <a:rPr sz="1050" b="0" i="0">
+                <a:solidFill>
+                  <a:srgbClr val="B4C7D2"/>
+                </a:solidFill>
+                <a:latin typeface="Arial"/>
+              </a:rPr>
+              <a:t>0.75</a:t>
+            </a:r>
+          </a:p>
+        </p:txBody>
+      </p:sp>
+      <p:cxnSp>
+        <p:nvCxnSpPr>
+          <p:cNvPr id="61" name="C1-E12 line 59" descr="sci-ppt:o059"/>
+          <p:cNvCxnSpPr/>
+          <p:nvPr/>
+        </p:nvCxnSpPr>
+        <p:spPr>
+          <a:xfrm>
+            <a:off x="6519672" y="1578428"/>
+            <a:ext cx="64008" cy="0"/>
+          </a:xfrm>
+          <a:prstGeom prst="line">
+            <a:avLst/>
+          </a:prstGeom>
+          <a:ln w="12700">
+            <a:solidFill>
+              <a:srgbClr val="B4C7D2"/>
+            </a:solidFill>
+          </a:ln>
+          <a:effectLst/>
+        </p:spPr>
+      </p:cxnSp>
+      <p:cxnSp>
+        <p:nvCxnSpPr>
+          <p:cNvPr id="62" name="C1-E12 line 60" descr="sci-ppt:o060"/>
+          <p:cNvCxnSpPr/>
+          <p:nvPr/>
+        </p:nvCxnSpPr>
+        <p:spPr>
+          <a:xfrm>
+            <a:off x="6583680" y="1578428"/>
+            <a:ext cx="5120640" cy="0"/>
+          </a:xfrm>
+          <a:prstGeom prst="line">
+            <a:avLst/>
+          </a:prstGeom>
+          <a:ln w="7620">
+            <a:solidFill>
+              <a:srgbClr val="2E4756"/>
+            </a:solidFill>
+          </a:ln>
+          <a:effectLst/>
+        </p:spPr>
+      </p:cxnSp>
+      <p:sp>
+        <p:nvSpPr>
+          <p:cNvPr id="63" name="C1-E12 text 61" descr="sci-ppt:o061"/>
+          <p:cNvSpPr txBox="1"/>
+          <p:nvPr/>
+        </p:nvSpPr>
+        <p:spPr>
+          <a:xfrm>
+            <a:off x="5715000" y="1496132"/>
+            <a:ext cx="777240" cy="208407"/>
+          </a:xfrm>
+          <a:prstGeom prst="rect">
+            <a:avLst/>
+          </a:prstGeom>
+          <a:noFill/>
+          <a:effectLst/>
+        </p:spPr>
+        <p:txBody>
+          <a:bodyPr wrap="none" lIns="18288" rIns="18288" tIns="18288" bIns="18288" anchor="t">
+            <a:spAutoFit/>
+          </a:bodyPr>
+          <a:lstStyle/>
+          <a:p>
+            <a:pPr algn="r">
+              <a:spcAft>
+                <a:spcPts val="0"/>
+              </a:spcAft>
+            </a:pPr>
+            <a:r>
+              <a:rPr sz="1050" b="0" i="0">
+                <a:solidFill>
+                  <a:srgbClr val="B4C7D2"/>
+                </a:solidFill>
+                <a:latin typeface="Arial"/>
+              </a:rPr>
+              <a:t>1.00</a:t>
+            </a:r>
+          </a:p>
+        </p:txBody>
+      </p:sp>
+      <p:sp>
+        <p:nvSpPr>
+          <p:cNvPr id="64" name="C1-E12 text 62" descr="sci-ppt:o062"/>
+          <p:cNvSpPr txBox="1"/>
+          <p:nvPr/>
+        </p:nvSpPr>
+        <p:spPr>
+          <a:xfrm>
+            <a:off x="6583680" y="5084064"/>
+            <a:ext cx="5120640" cy="231648"/>
+          </a:xfrm>
+          <a:prstGeom prst="rect">
+            <a:avLst/>
+          </a:prstGeom>
+          <a:noFill/>
+          <a:effectLst/>
+        </p:spPr>
+        <p:txBody>
+          <a:bodyPr wrap="none" lIns="18288" rIns="18288" tIns="18288" bIns="18288" anchor="t">
+            <a:spAutoFit/>
+          </a:bodyPr>
+          <a:lstStyle/>
+          <a:p>
+            <a:pPr algn="ctr">
+              <a:spcAft>
+                <a:spcPts val="0"/>
+              </a:spcAft>
+            </a:pPr>
+            <a:r>
+              <a:rPr sz="1200" b="0" i="0">
+                <a:solidFill>
+                  <a:srgbClr val="E7F0F3"/>
+                </a:solidFill>
+                <a:latin typeface="Arial"/>
+              </a:rPr>
+              <a:t>r / R</a:t>
+            </a:r>
+          </a:p>
+        </p:txBody>
+      </p:sp>
+      <p:sp>
+        <p:nvSpPr>
+          <p:cNvPr id="65" name="C1-E12 text 63" descr="sci-ppt:o063"/>
+          <p:cNvSpPr txBox="1"/>
+          <p:nvPr/>
+        </p:nvSpPr>
+        <p:spPr>
+          <a:xfrm>
+            <a:off x="6035040" y="1069848"/>
+            <a:ext cx="5120640" cy="231648"/>
+          </a:xfrm>
+          <a:prstGeom prst="rect">
+            <a:avLst/>
+          </a:prstGeom>
+          <a:noFill/>
+          <a:effectLst/>
+        </p:spPr>
+        <p:txBody>
+          <a:bodyPr wrap="none" lIns="18288" rIns="18288" tIns="18288" bIns="18288" anchor="t">
+            <a:spAutoFit/>
+          </a:bodyPr>
+          <a:lstStyle/>
+          <a:p>
+            <a:pPr algn="l">
+              <a:spcAft>
+                <a:spcPts val="0"/>
+              </a:spcAft>
+            </a:pPr>
+            <a:r>
+              <a:rPr sz="1200" b="0" i="0">
+                <a:solidFill>
+                  <a:srgbClr val="E7F0F3"/>
+                </a:solidFill>
+                <a:latin typeface="Arial"/>
+              </a:rPr>
+              <a:t>dissipation inside r</a:t>
+            </a:r>
+          </a:p>
+        </p:txBody>
+      </p:sp>
+      <p:sp>
+        <p:nvSpPr>
+          <p:cNvPr id="66" name="C1-E12 polygon 64" descr="sci-ppt:o064"/>
+          <p:cNvSpPr/>
+          <p:nvPr/>
+        </p:nvSpPr>
+        <p:spPr>
+          <a:xfrm>
+            <a:off x="6583680" y="1628775"/>
+            <a:ext cx="5120640" cy="3171825"/>
+          </a:xfrm>
+          <a:custGeom>
+            <a:avLst/>
+            <a:gdLst/>
+            <a:ahLst/>
+            <a:cxnLst/>
+            <a:rect l="l" t="t" r="r" b="b"/>
+            <a:pathLst>
+              <a:path w="5120640" h="3171825">
+                <a:moveTo>
+                  <a:pt x="0" y="3171825"/>
+                </a:moveTo>
+                <a:lnTo>
+                  <a:pt x="25731" y="3030384"/>
+                </a:lnTo>
+                <a:lnTo>
+                  <a:pt x="51463" y="2897102"/>
+                </a:lnTo>
+                <a:lnTo>
+                  <a:pt x="77195" y="2771399"/>
+                </a:lnTo>
+                <a:lnTo>
+                  <a:pt x="102927" y="2652743"/>
+                </a:lnTo>
+                <a:lnTo>
+                  <a:pt x="128659" y="2540648"/>
+                </a:lnTo>
+                <a:lnTo>
+                  <a:pt x="154391" y="2434666"/>
+                </a:lnTo>
+                <a:lnTo>
+                  <a:pt x="180123" y="2334386"/>
+                </a:lnTo>
+                <a:lnTo>
+                  <a:pt x="205854" y="2239431"/>
+                </a:lnTo>
+                <a:lnTo>
+                  <a:pt x="231586" y="2149450"/>
+                </a:lnTo>
+                <a:lnTo>
+                  <a:pt x="257318" y="2064123"/>
+                </a:lnTo>
+                <a:lnTo>
+                  <a:pt x="283050" y="1983152"/>
+                </a:lnTo>
+                <a:lnTo>
+                  <a:pt x="308782" y="1906263"/>
+                </a:lnTo>
+                <a:lnTo>
+                  <a:pt x="334514" y="1833202"/>
+                </a:lnTo>
+                <a:lnTo>
+                  <a:pt x="360246" y="1763734"/>
+                </a:lnTo>
+                <a:lnTo>
+                  <a:pt x="385977" y="1697641"/>
+                </a:lnTo>
+                <a:lnTo>
+                  <a:pt x="411709" y="1634719"/>
+                </a:lnTo>
+                <a:lnTo>
+                  <a:pt x="437441" y="1574782"/>
+                </a:lnTo>
+                <a:lnTo>
+                  <a:pt x="463173" y="1517654"/>
+                </a:lnTo>
+                <a:lnTo>
+                  <a:pt x="488905" y="1463172"/>
+                </a:lnTo>
+                <a:lnTo>
+                  <a:pt x="514637" y="1411186"/>
+                </a:lnTo>
+                <a:lnTo>
+                  <a:pt x="540369" y="1361553"/>
+                </a:lnTo>
+                <a:lnTo>
+                  <a:pt x="566100" y="1314143"/>
+                </a:lnTo>
+                <a:lnTo>
+                  <a:pt x="591832" y="1268831"/>
+                </a:lnTo>
+                <a:lnTo>
+                  <a:pt x="617564" y="1225504"/>
+                </a:lnTo>
+                <a:lnTo>
+                  <a:pt x="643296" y="1184054"/>
+                </a:lnTo>
+                <a:lnTo>
+                  <a:pt x="669028" y="1144380"/>
+                </a:lnTo>
+                <a:lnTo>
+                  <a:pt x="694760" y="1106388"/>
+                </a:lnTo>
+                <a:lnTo>
+                  <a:pt x="720492" y="1069990"/>
+                </a:lnTo>
+                <a:lnTo>
+                  <a:pt x="746223" y="1035103"/>
+                </a:lnTo>
+                <a:lnTo>
+                  <a:pt x="771955" y="1001650"/>
+                </a:lnTo>
+                <a:lnTo>
+                  <a:pt x="797687" y="969557"/>
+                </a:lnTo>
+                <a:lnTo>
+                  <a:pt x="823419" y="938757"/>
+                </a:lnTo>
+                <a:lnTo>
+                  <a:pt x="849151" y="909184"/>
+                </a:lnTo>
+                <a:lnTo>
+                  <a:pt x="874883" y="880779"/>
+                </a:lnTo>
+                <a:lnTo>
+                  <a:pt x="900615" y="853484"/>
+                </a:lnTo>
+                <a:lnTo>
+                  <a:pt x="926346" y="827245"/>
+                </a:lnTo>
+                <a:lnTo>
+                  <a:pt x="952078" y="802013"/>
+                </a:lnTo>
+                <a:lnTo>
+                  <a:pt x="977810" y="777738"/>
+                </a:lnTo>
+                <a:lnTo>
+                  <a:pt x="1003542" y="754376"/>
+                </a:lnTo>
+                <a:lnTo>
+                  <a:pt x="1029274" y="731886"/>
+                </a:lnTo>
+                <a:lnTo>
+                  <a:pt x="1055006" y="710225"/>
+                </a:lnTo>
+                <a:lnTo>
+                  <a:pt x="1080738" y="689357"/>
+                </a:lnTo>
+                <a:lnTo>
+                  <a:pt x="1106469" y="669245"/>
+                </a:lnTo>
+                <a:lnTo>
+                  <a:pt x="1132201" y="649856"/>
+                </a:lnTo>
+                <a:lnTo>
+                  <a:pt x="1157933" y="631157"/>
+                </a:lnTo>
+                <a:lnTo>
+                  <a:pt x="1183665" y="613118"/>
+                </a:lnTo>
+                <a:lnTo>
+                  <a:pt x="1209397" y="595710"/>
+                </a:lnTo>
+                <a:lnTo>
+                  <a:pt x="1235129" y="578906"/>
+                </a:lnTo>
+                <a:lnTo>
+                  <a:pt x="1260861" y="562680"/>
+                </a:lnTo>
+                <a:lnTo>
+                  <a:pt x="1286592" y="547007"/>
+                </a:lnTo>
+                <a:lnTo>
+                  <a:pt x="1312324" y="531863"/>
+                </a:lnTo>
+                <a:lnTo>
+                  <a:pt x="1338056" y="517227"/>
+                </a:lnTo>
+                <a:lnTo>
+                  <a:pt x="1363788" y="503078"/>
+                </a:lnTo>
+                <a:lnTo>
+                  <a:pt x="1389520" y="489395"/>
+                </a:lnTo>
+                <a:lnTo>
+                  <a:pt x="1415252" y="476160"/>
+                </a:lnTo>
+                <a:lnTo>
+                  <a:pt x="1440984" y="463353"/>
+                </a:lnTo>
+                <a:lnTo>
+                  <a:pt x="1466715" y="450959"/>
+                </a:lnTo>
+                <a:lnTo>
+                  <a:pt x="1492447" y="438960"/>
+                </a:lnTo>
+                <a:lnTo>
+                  <a:pt x="1518179" y="427341"/>
+                </a:lnTo>
+                <a:lnTo>
+                  <a:pt x="1543911" y="416087"/>
+                </a:lnTo>
+                <a:lnTo>
+                  <a:pt x="1569643" y="405184"/>
+                </a:lnTo>
+                <a:lnTo>
+                  <a:pt x="1595375" y="394618"/>
+                </a:lnTo>
+                <a:lnTo>
+                  <a:pt x="1621107" y="384376"/>
+                </a:lnTo>
+                <a:lnTo>
+                  <a:pt x="1646838" y="374446"/>
+                </a:lnTo>
+                <a:lnTo>
+                  <a:pt x="1672570" y="364817"/>
+                </a:lnTo>
+                <a:lnTo>
+                  <a:pt x="1698302" y="355476"/>
+                </a:lnTo>
+                <a:lnTo>
+                  <a:pt x="1724034" y="346413"/>
+                </a:lnTo>
+                <a:lnTo>
+                  <a:pt x="1749766" y="337618"/>
+                </a:lnTo>
+                <a:lnTo>
+                  <a:pt x="1775498" y="329081"/>
+                </a:lnTo>
+                <a:lnTo>
+                  <a:pt x="1801230" y="320793"/>
+                </a:lnTo>
+                <a:lnTo>
+                  <a:pt x="1826962" y="312745"/>
+                </a:lnTo>
+                <a:lnTo>
+                  <a:pt x="1852693" y="304927"/>
+                </a:lnTo>
+                <a:lnTo>
+                  <a:pt x="1878425" y="297333"/>
+                </a:lnTo>
+                <a:lnTo>
+                  <a:pt x="1904157" y="289953"/>
+                </a:lnTo>
+                <a:lnTo>
+                  <a:pt x="1929889" y="282780"/>
+                </a:lnTo>
+                <a:lnTo>
+                  <a:pt x="1955621" y="275808"/>
+                </a:lnTo>
+                <a:lnTo>
+                  <a:pt x="1981353" y="269029"/>
+                </a:lnTo>
+                <a:lnTo>
+                  <a:pt x="2007085" y="262437"/>
+                </a:lnTo>
+                <a:lnTo>
+                  <a:pt x="2032816" y="256025"/>
+                </a:lnTo>
+                <a:lnTo>
+                  <a:pt x="2058548" y="249786"/>
+                </a:lnTo>
+                <a:lnTo>
+                  <a:pt x="2084280" y="243717"/>
+                </a:lnTo>
+                <a:lnTo>
+                  <a:pt x="2110012" y="237809"/>
+                </a:lnTo>
+                <a:lnTo>
+                  <a:pt x="2135744" y="232059"/>
+                </a:lnTo>
+                <a:lnTo>
+                  <a:pt x="2161476" y="226461"/>
+                </a:lnTo>
+                <a:lnTo>
+                  <a:pt x="2187208" y="221010"/>
+                </a:lnTo>
+                <a:lnTo>
+                  <a:pt x="2212939" y="215701"/>
+                </a:lnTo>
+                <a:lnTo>
+                  <a:pt x="2238671" y="210529"/>
+                </a:lnTo>
+                <a:lnTo>
+                  <a:pt x="2264403" y="205491"/>
+                </a:lnTo>
+                <a:lnTo>
+                  <a:pt x="2290135" y="200582"/>
+                </a:lnTo>
+                <a:lnTo>
+                  <a:pt x="2315867" y="195797"/>
+                </a:lnTo>
+                <a:lnTo>
+                  <a:pt x="2341599" y="191133"/>
+                </a:lnTo>
+                <a:lnTo>
+                  <a:pt x="2367331" y="186587"/>
+                </a:lnTo>
+                <a:lnTo>
+                  <a:pt x="2393062" y="182154"/>
+                </a:lnTo>
+                <a:lnTo>
+                  <a:pt x="2418794" y="177830"/>
+                </a:lnTo>
+                <a:lnTo>
+                  <a:pt x="2444526" y="173614"/>
+                </a:lnTo>
+                <a:lnTo>
+                  <a:pt x="2470258" y="169500"/>
+                </a:lnTo>
+                <a:lnTo>
+                  <a:pt x="2495990" y="165487"/>
+                </a:lnTo>
+                <a:lnTo>
+                  <a:pt x="2521722" y="161571"/>
+                </a:lnTo>
+                <a:lnTo>
+                  <a:pt x="2547454" y="157749"/>
+                </a:lnTo>
+                <a:lnTo>
+                  <a:pt x="2573185" y="154018"/>
+                </a:lnTo>
+                <a:lnTo>
+                  <a:pt x="2598917" y="150376"/>
+                </a:lnTo>
+                <a:lnTo>
+                  <a:pt x="2624649" y="146820"/>
+                </a:lnTo>
+                <a:lnTo>
+                  <a:pt x="2650381" y="143347"/>
+                </a:lnTo>
+                <a:lnTo>
+                  <a:pt x="2676113" y="139956"/>
+                </a:lnTo>
+                <a:lnTo>
+                  <a:pt x="2701845" y="136643"/>
+                </a:lnTo>
+                <a:lnTo>
+                  <a:pt x="2727577" y="133407"/>
+                </a:lnTo>
+                <a:lnTo>
+                  <a:pt x="2753308" y="130245"/>
+                </a:lnTo>
+                <a:lnTo>
+                  <a:pt x="2779040" y="127155"/>
+                </a:lnTo>
+                <a:lnTo>
+                  <a:pt x="2804772" y="124135"/>
+                </a:lnTo>
+                <a:lnTo>
+                  <a:pt x="2830504" y="121183"/>
+                </a:lnTo>
+                <a:lnTo>
+                  <a:pt x="2856236" y="118298"/>
+                </a:lnTo>
+                <a:lnTo>
+                  <a:pt x="2881968" y="115477"/>
+                </a:lnTo>
+                <a:lnTo>
+                  <a:pt x="2907700" y="112718"/>
+                </a:lnTo>
+                <a:lnTo>
+                  <a:pt x="2933431" y="110020"/>
+                </a:lnTo>
+                <a:lnTo>
+                  <a:pt x="2959163" y="107382"/>
+                </a:lnTo>
+                <a:lnTo>
+                  <a:pt x="2984895" y="104801"/>
+                </a:lnTo>
+                <a:lnTo>
+                  <a:pt x="3010627" y="102276"/>
+                </a:lnTo>
+                <a:lnTo>
+                  <a:pt x="3036359" y="99806"/>
+                </a:lnTo>
+                <a:lnTo>
+                  <a:pt x="3062091" y="97388"/>
+                </a:lnTo>
+                <a:lnTo>
+                  <a:pt x="3087823" y="95022"/>
+                </a:lnTo>
+                <a:lnTo>
+                  <a:pt x="3113554" y="92707"/>
+                </a:lnTo>
+                <a:lnTo>
+                  <a:pt x="3139286" y="90440"/>
+                </a:lnTo>
+                <a:lnTo>
+                  <a:pt x="3165018" y="88221"/>
+                </a:lnTo>
+                <a:lnTo>
+                  <a:pt x="3190750" y="86048"/>
+                </a:lnTo>
+                <a:lnTo>
+                  <a:pt x="3216482" y="83921"/>
+                </a:lnTo>
+                <a:lnTo>
+                  <a:pt x="3242214" y="81838"/>
+                </a:lnTo>
+                <a:lnTo>
+                  <a:pt x="3267946" y="79797"/>
+                </a:lnTo>
+                <a:lnTo>
+                  <a:pt x="3293677" y="77798"/>
+                </a:lnTo>
+                <a:lnTo>
+                  <a:pt x="3319409" y="75840"/>
+                </a:lnTo>
+                <a:lnTo>
+                  <a:pt x="3345141" y="73922"/>
+                </a:lnTo>
+                <a:lnTo>
+                  <a:pt x="3370873" y="72042"/>
+                </a:lnTo>
+                <a:lnTo>
+                  <a:pt x="3396605" y="70200"/>
+                </a:lnTo>
+                <a:lnTo>
+                  <a:pt x="3422337" y="68395"/>
+                </a:lnTo>
+                <a:lnTo>
+                  <a:pt x="3448069" y="66626"/>
+                </a:lnTo>
+                <a:lnTo>
+                  <a:pt x="3473801" y="64891"/>
+                </a:lnTo>
+                <a:lnTo>
+                  <a:pt x="3499532" y="63191"/>
+                </a:lnTo>
+                <a:lnTo>
+                  <a:pt x="3525264" y="61524"/>
+                </a:lnTo>
+                <a:lnTo>
+                  <a:pt x="3550996" y="59890"/>
+                </a:lnTo>
+                <a:lnTo>
+                  <a:pt x="3576728" y="58287"/>
+                </a:lnTo>
+                <a:lnTo>
+                  <a:pt x="3602460" y="56715"/>
+                </a:lnTo>
+                <a:lnTo>
+                  <a:pt x="3628192" y="55174"/>
+                </a:lnTo>
+                <a:lnTo>
+                  <a:pt x="3653924" y="53661"/>
+                </a:lnTo>
+                <a:lnTo>
+                  <a:pt x="3679655" y="52178"/>
+                </a:lnTo>
+                <a:lnTo>
+                  <a:pt x="3705387" y="50722"/>
+                </a:lnTo>
+                <a:lnTo>
+                  <a:pt x="3731119" y="49295"/>
+                </a:lnTo>
+                <a:lnTo>
+                  <a:pt x="3756851" y="47893"/>
+                </a:lnTo>
+                <a:lnTo>
+                  <a:pt x="3782583" y="46518"/>
+                </a:lnTo>
+                <a:lnTo>
+                  <a:pt x="3808315" y="45169"/>
+                </a:lnTo>
+                <a:lnTo>
+                  <a:pt x="3834047" y="43844"/>
+                </a:lnTo>
+                <a:lnTo>
+                  <a:pt x="3859778" y="42544"/>
+                </a:lnTo>
+                <a:lnTo>
+                  <a:pt x="3885510" y="41268"/>
+                </a:lnTo>
+                <a:lnTo>
+                  <a:pt x="3911242" y="40015"/>
+                </a:lnTo>
+                <a:lnTo>
+                  <a:pt x="3936974" y="38784"/>
+                </a:lnTo>
+                <a:lnTo>
+                  <a:pt x="3962706" y="37576"/>
+                </a:lnTo>
+                <a:lnTo>
+                  <a:pt x="3988438" y="36390"/>
+                </a:lnTo>
+                <a:lnTo>
+                  <a:pt x="4014170" y="35225"/>
+                </a:lnTo>
+                <a:lnTo>
+                  <a:pt x="4039901" y="34080"/>
+                </a:lnTo>
+                <a:lnTo>
+                  <a:pt x="4065633" y="32956"/>
+                </a:lnTo>
+                <a:lnTo>
+                  <a:pt x="4091365" y="31852"/>
+                </a:lnTo>
+                <a:lnTo>
+                  <a:pt x="4117097" y="30768"/>
+                </a:lnTo>
+                <a:lnTo>
+                  <a:pt x="4142829" y="29702"/>
+                </a:lnTo>
+                <a:lnTo>
+                  <a:pt x="4168561" y="28655"/>
+                </a:lnTo>
+                <a:lnTo>
+                  <a:pt x="4194293" y="27626"/>
+                </a:lnTo>
+                <a:lnTo>
+                  <a:pt x="4220024" y="26615"/>
+                </a:lnTo>
+                <a:lnTo>
+                  <a:pt x="4245756" y="25621"/>
+                </a:lnTo>
+                <a:lnTo>
+                  <a:pt x="4271488" y="24644"/>
+                </a:lnTo>
+                <a:lnTo>
+                  <a:pt x="4297220" y="23684"/>
+                </a:lnTo>
+                <a:lnTo>
+                  <a:pt x="4322952" y="22740"/>
+                </a:lnTo>
+                <a:lnTo>
+                  <a:pt x="4348684" y="21813"/>
+                </a:lnTo>
+                <a:lnTo>
+                  <a:pt x="4374416" y="20900"/>
+                </a:lnTo>
+                <a:lnTo>
+                  <a:pt x="4400147" y="20004"/>
+                </a:lnTo>
+                <a:lnTo>
+                  <a:pt x="4425879" y="19122"/>
+                </a:lnTo>
+                <a:lnTo>
+                  <a:pt x="4451611" y="18255"/>
+                </a:lnTo>
+                <a:lnTo>
+                  <a:pt x="4477343" y="17402"/>
+                </a:lnTo>
+                <a:lnTo>
+                  <a:pt x="4503075" y="16563"/>
+                </a:lnTo>
+                <a:lnTo>
+                  <a:pt x="4528807" y="15738"/>
+                </a:lnTo>
+                <a:lnTo>
+                  <a:pt x="4554539" y="14927"/>
+                </a:lnTo>
+                <a:lnTo>
+                  <a:pt x="4580270" y="14129"/>
+                </a:lnTo>
+                <a:lnTo>
+                  <a:pt x="4606002" y="13344"/>
+                </a:lnTo>
+                <a:lnTo>
+                  <a:pt x="4631734" y="12571"/>
+                </a:lnTo>
+                <a:lnTo>
+                  <a:pt x="4657466" y="11811"/>
+                </a:lnTo>
+                <a:lnTo>
+                  <a:pt x="4683198" y="11063"/>
+                </a:lnTo>
+                <a:lnTo>
+                  <a:pt x="4708930" y="10327"/>
+                </a:lnTo>
+                <a:lnTo>
+                  <a:pt x="4734662" y="9603"/>
+                </a:lnTo>
+                <a:lnTo>
+                  <a:pt x="4760393" y="8890"/>
+                </a:lnTo>
+                <a:lnTo>
+                  <a:pt x="4786125" y="8189"/>
+                </a:lnTo>
+                <a:lnTo>
+                  <a:pt x="4811857" y="7498"/>
+                </a:lnTo>
+                <a:lnTo>
+                  <a:pt x="4837589" y="6819"/>
+                </a:lnTo>
+                <a:lnTo>
+                  <a:pt x="4863321" y="6150"/>
+                </a:lnTo>
+                <a:lnTo>
+                  <a:pt x="4889053" y="5491"/>
+                </a:lnTo>
+                <a:lnTo>
+                  <a:pt x="4914785" y="4843"/>
+                </a:lnTo>
+                <a:lnTo>
+                  <a:pt x="4940516" y="4204"/>
+                </a:lnTo>
+                <a:lnTo>
+                  <a:pt x="4966248" y="3575"/>
+                </a:lnTo>
+                <a:lnTo>
+                  <a:pt x="4991980" y="2956"/>
+                </a:lnTo>
+                <a:lnTo>
+                  <a:pt x="5017712" y="2347"/>
+                </a:lnTo>
+                <a:lnTo>
+                  <a:pt x="5043444" y="1747"/>
+                </a:lnTo>
+                <a:lnTo>
+                  <a:pt x="5069176" y="1155"/>
+                </a:lnTo>
+                <a:lnTo>
+                  <a:pt x="5094908" y="573"/>
+                </a:lnTo>
+                <a:lnTo>
+                  <a:pt x="5120640" y="0"/>
+                </a:lnTo>
+              </a:path>
+            </a:pathLst>
+          </a:custGeom>
+          <a:noFill/>
+          <a:ln w="38100">
+            <a:solidFill>
+              <a:srgbClr val="F2B880"/>
+            </a:solidFill>
+          </a:ln>
+          <a:effectLst/>
+        </p:spPr>
+        <p:txBody>
+          <a:bodyPr rtlCol="0" anchor="ctr"/>
+          <a:lstStyle/>
+          <a:p>
+            <a:pPr algn="ctr"/>
+          </a:p>
+        </p:txBody>
+      </p:sp>
+      <p:sp>
+        <p:nvSpPr>
+          <p:cNvPr id="67" name="C1-E12 ellipse 65" descr="sci-ppt:o065"/>
+          <p:cNvSpPr/>
+          <p:nvPr/>
+        </p:nvSpPr>
+        <p:spPr>
+          <a:xfrm>
+            <a:off x="8217408" y="1908048"/>
+            <a:ext cx="146304" cy="146304"/>
+          </a:xfrm>
+          <a:prstGeom prst="ellipse">
+            <a:avLst/>
+          </a:prstGeom>
+          <a:solidFill>
+            <a:srgbClr val="8EDBD4"/>
+          </a:solidFill>
+          <a:ln w="12700">
+            <a:solidFill>
+              <a:srgbClr val="8EDBD4"/>
+            </a:solidFill>
+          </a:ln>
+          <a:effectLst/>
+        </p:spPr>
+        <p:txBody>
+          <a:bodyPr rtlCol="0" anchor="ctr"/>
+          <a:lstStyle/>
+          <a:p>
+            <a:pPr algn="ctr"/>
+          </a:p>
+        </p:txBody>
+      </p:sp>
+      <p:sp>
+        <p:nvSpPr>
+          <p:cNvPr id="68" name="C1-E12 text 66" descr="sci-ppt:o066"/>
+          <p:cNvSpPr txBox="1"/>
+          <p:nvPr/>
+        </p:nvSpPr>
+        <p:spPr>
+          <a:xfrm>
+            <a:off x="8418576" y="2026920"/>
+            <a:ext cx="2194560" cy="231648"/>
+          </a:xfrm>
+          <a:prstGeom prst="rect">
+            <a:avLst/>
+          </a:prstGeom>
+          <a:noFill/>
+          <a:effectLst/>
+        </p:spPr>
+        <p:txBody>
+          <a:bodyPr wrap="none" lIns="18288" rIns="18288" tIns="18288" bIns="18288" anchor="t">
+            <a:spAutoFit/>
+          </a:bodyPr>
+          <a:lstStyle/>
+          <a:p>
+            <a:pPr algn="l">
+              <a:spcAft>
+                <a:spcPts val="0"/>
+              </a:spcAft>
+            </a:pPr>
+            <a:r>
+              <a:rPr sz="1200" b="0" i="0">
+                <a:solidFill>
+                  <a:srgbClr val="8EDBD4"/>
+                </a:solidFill>
+                <a:latin typeface="Arial"/>
+              </a:rPr>
+              <a:t>87.5 % inside r = 2R</a:t>
+            </a:r>
+          </a:p>
+        </p:txBody>
+      </p:sp>
+      <p:sp>
+        <p:nvSpPr>
+          <p:cNvPr id="69" name="C1-E12 text 67" descr="sci-ppt:o067"/>
+          <p:cNvSpPr txBox="1"/>
+          <p:nvPr/>
+        </p:nvSpPr>
+        <p:spPr>
+          <a:xfrm>
+            <a:off x="8705088" y="3581400"/>
+            <a:ext cx="3108960" cy="402081"/>
+          </a:xfrm>
+          <a:prstGeom prst="rect">
+            <a:avLst/>
+          </a:prstGeom>
+          <a:noFill/>
+          <a:effectLst/>
+        </p:spPr>
+        <p:txBody>
+          <a:bodyPr wrap="none" lIns="18288" rIns="18288" tIns="18288" bIns="18288" anchor="t">
+            <a:spAutoFit/>
+          </a:bodyPr>
+          <a:lstStyle/>
+          <a:p>
+            <a:pPr algn="l">
+              <a:spcAft>
+                <a:spcPts val="0"/>
+              </a:spcAft>
+            </a:pPr>
+            <a:r>
+              <a:rPr sz="1150" b="0" i="0">
+                <a:solidFill>
+                  <a:srgbClr val="E7F0F3"/>
+                </a:solidFill>
+                <a:latin typeface="Arial"/>
+              </a:rPr>
+              <a:t>𝒟 = ∫ 2μ(Dᵣᵣ² + 2D_θθ²) 4πr² dr</a:t>
+            </a:r>
+          </a:p>
+          <a:p>
+            <a:pPr algn="l">
+              <a:spcAft>
+                <a:spcPts val="0"/>
+              </a:spcAft>
+            </a:pPr>
+            <a:r>
+              <a:rPr sz="1150" b="0" i="0">
+                <a:solidFill>
+                  <a:srgbClr val="E7F0F3"/>
+                </a:solidFill>
+                <a:latin typeface="Arial"/>
+              </a:rPr>
+              <a:t>= 48πμR⁴Ṙ² ∫ r⁻⁴ dr = 16πμRṘ²</a:t>
+            </a:r>
+          </a:p>
+        </p:txBody>
+      </p:sp>
+      <p:sp>
+        <p:nvSpPr>
+          <p:cNvPr id="70" name="C1-E12 rect 68" descr="sci-ppt:o068"/>
+          <p:cNvSpPr/>
+          <p:nvPr/>
+        </p:nvSpPr>
+        <p:spPr>
+          <a:xfrm>
+            <a:off x="4114800" y="3063239"/>
+            <a:ext cx="457200" cy="457200"/>
+          </a:xfrm>
+          <a:prstGeom prst="rect">
+            <a:avLst/>
+          </a:prstGeom>
+          <a:noFill/>
+          <a:ln w="15240">
+            <a:solidFill>
+              <a:srgbClr val="B4C7D2"/>
+            </a:solidFill>
+          </a:ln>
+          <a:effectLst/>
+        </p:spPr>
+        <p:txBody>
+          <a:bodyPr rtlCol="0" anchor="ctr"/>
+          <a:lstStyle/>
+          <a:p>
+            <a:pPr algn="ctr"/>
+          </a:p>
+        </p:txBody>
+      </p:sp>
+      <p:sp>
+        <p:nvSpPr>
+          <p:cNvPr id="71" name="C1-E12 rect 69" descr="sci-ppt:o069"/>
+          <p:cNvSpPr/>
+          <p:nvPr/>
+        </p:nvSpPr>
+        <p:spPr>
+          <a:xfrm>
+            <a:off x="4023360" y="3200400"/>
+            <a:ext cx="713232" cy="182880"/>
+          </a:xfrm>
+          <a:prstGeom prst="rect">
+            <a:avLst/>
+          </a:prstGeom>
+          <a:solidFill>
+            <a:srgbClr val="2B6678">
+              <a:alpha val="90000"/>
+            </a:srgbClr>
+          </a:solidFill>
+          <a:ln w="22860">
+            <a:solidFill>
+              <a:srgbClr val="8EDBD4">
+                <a:alpha val="90000"/>
+              </a:srgbClr>
+            </a:solidFill>
+          </a:ln>
+          <a:effectLst/>
+        </p:spPr>
+        <p:txBody>
+          <a:bodyPr rtlCol="0" anchor="ctr"/>
+          <a:lstStyle/>
+          <a:p>
+            <a:pPr algn="ctr"/>
+          </a:p>
+        </p:txBody>
+      </p:sp>
+      <p:cxnSp>
+        <p:nvCxnSpPr>
+          <p:cNvPr id="72" name="C1-E12 arrow 70" descr="sci-ppt:o070"/>
+          <p:cNvCxnSpPr/>
+          <p:nvPr/>
+        </p:nvCxnSpPr>
+        <p:spPr>
+          <a:xfrm>
+            <a:off x="3794760" y="3291839"/>
+            <a:ext cx="210312" cy="0"/>
           </a:xfrm>
           <a:prstGeom prst="line">
             <a:avLst/>
@@ -3292,16 +7024,88 @@
           <a:effectLst/>
         </p:spPr>
       </p:cxnSp>
-      <p:sp>
-        <p:nvSpPr>
-          <p:cNvPr id="8" name="text7" descr="sci-ppt:C1-E12-007"/>
+      <p:cxnSp>
+        <p:nvCxnSpPr>
+          <p:cNvPr id="73" name="C1-E12 arrow 71" descr="sci-ppt:o071"/>
+          <p:cNvCxnSpPr/>
+          <p:nvPr/>
+        </p:nvCxnSpPr>
+        <p:spPr>
+          <a:xfrm flipH="1">
+            <a:off x="4718304" y="3291839"/>
+            <a:ext cx="173736" cy="0"/>
+          </a:xfrm>
+          <a:prstGeom prst="line">
+            <a:avLst/>
+          </a:prstGeom>
+          <a:ln w="25400">
+            <a:solidFill>
+              <a:srgbClr val="8EDBD4"/>
+            </a:solidFill>
+            <a:headEnd type="none" w="med" len="med"/>
+            <a:tailEnd type="triangle" w="med" len="med"/>
+          </a:ln>
+          <a:effectLst/>
+        </p:spPr>
+      </p:cxnSp>
+      <p:cxnSp>
+        <p:nvCxnSpPr>
+          <p:cNvPr id="74" name="C1-E12 arrow 72" descr="sci-ppt:o072"/>
+          <p:cNvCxnSpPr/>
+          <p:nvPr/>
+        </p:nvCxnSpPr>
+        <p:spPr>
+          <a:xfrm>
+            <a:off x="4343400" y="2898648"/>
+            <a:ext cx="0" cy="164591"/>
+          </a:xfrm>
+          <a:prstGeom prst="line">
+            <a:avLst/>
+          </a:prstGeom>
+          <a:ln w="25400">
+            <a:solidFill>
+              <a:srgbClr val="F28BA0"/>
+            </a:solidFill>
+            <a:headEnd type="none" w="med" len="med"/>
+            <a:tailEnd type="triangle" w="med" len="med"/>
+          </a:ln>
+          <a:effectLst/>
+        </p:spPr>
+      </p:cxnSp>
+      <p:cxnSp>
+        <p:nvCxnSpPr>
+          <p:cNvPr id="75" name="C1-E12 arrow 73" descr="sci-ppt:o073"/>
+          <p:cNvCxnSpPr/>
+          <p:nvPr/>
+        </p:nvCxnSpPr>
+        <p:spPr>
+          <a:xfrm flipV="1">
+            <a:off x="4343400" y="3520439"/>
+            <a:ext cx="0" cy="164592"/>
+          </a:xfrm>
+          <a:prstGeom prst="line">
+            <a:avLst/>
+          </a:prstGeom>
+          <a:ln w="25400">
+            <a:solidFill>
+              <a:srgbClr val="F28BA0"/>
+            </a:solidFill>
+            <a:headEnd type="none" w="med" len="med"/>
+            <a:tailEnd type="triangle" w="med" len="med"/>
+          </a:ln>
+          <a:effectLst/>
+        </p:spPr>
+      </p:cxnSp>
+      <p:sp>
+        <p:nvSpPr>
+          <p:cNvPr id="76" name="C1-E12 text 74" descr="sci-ppt:o074"/>
           <p:cNvSpPr txBox="1"/>
           <p:nvPr/>
         </p:nvSpPr>
         <p:spPr>
           <a:xfrm>
-            <a:off x="5486400" y="1950720"/>
-            <a:ext cx="6096000" cy="377952"/>
+            <a:off x="6583680" y="5349240"/>
+            <a:ext cx="5212080" cy="433070"/>
           </a:xfrm>
           <a:prstGeom prst="rect">
             <a:avLst/>
@@ -3310,7 +7114,7 @@
           <a:effectLst/>
         </p:spPr>
         <p:txBody>
-          <a:bodyPr wrap="none" lIns="27432" rIns="27432" tIns="18288" bIns="18288" anchor="ctr">
+          <a:bodyPr wrap="none" lIns="18288" rIns="18288" tIns="18288" bIns="18288" anchor="t">
             <a:spAutoFit/>
           </a:bodyPr>
           <a:lstStyle/>
@@ -3321,39 +7125,15 @@
               </a:spcAft>
             </a:pPr>
             <a:r>
-              <a:rPr sz="1920" b="0" i="0">
+              <a:rPr sz="1250" b="0" i="0">
                 <a:solidFill>
                   <a:srgbClr val="E7F0F3"/>
                 </a:solidFill>
                 <a:latin typeface="Arial"/>
               </a:rPr>
-              <a:t>Exterior liquid shells: 4π r² dr</a:t>
-            </a:r>
-          </a:p>
-        </p:txBody>
-      </p:sp>
-      <p:sp>
-        <p:nvSpPr>
-          <p:cNvPr id="9" name="text8" descr="sci-ppt:C1-E12-008"/>
-          <p:cNvSpPr txBox="1"/>
-          <p:nvPr/>
-        </p:nvSpPr>
-        <p:spPr>
-          <a:xfrm>
-            <a:off x="5486400" y="2621280"/>
-            <a:ext cx="5852160" cy="359054"/>
-          </a:xfrm>
-          <a:prstGeom prst="rect">
-            <a:avLst/>
-          </a:prstGeom>
-          <a:noFill/>
-          <a:effectLst/>
-        </p:spPr>
-        <p:txBody>
-          <a:bodyPr wrap="none" lIns="27432" rIns="27432" tIns="18288" bIns="18288" anchor="ctr">
-            <a:spAutoFit/>
-          </a:bodyPr>
-          <a:lstStyle/>
+              <a:t>A shell element is squeezed radially and stretched around the</a:t>
+            </a:r>
+          </a:p>
           <a:p>
             <a:pPr algn="l">
               <a:spcAft>
@@ -3361,27 +7141,27 @@
               </a:spcAft>
             </a:pPr>
             <a:r>
-              <a:rPr sz="1823" b="0" i="0">
+              <a:rPr sz="1250" b="0" i="0">
                 <a:solidFill>
                   <a:srgbClr val="E7F0F3"/>
                 </a:solidFill>
                 <a:latin typeface="Arial"/>
               </a:rPr>
-              <a:t>Integrate r from R to infinity</a:t>
-            </a:r>
-          </a:p>
-        </p:txBody>
-      </p:sp>
-      <p:sp>
-        <p:nvSpPr>
-          <p:cNvPr id="10" name="text9" descr="sci-ppt:C1-E12-009"/>
+              <a:t>sphere; most of this shearing happens near the wall.</a:t>
+            </a:r>
+          </a:p>
+        </p:txBody>
+      </p:sp>
+      <p:sp>
+        <p:nvSpPr>
+          <p:cNvPr id="77" name="C1-E12 text 75" descr="sci-ppt:o075"/>
           <p:cNvSpPr txBox="1"/>
           <p:nvPr/>
         </p:nvSpPr>
         <p:spPr>
           <a:xfrm>
-            <a:off x="5486400" y="3352800"/>
-            <a:ext cx="5608320" cy="377952"/>
+            <a:off x="914400" y="6035040"/>
+            <a:ext cx="10881360" cy="247142"/>
           </a:xfrm>
           <a:prstGeom prst="rect">
             <a:avLst/>
@@ -3390,7 +7170,7 @@
           <a:effectLst/>
         </p:spPr>
         <p:txBody>
-          <a:bodyPr wrap="none" lIns="27432" rIns="27432" tIns="18288" bIns="18288" anchor="ctr">
+          <a:bodyPr wrap="none" lIns="18288" rIns="18288" tIns="18288" bIns="18288" anchor="t">
             <a:spAutoFit/>
           </a:bodyPr>
           <a:lstStyle/>
@@ -3401,27 +7181,27 @@
               </a:spcAft>
             </a:pPr>
             <a:r>
-              <a:rPr sz="1920" b="0" i="0">
+              <a:rPr sz="1300" b="0" i="0">
                 <a:solidFill>
-                  <a:srgbClr val="E7F0F3"/>
+                  <a:srgbClr val="F2B880"/>
                 </a:solidFill>
                 <a:latin typeface="Arial"/>
               </a:rPr>
-              <a:t>Positive dissipation density</a:t>
-            </a:r>
-          </a:p>
-        </p:txBody>
-      </p:sp>
-      <p:sp>
-        <p:nvSpPr>
-          <p:cNvPr id="11" name="text10" descr="sci-ppt:C1-E12-010"/>
+              <a:t>Direct strain-rate integration reproduces the energy-balance loss of Eq. C1-E11 exactly.</a:t>
+            </a:r>
+          </a:p>
+        </p:txBody>
+      </p:sp>
+      <p:sp>
+        <p:nvSpPr>
+          <p:cNvPr id="78" name="C1-E12 text 76" descr="sci-ppt:o076"/>
           <p:cNvSpPr txBox="1"/>
           <p:nvPr/>
         </p:nvSpPr>
         <p:spPr>
           <a:xfrm>
-            <a:off x="365760" y="4974336"/>
-            <a:ext cx="5547360" cy="321259"/>
+            <a:off x="320040" y="6510528"/>
+            <a:ext cx="11521440" cy="200660"/>
           </a:xfrm>
           <a:prstGeom prst="rect">
             <a:avLst/>
@@ -3430,7 +7210,7 @@
           <a:effectLst/>
         </p:spPr>
         <p:txBody>
-          <a:bodyPr wrap="none" lIns="27432" rIns="27432" tIns="18288" bIns="18288" anchor="ctr">
+          <a:bodyPr wrap="none" lIns="18288" rIns="18288" tIns="18288" bIns="18288" anchor="t">
             <a:spAutoFit/>
           </a:bodyPr>
           <a:lstStyle/>
@@ -3441,373 +7221,13 @@
               </a:spcAft>
             </a:pPr>
             <a:r>
-              <a:rPr sz="1632" b="0" i="0">
-                <a:solidFill>
-                  <a:srgbClr val="E7F0F3"/>
-                </a:solidFill>
-                <a:latin typeface="Arial"/>
-              </a:rPr>
-              <a:t>Drr</a:t>
-            </a:r>
-          </a:p>
-        </p:txBody>
-      </p:sp>
-      <p:sp>
-        <p:nvSpPr>
-          <p:cNvPr id="12" name="text11" descr="sci-ppt:C1-E12-011"/>
-          <p:cNvSpPr txBox="1"/>
-          <p:nvPr/>
-        </p:nvSpPr>
-        <p:spPr>
-          <a:xfrm>
-            <a:off x="365760" y="5266944"/>
-            <a:ext cx="5547360" cy="321259"/>
-          </a:xfrm>
-          <a:prstGeom prst="rect">
-            <a:avLst/>
-          </a:prstGeom>
-          <a:noFill/>
-          <a:effectLst/>
-        </p:spPr>
-        <p:txBody>
-          <a:bodyPr wrap="none" lIns="27432" rIns="27432" tIns="18288" bIns="18288" anchor="ctr">
-            <a:spAutoFit/>
-          </a:bodyPr>
-          <a:lstStyle/>
-          <a:p>
-            <a:pPr algn="l">
-              <a:spcAft>
-                <a:spcPts val="0"/>
-              </a:spcAft>
-            </a:pPr>
-            <a:r>
-              <a:rPr sz="1632" b="0" i="0">
-                <a:solidFill>
-                  <a:srgbClr val="E7F0F3"/>
-                </a:solidFill>
-                <a:latin typeface="Arial"/>
-              </a:rPr>
-              <a:t>Dψψ</a:t>
-            </a:r>
-          </a:p>
-        </p:txBody>
-      </p:sp>
-      <p:sp>
-        <p:nvSpPr>
-          <p:cNvPr id="13" name="text12" descr="sci-ppt:C1-E12-012"/>
-          <p:cNvSpPr txBox="1"/>
-          <p:nvPr/>
-        </p:nvSpPr>
-        <p:spPr>
-          <a:xfrm>
-            <a:off x="365760" y="5559552"/>
-            <a:ext cx="5547360" cy="321259"/>
-          </a:xfrm>
-          <a:prstGeom prst="rect">
-            <a:avLst/>
-          </a:prstGeom>
-          <a:noFill/>
-          <a:effectLst/>
-        </p:spPr>
-        <p:txBody>
-          <a:bodyPr wrap="none" lIns="27432" rIns="27432" tIns="18288" bIns="18288" anchor="ctr">
-            <a:spAutoFit/>
-          </a:bodyPr>
-          <a:lstStyle/>
-          <a:p>
-            <a:pPr algn="l">
-              <a:spcAft>
-                <a:spcPts val="0"/>
-              </a:spcAft>
-            </a:pPr>
-            <a:r>
-              <a:rPr sz="1632" b="0" i="0">
-                <a:solidFill>
-                  <a:srgbClr val="E7F0F3"/>
-                </a:solidFill>
-                <a:latin typeface="Arial"/>
-              </a:rPr>
-              <a:t>μ</a:t>
-            </a:r>
-          </a:p>
-        </p:txBody>
-      </p:sp>
-      <p:sp>
-        <p:nvSpPr>
-          <p:cNvPr id="14" name="text13" descr="sci-ppt:C1-E12-013"/>
-          <p:cNvSpPr txBox="1"/>
-          <p:nvPr/>
-        </p:nvSpPr>
-        <p:spPr>
-          <a:xfrm>
-            <a:off x="365760" y="5852160"/>
-            <a:ext cx="5547360" cy="321259"/>
-          </a:xfrm>
-          <a:prstGeom prst="rect">
-            <a:avLst/>
-          </a:prstGeom>
-          <a:noFill/>
-          <a:effectLst/>
-        </p:spPr>
-        <p:txBody>
-          <a:bodyPr wrap="none" lIns="27432" rIns="27432" tIns="18288" bIns="18288" anchor="ctr">
-            <a:spAutoFit/>
-          </a:bodyPr>
-          <a:lstStyle/>
-          <a:p>
-            <a:pPr algn="l">
-              <a:spcAft>
-                <a:spcPts val="0"/>
-              </a:spcAft>
-            </a:pPr>
-            <a:r>
-              <a:rPr sz="1632" b="0" i="0">
-                <a:solidFill>
-                  <a:srgbClr val="E7F0F3"/>
-                </a:solidFill>
-                <a:latin typeface="Arial"/>
-              </a:rPr>
-              <a:t>r</a:t>
-            </a:r>
-          </a:p>
-        </p:txBody>
-      </p:sp>
-      <p:sp>
-        <p:nvSpPr>
-          <p:cNvPr id="15" name="text14" descr="sci-ppt:C1-E12-014"/>
-          <p:cNvSpPr txBox="1"/>
-          <p:nvPr/>
-        </p:nvSpPr>
-        <p:spPr>
-          <a:xfrm>
-            <a:off x="365760" y="6144768"/>
-            <a:ext cx="5547360" cy="321259"/>
-          </a:xfrm>
-          <a:prstGeom prst="rect">
-            <a:avLst/>
-          </a:prstGeom>
-          <a:noFill/>
-          <a:effectLst/>
-        </p:spPr>
-        <p:txBody>
-          <a:bodyPr wrap="none" lIns="27432" rIns="27432" tIns="18288" bIns="18288" anchor="ctr">
-            <a:spAutoFit/>
-          </a:bodyPr>
-          <a:lstStyle/>
-          <a:p>
-            <a:pPr algn="l">
-              <a:spcAft>
-                <a:spcPts val="0"/>
-              </a:spcAft>
-            </a:pPr>
-            <a:r>
-              <a:rPr sz="1632" b="0" i="0">
-                <a:solidFill>
-                  <a:srgbClr val="E7F0F3"/>
-                </a:solidFill>
-                <a:latin typeface="Arial"/>
-              </a:rPr>
-              <a:t>4πr²dr</a:t>
-            </a:r>
-          </a:p>
-        </p:txBody>
-      </p:sp>
-      <p:sp>
-        <p:nvSpPr>
-          <p:cNvPr id="16" name="text15" descr="sci-ppt:C1-E12-015"/>
-          <p:cNvSpPr txBox="1"/>
-          <p:nvPr/>
-        </p:nvSpPr>
-        <p:spPr>
-          <a:xfrm>
-            <a:off x="6156960" y="4974336"/>
-            <a:ext cx="5547360" cy="321259"/>
-          </a:xfrm>
-          <a:prstGeom prst="rect">
-            <a:avLst/>
-          </a:prstGeom>
-          <a:noFill/>
-          <a:effectLst/>
-        </p:spPr>
-        <p:txBody>
-          <a:bodyPr wrap="none" lIns="27432" rIns="27432" tIns="18288" bIns="18288" anchor="ctr">
-            <a:spAutoFit/>
-          </a:bodyPr>
-          <a:lstStyle/>
-          <a:p>
-            <a:pPr algn="l">
-              <a:spcAft>
-                <a:spcPts val="0"/>
-              </a:spcAft>
-            </a:pPr>
-            <a:r>
-              <a:rPr sz="1632" b="0" i="0">
-                <a:solidFill>
-                  <a:srgbClr val="E7F0F3"/>
-                </a:solidFill>
-                <a:latin typeface="Arial"/>
-              </a:rPr>
-              <a:t>Dθθ</a:t>
-            </a:r>
-          </a:p>
-        </p:txBody>
-      </p:sp>
-      <p:sp>
-        <p:nvSpPr>
-          <p:cNvPr id="17" name="text16" descr="sci-ppt:C1-E12-016"/>
-          <p:cNvSpPr txBox="1"/>
-          <p:nvPr/>
-        </p:nvSpPr>
-        <p:spPr>
-          <a:xfrm>
-            <a:off x="6156960" y="5266944"/>
-            <a:ext cx="5547360" cy="321259"/>
-          </a:xfrm>
-          <a:prstGeom prst="rect">
-            <a:avLst/>
-          </a:prstGeom>
-          <a:noFill/>
-          <a:effectLst/>
-        </p:spPr>
-        <p:txBody>
-          <a:bodyPr wrap="none" lIns="27432" rIns="27432" tIns="18288" bIns="18288" anchor="ctr">
-            <a:spAutoFit/>
-          </a:bodyPr>
-          <a:lstStyle/>
-          <a:p>
-            <a:pPr algn="l">
-              <a:spcAft>
-                <a:spcPts val="0"/>
-              </a:spcAft>
-            </a:pPr>
-            <a:r>
-              <a:rPr sz="1632" b="0" i="0">
-                <a:solidFill>
-                  <a:srgbClr val="E7F0F3"/>
-                </a:solidFill>
-                <a:latin typeface="Arial"/>
-              </a:rPr>
-              <a:t>Dμ</a:t>
-            </a:r>
-          </a:p>
-        </p:txBody>
-      </p:sp>
-      <p:sp>
-        <p:nvSpPr>
-          <p:cNvPr id="18" name="text17" descr="sci-ppt:C1-E12-017"/>
-          <p:cNvSpPr txBox="1"/>
-          <p:nvPr/>
-        </p:nvSpPr>
-        <p:spPr>
-          <a:xfrm>
-            <a:off x="6156960" y="5559552"/>
-            <a:ext cx="5547360" cy="321259"/>
-          </a:xfrm>
-          <a:prstGeom prst="rect">
-            <a:avLst/>
-          </a:prstGeom>
-          <a:noFill/>
-          <a:effectLst/>
-        </p:spPr>
-        <p:txBody>
-          <a:bodyPr wrap="none" lIns="27432" rIns="27432" tIns="18288" bIns="18288" anchor="ctr">
-            <a:spAutoFit/>
-          </a:bodyPr>
-          <a:lstStyle/>
-          <a:p>
-            <a:pPr algn="l">
-              <a:spcAft>
-                <a:spcPts val="0"/>
-              </a:spcAft>
-            </a:pPr>
-            <a:r>
-              <a:rPr sz="1632" b="0" i="0">
-                <a:solidFill>
-                  <a:srgbClr val="E7F0F3"/>
-                </a:solidFill>
-                <a:latin typeface="Arial"/>
-              </a:rPr>
-              <a:t>R</a:t>
-            </a:r>
-          </a:p>
-        </p:txBody>
-      </p:sp>
-      <p:sp>
-        <p:nvSpPr>
-          <p:cNvPr id="19" name="text18" descr="sci-ppt:C1-E12-018"/>
-          <p:cNvSpPr txBox="1"/>
-          <p:nvPr/>
-        </p:nvSpPr>
-        <p:spPr>
-          <a:xfrm>
-            <a:off x="6156960" y="5852160"/>
-            <a:ext cx="5547360" cy="321259"/>
-          </a:xfrm>
-          <a:prstGeom prst="rect">
-            <a:avLst/>
-          </a:prstGeom>
-          <a:noFill/>
-          <a:effectLst/>
-        </p:spPr>
-        <p:txBody>
-          <a:bodyPr wrap="none" lIns="27432" rIns="27432" tIns="18288" bIns="18288" anchor="ctr">
-            <a:spAutoFit/>
-          </a:bodyPr>
-          <a:lstStyle/>
-          <a:p>
-            <a:pPr algn="l">
-              <a:spcAft>
-                <a:spcPts val="0"/>
-              </a:spcAft>
-            </a:pPr>
-            <a:r>
-              <a:rPr sz="1632" b="0" i="0">
-                <a:solidFill>
-                  <a:srgbClr val="E7F0F3"/>
-                </a:solidFill>
-                <a:latin typeface="Arial"/>
-              </a:rPr>
-              <a:t>Ṙ</a:t>
-            </a:r>
-          </a:p>
-        </p:txBody>
-      </p:sp>
-      <p:sp>
-        <p:nvSpPr>
-          <p:cNvPr id="20" name="text19" descr="sci-ppt:C1-E12-019"/>
-          <p:cNvSpPr txBox="1"/>
-          <p:nvPr/>
-        </p:nvSpPr>
-        <p:spPr>
-          <a:xfrm>
-            <a:off x="365760" y="6632448"/>
-            <a:ext cx="11277600" cy="302361"/>
-          </a:xfrm>
-          <a:prstGeom prst="rect">
-            <a:avLst/>
-          </a:prstGeom>
-          <a:noFill/>
-          <a:effectLst/>
-        </p:spPr>
-        <p:txBody>
-          <a:bodyPr wrap="none" lIns="27432" rIns="27432" tIns="18288" bIns="18288" anchor="ctr">
-            <a:spAutoFit/>
-          </a:bodyPr>
-          <a:lstStyle/>
-          <a:p>
-            <a:pPr algn="l">
-              <a:spcAft>
-                <a:spcPts val="0"/>
-              </a:spcAft>
-            </a:pPr>
-            <a:r>
-              <a:rPr sz="1536" b="0" i="0">
+              <a:rPr sz="1000" b="0" i="0">
                 <a:solidFill>
                   <a:srgbClr val="B4C7D2"/>
                 </a:solidFill>
                 <a:latin typeface="Arial"/>
               </a:rPr>
-              <a:t>Integrate the positive dissipation density in exterior shells</a:t>
+              <a:t>Profiles from Eq. C1-E12; the expanding case Ṙ &gt; 0 is drawn (signs flip for collapse).</a:t>
             </a:r>
           </a:p>
         </p:txBody>

--- a/assets/figures-editable/c1-c2/c1-e12.pptx
+++ b/assets/figures-editable/c1-c2/c1-e12.pptx
@@ -3131,21 +3131,525 @@
                 </a:solidFill>
                 <a:latin typeface="Arial"/>
               </a:rPr>
-              <a:t>C1-E12 · Independent dissipation and conservation check</a:t>
+              <a:t>C1-E12 · Idealized collapse initial-value problem</a:t>
+            </a:r>
+          </a:p>
+        </p:txBody>
+      </p:sp>
+      <p:sp>
+        <p:nvSpPr>
+          <p:cNvPr id="3" name="C1-E12 round_rect 1" descr="sci-ppt:o001"/>
+          <p:cNvSpPr/>
+          <p:nvPr/>
+        </p:nvSpPr>
+        <p:spPr>
+          <a:xfrm>
+            <a:off x="365760" y="914400"/>
+            <a:ext cx="4206240" cy="5029200"/>
+          </a:xfrm>
+          <a:prstGeom prst="roundRect">
+            <a:avLst/>
+          </a:prstGeom>
+          <a:solidFill>
+            <a:srgbClr val="213E4B"/>
+          </a:solidFill>
+          <a:ln w="20320">
+            <a:solidFill>
+              <a:srgbClr val="8EDBD4"/>
+            </a:solidFill>
+          </a:ln>
+          <a:effectLst/>
+        </p:spPr>
+        <p:txBody>
+          <a:bodyPr rtlCol="0" anchor="ctr"/>
+          <a:lstStyle/>
+          <a:p>
+            <a:pPr algn="ctr"/>
+          </a:p>
+        </p:txBody>
+      </p:sp>
+      <p:sp>
+        <p:nvSpPr>
+          <p:cNvPr id="4" name="C1-E12 text 2" descr="sci-ppt:o002"/>
+          <p:cNvSpPr txBox="1"/>
+          <p:nvPr/>
+        </p:nvSpPr>
+        <p:spPr>
+          <a:xfrm>
+            <a:off x="475488" y="969264"/>
+            <a:ext cx="3986783" cy="254889"/>
+          </a:xfrm>
+          <a:prstGeom prst="rect">
+            <a:avLst/>
+          </a:prstGeom>
+          <a:noFill/>
+          <a:effectLst/>
+        </p:spPr>
+        <p:txBody>
+          <a:bodyPr wrap="none" lIns="18288" rIns="18288" tIns="18288" bIns="18288" anchor="t">
+            <a:spAutoFit/>
+          </a:bodyPr>
+          <a:lstStyle/>
+          <a:p>
+            <a:pPr algn="l">
+              <a:spcAft>
+                <a:spcPts val="0"/>
+              </a:spcAft>
+            </a:pPr>
+            <a:r>
+              <a:rPr sz="1350" b="1" i="0">
+                <a:solidFill>
+                  <a:srgbClr val="8EDBD4"/>
+                </a:solidFill>
+                <a:latin typeface="Arial"/>
+              </a:rPr>
+              <a:t>Ideal collapse, starting at rest</a:t>
+            </a:r>
+          </a:p>
+        </p:txBody>
+      </p:sp>
+      <p:sp>
+        <p:nvSpPr>
+          <p:cNvPr id="5" name="C1-E12 ellipse 3" descr="sci-ppt:o003"/>
+          <p:cNvSpPr/>
+          <p:nvPr/>
+        </p:nvSpPr>
+        <p:spPr>
+          <a:xfrm>
+            <a:off x="1417320" y="2240280"/>
+            <a:ext cx="2103120" cy="2103120"/>
+          </a:xfrm>
+          <a:prstGeom prst="ellipse">
+            <a:avLst/>
+          </a:prstGeom>
+          <a:solidFill>
+            <a:srgbClr val="1E4A5A"/>
+          </a:solidFill>
+          <a:ln w="15240">
+            <a:solidFill>
+              <a:srgbClr val="2B6678"/>
+            </a:solidFill>
+          </a:ln>
+          <a:effectLst/>
+        </p:spPr>
+        <p:txBody>
+          <a:bodyPr rtlCol="0" anchor="ctr"/>
+          <a:lstStyle/>
+          <a:p>
+            <a:pPr algn="ctr"/>
+          </a:p>
+        </p:txBody>
+      </p:sp>
+      <p:sp>
+        <p:nvSpPr>
+          <p:cNvPr id="6" name="C1-E12 ellipse 4" descr="sci-ppt:o004"/>
+          <p:cNvSpPr/>
+          <p:nvPr/>
+        </p:nvSpPr>
+        <p:spPr>
+          <a:xfrm>
+            <a:off x="1554480" y="2377440"/>
+            <a:ext cx="1828800" cy="1828800"/>
+          </a:xfrm>
+          <a:prstGeom prst="ellipse">
+            <a:avLst/>
+          </a:prstGeom>
+          <a:solidFill>
+            <a:srgbClr val="0C1820"/>
+          </a:solidFill>
+          <a:ln w="27940">
+            <a:solidFill>
+              <a:srgbClr val="F2B880"/>
+            </a:solidFill>
+          </a:ln>
+          <a:effectLst/>
+        </p:spPr>
+        <p:txBody>
+          <a:bodyPr rtlCol="0" anchor="ctr"/>
+          <a:lstStyle/>
+          <a:p>
+            <a:pPr algn="ctr"/>
+          </a:p>
+        </p:txBody>
+      </p:sp>
+      <p:sp>
+        <p:nvSpPr>
+          <p:cNvPr id="7" name="C1-E12 text 5" descr="sci-ppt:o005"/>
+          <p:cNvSpPr txBox="1"/>
+          <p:nvPr/>
+        </p:nvSpPr>
+        <p:spPr>
+          <a:xfrm>
+            <a:off x="1737360" y="2944368"/>
+            <a:ext cx="1463040" cy="239395"/>
+          </a:xfrm>
+          <a:prstGeom prst="rect">
+            <a:avLst/>
+          </a:prstGeom>
+          <a:noFill/>
+          <a:effectLst/>
+        </p:spPr>
+        <p:txBody>
+          <a:bodyPr wrap="none" lIns="18288" rIns="18288" tIns="18288" bIns="18288" anchor="t">
+            <a:spAutoFit/>
+          </a:bodyPr>
+          <a:lstStyle/>
+          <a:p>
+            <a:pPr algn="ctr">
+              <a:spcAft>
+                <a:spcPts val="0"/>
+              </a:spcAft>
+            </a:pPr>
+            <a:r>
+              <a:rPr sz="1250" b="0" i="0">
+                <a:solidFill>
+                  <a:srgbClr val="B4C7D2"/>
+                </a:solidFill>
+                <a:latin typeface="Arial"/>
+              </a:rPr>
+              <a:t>pᵥ only</a:t>
+            </a:r>
+          </a:p>
+        </p:txBody>
+      </p:sp>
+      <p:sp>
+        <p:nvSpPr>
+          <p:cNvPr id="8" name="C1-E12 text 6" descr="sci-ppt:o006"/>
+          <p:cNvSpPr txBox="1"/>
+          <p:nvPr/>
+        </p:nvSpPr>
+        <p:spPr>
+          <a:xfrm>
+            <a:off x="1737360" y="3246120"/>
+            <a:ext cx="1463040" cy="239395"/>
+          </a:xfrm>
+          <a:prstGeom prst="rect">
+            <a:avLst/>
+          </a:prstGeom>
+          <a:noFill/>
+          <a:effectLst/>
+        </p:spPr>
+        <p:txBody>
+          <a:bodyPr wrap="none" lIns="18288" rIns="18288" tIns="18288" bIns="18288" anchor="t">
+            <a:spAutoFit/>
+          </a:bodyPr>
+          <a:lstStyle/>
+          <a:p>
+            <a:pPr algn="ctr">
+              <a:spcAft>
+                <a:spcPts val="0"/>
+              </a:spcAft>
+            </a:pPr>
+            <a:r>
+              <a:rPr sz="1250" b="1" i="0">
+                <a:solidFill>
+                  <a:srgbClr val="F2B880"/>
+                </a:solidFill>
+                <a:latin typeface="Arial"/>
+              </a:rPr>
+              <a:t>R(0) = Rₘₐₓ</a:t>
+            </a:r>
+          </a:p>
+        </p:txBody>
+      </p:sp>
+      <p:sp>
+        <p:nvSpPr>
+          <p:cNvPr id="9" name="C1-E12 text 7" descr="sci-ppt:o007"/>
+          <p:cNvSpPr txBox="1"/>
+          <p:nvPr/>
+        </p:nvSpPr>
+        <p:spPr>
+          <a:xfrm>
+            <a:off x="1737360" y="3547872"/>
+            <a:ext cx="1463040" cy="239395"/>
+          </a:xfrm>
+          <a:prstGeom prst="rect">
+            <a:avLst/>
+          </a:prstGeom>
+          <a:noFill/>
+          <a:effectLst/>
+        </p:spPr>
+        <p:txBody>
+          <a:bodyPr wrap="none" lIns="18288" rIns="18288" tIns="18288" bIns="18288" anchor="t">
+            <a:spAutoFit/>
+          </a:bodyPr>
+          <a:lstStyle/>
+          <a:p>
+            <a:pPr algn="ctr">
+              <a:spcAft>
+                <a:spcPts val="0"/>
+              </a:spcAft>
+            </a:pPr>
+            <a:r>
+              <a:rPr sz="1250" b="1" i="0">
+                <a:solidFill>
+                  <a:srgbClr val="F2B880"/>
+                </a:solidFill>
+                <a:latin typeface="Arial"/>
+              </a:rPr>
+              <a:t>Ṙ(0) = 0</a:t>
             </a:r>
           </a:p>
         </p:txBody>
       </p:sp>
       <p:cxnSp>
         <p:nvCxnSpPr>
-          <p:cNvPr id="3" name="C1-E12 line 1" descr="sci-ppt:o001"/>
+          <p:cNvPr id="10" name="C1-E12 arrow 8" descr="sci-ppt:o008"/>
           <p:cNvCxnSpPr/>
           <p:nvPr/>
         </p:nvCxnSpPr>
         <p:spPr>
-          <a:xfrm>
-            <a:off x="914400" y="4800600"/>
-            <a:ext cx="4754880" cy="0"/>
+          <a:xfrm flipH="1">
+            <a:off x="3657600" y="3291840"/>
+            <a:ext cx="594360" cy="0"/>
+          </a:xfrm>
+          <a:prstGeom prst="line">
+            <a:avLst/>
+          </a:prstGeom>
+          <a:ln w="30480">
+            <a:solidFill>
+              <a:srgbClr val="8EDBD4"/>
+            </a:solidFill>
+            <a:headEnd type="none" w="med" len="med"/>
+            <a:tailEnd type="triangle" w="med" len="med"/>
+          </a:ln>
+          <a:effectLst/>
+        </p:spPr>
+      </p:cxnSp>
+      <p:cxnSp>
+        <p:nvCxnSpPr>
+          <p:cNvPr id="11" name="C1-E12 arrow 9" descr="sci-ppt:o009"/>
+          <p:cNvCxnSpPr/>
+          <p:nvPr/>
+        </p:nvCxnSpPr>
+        <p:spPr>
+          <a:xfrm flipH="1">
+            <a:off x="3309431" y="2031012"/>
+            <a:ext cx="420276" cy="420276"/>
+          </a:xfrm>
+          <a:prstGeom prst="line">
+            <a:avLst/>
+          </a:prstGeom>
+          <a:ln w="30480">
+            <a:solidFill>
+              <a:srgbClr val="8EDBD4"/>
+            </a:solidFill>
+            <a:headEnd type="none" w="med" len="med"/>
+            <a:tailEnd type="triangle" w="med" len="med"/>
+          </a:ln>
+          <a:effectLst/>
+        </p:spPr>
+      </p:cxnSp>
+      <p:cxnSp>
+        <p:nvCxnSpPr>
+          <p:cNvPr id="12" name="C1-E12 arrow 10" descr="sci-ppt:o010"/>
+          <p:cNvCxnSpPr/>
+          <p:nvPr/>
+        </p:nvCxnSpPr>
+        <p:spPr>
+          <a:xfrm>
+            <a:off x="2468880" y="1508760"/>
+            <a:ext cx="0" cy="594360"/>
+          </a:xfrm>
+          <a:prstGeom prst="line">
+            <a:avLst/>
+          </a:prstGeom>
+          <a:ln w="30480">
+            <a:solidFill>
+              <a:srgbClr val="8EDBD4"/>
+            </a:solidFill>
+            <a:headEnd type="none" w="med" len="med"/>
+            <a:tailEnd type="triangle" w="med" len="med"/>
+          </a:ln>
+          <a:effectLst/>
+        </p:spPr>
+      </p:cxnSp>
+      <p:cxnSp>
+        <p:nvCxnSpPr>
+          <p:cNvPr id="13" name="C1-E12 arrow 11" descr="sci-ppt:o011"/>
+          <p:cNvCxnSpPr/>
+          <p:nvPr/>
+        </p:nvCxnSpPr>
+        <p:spPr>
+          <a:xfrm>
+            <a:off x="1208052" y="2031012"/>
+            <a:ext cx="420276" cy="420276"/>
+          </a:xfrm>
+          <a:prstGeom prst="line">
+            <a:avLst/>
+          </a:prstGeom>
+          <a:ln w="30480">
+            <a:solidFill>
+              <a:srgbClr val="8EDBD4"/>
+            </a:solidFill>
+            <a:headEnd type="none" w="med" len="med"/>
+            <a:tailEnd type="triangle" w="med" len="med"/>
+          </a:ln>
+          <a:effectLst/>
+        </p:spPr>
+      </p:cxnSp>
+      <p:cxnSp>
+        <p:nvCxnSpPr>
+          <p:cNvPr id="14" name="C1-E12 arrow 12" descr="sci-ppt:o012"/>
+          <p:cNvCxnSpPr/>
+          <p:nvPr/>
+        </p:nvCxnSpPr>
+        <p:spPr>
+          <a:xfrm>
+            <a:off x="685800" y="3291839"/>
+            <a:ext cx="594360" cy="1"/>
+          </a:xfrm>
+          <a:prstGeom prst="line">
+            <a:avLst/>
+          </a:prstGeom>
+          <a:ln w="30480">
+            <a:solidFill>
+              <a:srgbClr val="8EDBD4"/>
+            </a:solidFill>
+            <a:headEnd type="none" w="med" len="med"/>
+            <a:tailEnd type="triangle" w="med" len="med"/>
+          </a:ln>
+          <a:effectLst/>
+        </p:spPr>
+      </p:cxnSp>
+      <p:cxnSp>
+        <p:nvCxnSpPr>
+          <p:cNvPr id="15" name="C1-E12 arrow 13" descr="sci-ppt:o013"/>
+          <p:cNvCxnSpPr/>
+          <p:nvPr/>
+        </p:nvCxnSpPr>
+        <p:spPr>
+          <a:xfrm flipV="1">
+            <a:off x="1208052" y="4132391"/>
+            <a:ext cx="420276" cy="420276"/>
+          </a:xfrm>
+          <a:prstGeom prst="line">
+            <a:avLst/>
+          </a:prstGeom>
+          <a:ln w="30480">
+            <a:solidFill>
+              <a:srgbClr val="8EDBD4"/>
+            </a:solidFill>
+            <a:headEnd type="none" w="med" len="med"/>
+            <a:tailEnd type="triangle" w="med" len="med"/>
+          </a:ln>
+          <a:effectLst/>
+        </p:spPr>
+      </p:cxnSp>
+      <p:cxnSp>
+        <p:nvCxnSpPr>
+          <p:cNvPr id="16" name="C1-E12 arrow 14" descr="sci-ppt:o014"/>
+          <p:cNvCxnSpPr/>
+          <p:nvPr/>
+        </p:nvCxnSpPr>
+        <p:spPr>
+          <a:xfrm flipV="1">
+            <a:off x="2468879" y="4480560"/>
+            <a:ext cx="0" cy="594360"/>
+          </a:xfrm>
+          <a:prstGeom prst="line">
+            <a:avLst/>
+          </a:prstGeom>
+          <a:ln w="30480">
+            <a:solidFill>
+              <a:srgbClr val="8EDBD4"/>
+            </a:solidFill>
+            <a:headEnd type="none" w="med" len="med"/>
+            <a:tailEnd type="triangle" w="med" len="med"/>
+          </a:ln>
+          <a:effectLst/>
+        </p:spPr>
+      </p:cxnSp>
+      <p:cxnSp>
+        <p:nvCxnSpPr>
+          <p:cNvPr id="17" name="C1-E12 arrow 15" descr="sci-ppt:o015"/>
+          <p:cNvCxnSpPr/>
+          <p:nvPr/>
+        </p:nvCxnSpPr>
+        <p:spPr>
+          <a:xfrm flipH="1" flipV="1">
+            <a:off x="3309431" y="4132391"/>
+            <a:ext cx="420276" cy="420276"/>
+          </a:xfrm>
+          <a:prstGeom prst="line">
+            <a:avLst/>
+          </a:prstGeom>
+          <a:ln w="30480">
+            <a:solidFill>
+              <a:srgbClr val="8EDBD4"/>
+            </a:solidFill>
+            <a:headEnd type="none" w="med" len="med"/>
+            <a:tailEnd type="triangle" w="med" len="med"/>
+          </a:ln>
+          <a:effectLst/>
+        </p:spPr>
+      </p:cxnSp>
+      <p:sp>
+        <p:nvSpPr>
+          <p:cNvPr id="18" name="C1-E12 text 16" descr="sci-ppt:o016"/>
+          <p:cNvSpPr txBox="1"/>
+          <p:nvPr/>
+        </p:nvSpPr>
+        <p:spPr>
+          <a:xfrm>
+            <a:off x="502920" y="5212080"/>
+            <a:ext cx="3931920" cy="433070"/>
+          </a:xfrm>
+          <a:prstGeom prst="rect">
+            <a:avLst/>
+          </a:prstGeom>
+          <a:noFill/>
+          <a:effectLst/>
+        </p:spPr>
+        <p:txBody>
+          <a:bodyPr wrap="none" lIns="18288" rIns="18288" tIns="18288" bIns="18288" anchor="t">
+            <a:spAutoFit/>
+          </a:bodyPr>
+          <a:lstStyle/>
+          <a:p>
+            <a:pPr algn="l">
+              <a:spcAft>
+                <a:spcPts val="0"/>
+              </a:spcAft>
+            </a:pPr>
+            <a:r>
+              <a:rPr sz="1250" b="0" i="0">
+                <a:solidFill>
+                  <a:srgbClr val="E7F0F3"/>
+                </a:solidFill>
+                <a:latin typeface="Arial"/>
+              </a:rPr>
+              <a:t>p∞ squeezes the liquid; the gas pushes back</a:t>
+            </a:r>
+          </a:p>
+          <a:p>
+            <a:pPr algn="l">
+              <a:spcAft>
+                <a:spcPts val="0"/>
+              </a:spcAft>
+            </a:pPr>
+            <a:r>
+              <a:rPr sz="1250" b="0" i="0">
+                <a:solidFill>
+                  <a:srgbClr val="E7F0F3"/>
+                </a:solidFill>
+                <a:latin typeface="Arial"/>
+              </a:rPr>
+              <a:t>only with pᵥ.   Δp_c = p∞ − pᵥ &gt; 0.</a:t>
+            </a:r>
+          </a:p>
+        </p:txBody>
+      </p:sp>
+      <p:cxnSp>
+        <p:nvCxnSpPr>
+          <p:cNvPr id="19" name="C1-E12 line 17" descr="sci-ppt:o017"/>
+          <p:cNvCxnSpPr/>
+          <p:nvPr/>
+        </p:nvCxnSpPr>
+        <p:spPr>
+          <a:xfrm>
+            <a:off x="5577840" y="4937760"/>
+            <a:ext cx="5943600" cy="0"/>
           </a:xfrm>
           <a:prstGeom prst="line">
             <a:avLst/>
@@ -3160,14 +3664,14 @@
       </p:cxnSp>
       <p:cxnSp>
         <p:nvCxnSpPr>
-          <p:cNvPr id="4" name="C1-E12 line 2" descr="sci-ppt:o002"/>
+          <p:cNvPr id="20" name="C1-E12 line 18" descr="sci-ppt:o018"/>
           <p:cNvCxnSpPr/>
           <p:nvPr/>
         </p:nvCxnSpPr>
         <p:spPr>
           <a:xfrm>
-            <a:off x="914400" y="1417320"/>
-            <a:ext cx="0" cy="3383280"/>
+            <a:off x="5577840" y="1371600"/>
+            <a:ext cx="0" cy="3566160"/>
           </a:xfrm>
           <a:prstGeom prst="line">
             <a:avLst/>
@@ -3182,13 +3686,13 @@
       </p:cxnSp>
       <p:cxnSp>
         <p:nvCxnSpPr>
-          <p:cNvPr id="5" name="C1-E12 line 3" descr="sci-ppt:o003"/>
+          <p:cNvPr id="21" name="C1-E12 line 19" descr="sci-ppt:o019"/>
           <p:cNvCxnSpPr/>
           <p:nvPr/>
         </p:nvCxnSpPr>
         <p:spPr>
           <a:xfrm>
-            <a:off x="914400" y="4800600"/>
+            <a:off x="5577840" y="4937760"/>
             <a:ext cx="0" cy="64008"/>
           </a:xfrm>
           <a:prstGeom prst="line">
@@ -3204,14 +3708,14 @@
       </p:cxnSp>
       <p:cxnSp>
         <p:nvCxnSpPr>
-          <p:cNvPr id="6" name="C1-E12 line 4" descr="sci-ppt:o004"/>
+          <p:cNvPr id="22" name="C1-E12 line 20" descr="sci-ppt:o020"/>
           <p:cNvCxnSpPr/>
           <p:nvPr/>
         </p:nvCxnSpPr>
         <p:spPr>
           <a:xfrm>
-            <a:off x="914400" y="1417320"/>
-            <a:ext cx="0" cy="3383280"/>
+            <a:off x="5577840" y="1371600"/>
+            <a:ext cx="0" cy="3566160"/>
           </a:xfrm>
           <a:prstGeom prst="line">
             <a:avLst/>
@@ -3226,13 +3730,97 @@
       </p:cxnSp>
       <p:sp>
         <p:nvSpPr>
-          <p:cNvPr id="7" name="C1-E12 text 5" descr="sci-ppt:o005"/>
+          <p:cNvPr id="23" name="C1-E12 text 21" descr="sci-ppt:o021"/>
           <p:cNvSpPr txBox="1"/>
           <p:nvPr/>
         </p:nvSpPr>
         <p:spPr>
           <a:xfrm>
-            <a:off x="457200" y="4882896"/>
+            <a:off x="5120640" y="5020056"/>
+            <a:ext cx="914400" cy="208407"/>
+          </a:xfrm>
+          <a:prstGeom prst="rect">
+            <a:avLst/>
+          </a:prstGeom>
+          <a:noFill/>
+          <a:effectLst/>
+        </p:spPr>
+        <p:txBody>
+          <a:bodyPr wrap="none" lIns="18288" rIns="18288" tIns="18288" bIns="18288" anchor="t">
+            <a:spAutoFit/>
+          </a:bodyPr>
+          <a:lstStyle/>
+          <a:p>
+            <a:pPr algn="ctr">
+              <a:spcAft>
+                <a:spcPts val="0"/>
+              </a:spcAft>
+            </a:pPr>
+            <a:r>
+              <a:rPr sz="1050" b="0" i="0">
+                <a:solidFill>
+                  <a:srgbClr val="B4C7D2"/>
+                </a:solidFill>
+                <a:latin typeface="Arial"/>
+              </a:rPr>
+              <a:t>0</a:t>
+            </a:r>
+          </a:p>
+        </p:txBody>
+      </p:sp>
+      <p:cxnSp>
+        <p:nvCxnSpPr>
+          <p:cNvPr id="24" name="C1-E12 line 22" descr="sci-ppt:o022"/>
+          <p:cNvCxnSpPr/>
+          <p:nvPr/>
+        </p:nvCxnSpPr>
+        <p:spPr>
+          <a:xfrm>
+            <a:off x="7559039" y="4937760"/>
+            <a:ext cx="0" cy="64008"/>
+          </a:xfrm>
+          <a:prstGeom prst="line">
+            <a:avLst/>
+          </a:prstGeom>
+          <a:ln w="12700">
+            <a:solidFill>
+              <a:srgbClr val="B4C7D2"/>
+            </a:solidFill>
+          </a:ln>
+          <a:effectLst/>
+        </p:spPr>
+      </p:cxnSp>
+      <p:cxnSp>
+        <p:nvCxnSpPr>
+          <p:cNvPr id="25" name="C1-E12 line 23" descr="sci-ppt:o023"/>
+          <p:cNvCxnSpPr/>
+          <p:nvPr/>
+        </p:nvCxnSpPr>
+        <p:spPr>
+          <a:xfrm>
+            <a:off x="7559039" y="1371600"/>
+            <a:ext cx="0" cy="3566160"/>
+          </a:xfrm>
+          <a:prstGeom prst="line">
+            <a:avLst/>
+          </a:prstGeom>
+          <a:ln w="7620">
+            <a:solidFill>
+              <a:srgbClr val="2E4756"/>
+            </a:solidFill>
+          </a:ln>
+          <a:effectLst/>
+        </p:spPr>
+      </p:cxnSp>
+      <p:sp>
+        <p:nvSpPr>
+          <p:cNvPr id="26" name="C1-E12 text 24" descr="sci-ppt:o024"/>
+          <p:cNvSpPr txBox="1"/>
+          <p:nvPr/>
+        </p:nvSpPr>
+        <p:spPr>
+          <a:xfrm>
+            <a:off x="7101839" y="5020056"/>
             <a:ext cx="914400" cy="208407"/>
           </a:xfrm>
           <a:prstGeom prst="rect">
@@ -3266,13 +3854,13 @@
       </p:sp>
       <p:cxnSp>
         <p:nvCxnSpPr>
-          <p:cNvPr id="8" name="C1-E12 line 6" descr="sci-ppt:o006"/>
+          <p:cNvPr id="27" name="C1-E12 line 25" descr="sci-ppt:o025"/>
           <p:cNvCxnSpPr/>
           <p:nvPr/>
         </p:nvCxnSpPr>
         <p:spPr>
           <a:xfrm>
-            <a:off x="2499360" y="4800600"/>
+            <a:off x="9540240" y="4937760"/>
             <a:ext cx="0" cy="64008"/>
           </a:xfrm>
           <a:prstGeom prst="line">
@@ -3288,14 +3876,14 @@
       </p:cxnSp>
       <p:cxnSp>
         <p:nvCxnSpPr>
-          <p:cNvPr id="9" name="C1-E12 line 7" descr="sci-ppt:o007"/>
+          <p:cNvPr id="28" name="C1-E12 line 26" descr="sci-ppt:o026"/>
           <p:cNvCxnSpPr/>
           <p:nvPr/>
         </p:nvCxnSpPr>
         <p:spPr>
           <a:xfrm>
-            <a:off x="2499360" y="1417320"/>
-            <a:ext cx="0" cy="3383280"/>
+            <a:off x="9540240" y="1371600"/>
+            <a:ext cx="0" cy="3566160"/>
           </a:xfrm>
           <a:prstGeom prst="line">
             <a:avLst/>
@@ -3310,13 +3898,13 @@
       </p:cxnSp>
       <p:sp>
         <p:nvSpPr>
-          <p:cNvPr id="10" name="C1-E12 text 8" descr="sci-ppt:o008"/>
+          <p:cNvPr id="29" name="C1-E12 text 27" descr="sci-ppt:o027"/>
           <p:cNvSpPr txBox="1"/>
           <p:nvPr/>
         </p:nvSpPr>
         <p:spPr>
           <a:xfrm>
-            <a:off x="2042160" y="4882896"/>
+            <a:off x="9083040" y="5020056"/>
             <a:ext cx="914400" cy="208407"/>
           </a:xfrm>
           <a:prstGeom prst="rect">
@@ -3350,13 +3938,13 @@
       </p:sp>
       <p:cxnSp>
         <p:nvCxnSpPr>
-          <p:cNvPr id="11" name="C1-E12 line 9" descr="sci-ppt:o009"/>
+          <p:cNvPr id="30" name="C1-E12 line 28" descr="sci-ppt:o028"/>
           <p:cNvCxnSpPr/>
           <p:nvPr/>
         </p:nvCxnSpPr>
         <p:spPr>
           <a:xfrm>
-            <a:off x="4084320" y="4800600"/>
+            <a:off x="11521440" y="4937760"/>
             <a:ext cx="0" cy="64008"/>
           </a:xfrm>
           <a:prstGeom prst="line">
@@ -3372,14 +3960,14 @@
       </p:cxnSp>
       <p:cxnSp>
         <p:nvCxnSpPr>
-          <p:cNvPr id="12" name="C1-E12 line 10" descr="sci-ppt:o010"/>
+          <p:cNvPr id="31" name="C1-E12 line 29" descr="sci-ppt:o029"/>
           <p:cNvCxnSpPr/>
           <p:nvPr/>
         </p:nvCxnSpPr>
         <p:spPr>
           <a:xfrm>
-            <a:off x="4084320" y="1417320"/>
-            <a:ext cx="0" cy="3383280"/>
+            <a:off x="11521440" y="1371600"/>
+            <a:ext cx="0" cy="3566160"/>
           </a:xfrm>
           <a:prstGeom prst="line">
             <a:avLst/>
@@ -3394,13 +3982,13 @@
       </p:cxnSp>
       <p:sp>
         <p:nvSpPr>
-          <p:cNvPr id="13" name="C1-E12 text 11" descr="sci-ppt:o011"/>
+          <p:cNvPr id="32" name="C1-E12 text 30" descr="sci-ppt:o030"/>
           <p:cNvSpPr txBox="1"/>
           <p:nvPr/>
         </p:nvSpPr>
         <p:spPr>
           <a:xfrm>
-            <a:off x="3627120" y="4882896"/>
+            <a:off x="11064240" y="5020056"/>
             <a:ext cx="914400" cy="208407"/>
           </a:xfrm>
           <a:prstGeom prst="rect">
@@ -3434,14 +4022,14 @@
       </p:sp>
       <p:cxnSp>
         <p:nvCxnSpPr>
-          <p:cNvPr id="14" name="C1-E12 line 12" descr="sci-ppt:o012"/>
+          <p:cNvPr id="33" name="C1-E12 line 31" descr="sci-ppt:o031"/>
           <p:cNvCxnSpPr/>
           <p:nvPr/>
         </p:nvCxnSpPr>
         <p:spPr>
           <a:xfrm>
-            <a:off x="5669280" y="4800600"/>
-            <a:ext cx="0" cy="64008"/>
+            <a:off x="5513831" y="4937760"/>
+            <a:ext cx="64009" cy="0"/>
           </a:xfrm>
           <a:prstGeom prst="line">
             <a:avLst/>
@@ -3456,14 +4044,36 @@
       </p:cxnSp>
       <p:cxnSp>
         <p:nvCxnSpPr>
-          <p:cNvPr id="15" name="C1-E12 line 13" descr="sci-ppt:o013"/>
+          <p:cNvPr id="34" name="C1-E12 line 32" descr="sci-ppt:o032"/>
           <p:cNvCxnSpPr/>
           <p:nvPr/>
         </p:nvCxnSpPr>
         <p:spPr>
           <a:xfrm>
-            <a:off x="5669280" y="1417320"/>
-            <a:ext cx="0" cy="3383280"/>
+            <a:off x="5513831" y="4088674"/>
+            <a:ext cx="64009" cy="0"/>
+          </a:xfrm>
+          <a:prstGeom prst="line">
+            <a:avLst/>
+          </a:prstGeom>
+          <a:ln w="12700">
+            <a:solidFill>
+              <a:srgbClr val="B4C7D2"/>
+            </a:solidFill>
+          </a:ln>
+          <a:effectLst/>
+        </p:spPr>
+      </p:cxnSp>
+      <p:cxnSp>
+        <p:nvCxnSpPr>
+          <p:cNvPr id="35" name="C1-E12 line 33" descr="sci-ppt:o033"/>
+          <p:cNvCxnSpPr/>
+          <p:nvPr/>
+        </p:nvCxnSpPr>
+        <p:spPr>
+          <a:xfrm>
+            <a:off x="5577840" y="4088674"/>
+            <a:ext cx="5943600" cy="0"/>
           </a:xfrm>
           <a:prstGeom prst="line">
             <a:avLst/>
@@ -3478,14 +4088,14 @@
       </p:cxnSp>
       <p:sp>
         <p:nvSpPr>
-          <p:cNvPr id="16" name="C1-E12 text 14" descr="sci-ppt:o014"/>
+          <p:cNvPr id="36" name="C1-E12 text 34" descr="sci-ppt:o034"/>
           <p:cNvSpPr txBox="1"/>
           <p:nvPr/>
         </p:nvSpPr>
         <p:spPr>
           <a:xfrm>
-            <a:off x="5212080" y="4882896"/>
-            <a:ext cx="914400" cy="208407"/>
+            <a:off x="4709159" y="4006378"/>
+            <a:ext cx="777240" cy="208407"/>
           </a:xfrm>
           <a:prstGeom prst="rect">
             <a:avLst/>
@@ -3499,7 +4109,7 @@
           </a:bodyPr>
           <a:lstStyle/>
           <a:p>
-            <a:pPr algn="ctr">
+            <a:pPr algn="r">
               <a:spcAft>
                 <a:spcPts val="0"/>
               </a:spcAft>
@@ -3511,21 +4121,21 @@
                 </a:solidFill>
                 <a:latin typeface="Arial"/>
               </a:rPr>
-              <a:t>4</a:t>
+              <a:t>0.25</a:t>
             </a:r>
           </a:p>
         </p:txBody>
       </p:sp>
       <p:cxnSp>
         <p:nvCxnSpPr>
-          <p:cNvPr id="17" name="C1-E12 line 15" descr="sci-ppt:o015"/>
+          <p:cNvPr id="37" name="C1-E12 line 35" descr="sci-ppt:o035"/>
           <p:cNvCxnSpPr/>
           <p:nvPr/>
         </p:nvCxnSpPr>
         <p:spPr>
           <a:xfrm>
-            <a:off x="850392" y="4601583"/>
-            <a:ext cx="64008" cy="0"/>
+            <a:off x="5513831" y="3239588"/>
+            <a:ext cx="64009" cy="0"/>
           </a:xfrm>
           <a:prstGeom prst="line">
             <a:avLst/>
@@ -3540,14 +4150,14 @@
       </p:cxnSp>
       <p:cxnSp>
         <p:nvCxnSpPr>
-          <p:cNvPr id="18" name="C1-E12 line 16" descr="sci-ppt:o016"/>
+          <p:cNvPr id="38" name="C1-E12 line 36" descr="sci-ppt:o036"/>
           <p:cNvCxnSpPr/>
           <p:nvPr/>
         </p:nvCxnSpPr>
         <p:spPr>
           <a:xfrm>
-            <a:off x="914400" y="4601583"/>
-            <a:ext cx="4754880" cy="0"/>
+            <a:off x="5577840" y="3239588"/>
+            <a:ext cx="5943600" cy="0"/>
           </a:xfrm>
           <a:prstGeom prst="line">
             <a:avLst/>
@@ -3562,13 +4172,13 @@
       </p:cxnSp>
       <p:sp>
         <p:nvSpPr>
-          <p:cNvPr id="19" name="C1-E12 text 17" descr="sci-ppt:o017"/>
+          <p:cNvPr id="39" name="C1-E12 text 37" descr="sci-ppt:o037"/>
           <p:cNvSpPr txBox="1"/>
           <p:nvPr/>
         </p:nvSpPr>
         <p:spPr>
           <a:xfrm>
-            <a:off x="45720" y="4519287"/>
+            <a:off x="4709159" y="3157292"/>
             <a:ext cx="777240" cy="208407"/>
           </a:xfrm>
           <a:prstGeom prst="rect">
@@ -3595,21 +4205,21 @@
                 </a:solidFill>
                 <a:latin typeface="Arial"/>
               </a:rPr>
-              <a:t>-2</a:t>
+              <a:t>0.50</a:t>
             </a:r>
           </a:p>
         </p:txBody>
       </p:sp>
       <p:cxnSp>
         <p:nvCxnSpPr>
-          <p:cNvPr id="20" name="C1-E12 line 18" descr="sci-ppt:o018"/>
+          <p:cNvPr id="40" name="C1-E12 line 38" descr="sci-ppt:o038"/>
           <p:cNvCxnSpPr/>
           <p:nvPr/>
         </p:nvCxnSpPr>
         <p:spPr>
           <a:xfrm>
-            <a:off x="850392" y="3606501"/>
-            <a:ext cx="64008" cy="0"/>
+            <a:off x="5513831" y="2390502"/>
+            <a:ext cx="64009" cy="0"/>
           </a:xfrm>
           <a:prstGeom prst="line">
             <a:avLst/>
@@ -3624,14 +4234,14 @@
       </p:cxnSp>
       <p:cxnSp>
         <p:nvCxnSpPr>
-          <p:cNvPr id="21" name="C1-E12 line 19" descr="sci-ppt:o019"/>
+          <p:cNvPr id="41" name="C1-E12 line 39" descr="sci-ppt:o039"/>
           <p:cNvCxnSpPr/>
           <p:nvPr/>
         </p:nvCxnSpPr>
         <p:spPr>
           <a:xfrm>
-            <a:off x="914400" y="3606501"/>
-            <a:ext cx="4754880" cy="0"/>
+            <a:off x="5577840" y="2390502"/>
+            <a:ext cx="5943600" cy="0"/>
           </a:xfrm>
           <a:prstGeom prst="line">
             <a:avLst/>
@@ -3646,13 +4256,13 @@
       </p:cxnSp>
       <p:sp>
         <p:nvSpPr>
-          <p:cNvPr id="22" name="C1-E12 text 20" descr="sci-ppt:o020"/>
+          <p:cNvPr id="42" name="C1-E12 text 40" descr="sci-ppt:o040"/>
           <p:cNvSpPr txBox="1"/>
           <p:nvPr/>
         </p:nvSpPr>
         <p:spPr>
           <a:xfrm>
-            <a:off x="45720" y="3524205"/>
+            <a:off x="4709159" y="2308206"/>
             <a:ext cx="777240" cy="208407"/>
           </a:xfrm>
           <a:prstGeom prst="rect">
@@ -3679,21 +4289,21 @@
                 </a:solidFill>
                 <a:latin typeface="Arial"/>
               </a:rPr>
-              <a:t>-1</a:t>
+              <a:t>0.75</a:t>
             </a:r>
           </a:p>
         </p:txBody>
       </p:sp>
       <p:cxnSp>
         <p:nvCxnSpPr>
-          <p:cNvPr id="23" name="C1-E12 line 21" descr="sci-ppt:o021"/>
+          <p:cNvPr id="43" name="C1-E12 line 41" descr="sci-ppt:o041"/>
           <p:cNvCxnSpPr/>
           <p:nvPr/>
         </p:nvCxnSpPr>
         <p:spPr>
           <a:xfrm>
-            <a:off x="850392" y="2611418"/>
-            <a:ext cx="64008" cy="0"/>
+            <a:off x="5513831" y="1541417"/>
+            <a:ext cx="64009" cy="0"/>
           </a:xfrm>
           <a:prstGeom prst="line">
             <a:avLst/>
@@ -3708,14 +4318,14 @@
       </p:cxnSp>
       <p:cxnSp>
         <p:nvCxnSpPr>
-          <p:cNvPr id="24" name="C1-E12 line 22" descr="sci-ppt:o022"/>
+          <p:cNvPr id="44" name="C1-E12 line 42" descr="sci-ppt:o042"/>
           <p:cNvCxnSpPr/>
           <p:nvPr/>
         </p:nvCxnSpPr>
         <p:spPr>
           <a:xfrm>
-            <a:off x="914400" y="2611418"/>
-            <a:ext cx="4754880" cy="0"/>
+            <a:off x="5577840" y="1541417"/>
+            <a:ext cx="5943600" cy="0"/>
           </a:xfrm>
           <a:prstGeom prst="line">
             <a:avLst/>
@@ -3730,13 +4340,13 @@
       </p:cxnSp>
       <p:sp>
         <p:nvSpPr>
-          <p:cNvPr id="25" name="C1-E12 text 23" descr="sci-ppt:o023"/>
+          <p:cNvPr id="45" name="C1-E12 text 43" descr="sci-ppt:o043"/>
           <p:cNvSpPr txBox="1"/>
           <p:nvPr/>
         </p:nvSpPr>
         <p:spPr>
           <a:xfrm>
-            <a:off x="45720" y="2529122"/>
+            <a:off x="4709159" y="1459121"/>
             <a:ext cx="777240" cy="208407"/>
           </a:xfrm>
           <a:prstGeom prst="rect">
@@ -3763,105 +4373,21 @@
                 </a:solidFill>
                 <a:latin typeface="Arial"/>
               </a:rPr>
-              <a:t>0</a:t>
-            </a:r>
-          </a:p>
-        </p:txBody>
-      </p:sp>
-      <p:cxnSp>
-        <p:nvCxnSpPr>
-          <p:cNvPr id="26" name="C1-E12 line 24" descr="sci-ppt:o024"/>
-          <p:cNvCxnSpPr/>
-          <p:nvPr/>
-        </p:nvCxnSpPr>
-        <p:spPr>
-          <a:xfrm>
-            <a:off x="850392" y="1616336"/>
-            <a:ext cx="64008" cy="0"/>
-          </a:xfrm>
-          <a:prstGeom prst="line">
-            <a:avLst/>
-          </a:prstGeom>
-          <a:ln w="12700">
-            <a:solidFill>
-              <a:srgbClr val="B4C7D2"/>
-            </a:solidFill>
-          </a:ln>
-          <a:effectLst/>
-        </p:spPr>
-      </p:cxnSp>
-      <p:cxnSp>
-        <p:nvCxnSpPr>
-          <p:cNvPr id="27" name="C1-E12 line 25" descr="sci-ppt:o025"/>
-          <p:cNvCxnSpPr/>
-          <p:nvPr/>
-        </p:nvCxnSpPr>
-        <p:spPr>
-          <a:xfrm>
-            <a:off x="914400" y="1616336"/>
-            <a:ext cx="4754880" cy="0"/>
-          </a:xfrm>
-          <a:prstGeom prst="line">
-            <a:avLst/>
-          </a:prstGeom>
-          <a:ln w="7620">
-            <a:solidFill>
-              <a:srgbClr val="2E4756"/>
-            </a:solidFill>
-          </a:ln>
-          <a:effectLst/>
-        </p:spPr>
-      </p:cxnSp>
-      <p:sp>
-        <p:nvSpPr>
-          <p:cNvPr id="28" name="C1-E12 text 26" descr="sci-ppt:o026"/>
+              <a:t>1.00</a:t>
+            </a:r>
+          </a:p>
+        </p:txBody>
+      </p:sp>
+      <p:sp>
+        <p:nvSpPr>
+          <p:cNvPr id="46" name="C1-E12 text 44" descr="sci-ppt:o044"/>
           <p:cNvSpPr txBox="1"/>
           <p:nvPr/>
         </p:nvSpPr>
         <p:spPr>
           <a:xfrm>
-            <a:off x="45720" y="1534040"/>
-            <a:ext cx="777240" cy="208407"/>
-          </a:xfrm>
-          <a:prstGeom prst="rect">
-            <a:avLst/>
-          </a:prstGeom>
-          <a:noFill/>
-          <a:effectLst/>
-        </p:spPr>
-        <p:txBody>
-          <a:bodyPr wrap="none" lIns="18288" rIns="18288" tIns="18288" bIns="18288" anchor="t">
-            <a:spAutoFit/>
-          </a:bodyPr>
-          <a:lstStyle/>
-          <a:p>
-            <a:pPr algn="r">
-              <a:spcAft>
-                <a:spcPts val="0"/>
-              </a:spcAft>
-            </a:pPr>
-            <a:r>
-              <a:rPr sz="1050" b="0" i="0">
-                <a:solidFill>
-                  <a:srgbClr val="B4C7D2"/>
-                </a:solidFill>
-                <a:latin typeface="Arial"/>
-              </a:rPr>
-              <a:t>1</a:t>
-            </a:r>
-          </a:p>
-        </p:txBody>
-      </p:sp>
-      <p:sp>
-        <p:nvSpPr>
-          <p:cNvPr id="29" name="C1-E12 text 27" descr="sci-ppt:o027"/>
-          <p:cNvSpPr txBox="1"/>
-          <p:nvPr/>
-        </p:nvSpPr>
-        <p:spPr>
-          <a:xfrm>
-            <a:off x="914400" y="5084064"/>
-            <a:ext cx="4754880" cy="231648"/>
+            <a:off x="5577840" y="5221224"/>
+            <a:ext cx="5943600" cy="231648"/>
           </a:xfrm>
           <a:prstGeom prst="rect">
             <a:avLst/>
@@ -3887,21 +4413,21 @@
                 </a:solidFill>
                 <a:latin typeface="Arial"/>
               </a:rPr>
-              <a:t>r / R</a:t>
-            </a:r>
-          </a:p>
-        </p:txBody>
-      </p:sp>
-      <p:sp>
-        <p:nvSpPr>
-          <p:cNvPr id="30" name="C1-E12 text 28" descr="sci-ppt:o028"/>
+              <a:t>t  (µs)</a:t>
+            </a:r>
+          </a:p>
+        </p:txBody>
+      </p:sp>
+      <p:sp>
+        <p:nvSpPr>
+          <p:cNvPr id="47" name="C1-E12 text 45" descr="sci-ppt:o045"/>
           <p:cNvSpPr txBox="1"/>
           <p:nvPr/>
         </p:nvSpPr>
         <p:spPr>
           <a:xfrm>
-            <a:off x="365760" y="1069848"/>
-            <a:ext cx="4754880" cy="231648"/>
+            <a:off x="5029200" y="1024128"/>
+            <a:ext cx="5943600" cy="231648"/>
           </a:xfrm>
           <a:prstGeom prst="rect">
             <a:avLst/>
@@ -3927,43 +4453,21 @@
                 </a:solidFill>
                 <a:latin typeface="Arial"/>
               </a:rPr>
-              <a:t>strain rate / (Ṙ/R)</a:t>
-            </a:r>
-          </a:p>
-        </p:txBody>
-      </p:sp>
-      <p:cxnSp>
-        <p:nvCxnSpPr>
-          <p:cNvPr id="31" name="C1-E12 line 29" descr="sci-ppt:o029"/>
-          <p:cNvCxnSpPr/>
-          <p:nvPr/>
-        </p:nvCxnSpPr>
-        <p:spPr>
-          <a:xfrm>
-            <a:off x="914400" y="2611418"/>
-            <a:ext cx="4754880" cy="0"/>
-          </a:xfrm>
-          <a:prstGeom prst="line">
-            <a:avLst/>
-          </a:prstGeom>
-          <a:ln w="15240">
-            <a:solidFill>
-              <a:srgbClr val="2E4756"/>
-            </a:solidFill>
-          </a:ln>
-          <a:effectLst/>
-        </p:spPr>
-      </p:cxnSp>
-      <p:sp>
-        <p:nvSpPr>
-          <p:cNvPr id="32" name="C1-E12 polygon 30" descr="sci-ppt:o030"/>
+              <a:t>R / Rₘₐₓ</a:t>
+            </a:r>
+          </a:p>
+        </p:txBody>
+      </p:sp>
+      <p:sp>
+        <p:nvSpPr>
+          <p:cNvPr id="48" name="C1-E12 polygon 46" descr="sci-ppt:o046"/>
           <p:cNvSpPr/>
           <p:nvPr/>
         </p:nvSpPr>
         <p:spPr>
           <a:xfrm>
-            <a:off x="914400" y="2642515"/>
-            <a:ext cx="4754880" cy="1959068"/>
+            <a:off x="5577840" y="1541417"/>
+            <a:ext cx="5436499" cy="3395663"/>
           </a:xfrm>
           <a:custGeom>
             <a:avLst/>
@@ -3972,1244 +4476,459 @@
             <a:cxnLst/>
             <a:rect l="l" t="t" r="r" b="b"/>
             <a:pathLst>
-              <a:path w="4754880" h="1959068">
-                <a:moveTo>
-                  <a:pt x="0" y="1959068"/>
-                </a:moveTo>
-                <a:lnTo>
-                  <a:pt x="23893" y="1871708"/>
-                </a:lnTo>
-                <a:lnTo>
-                  <a:pt x="47787" y="1789386"/>
-                </a:lnTo>
-                <a:lnTo>
-                  <a:pt x="71681" y="1711746"/>
-                </a:lnTo>
-                <a:lnTo>
-                  <a:pt x="95575" y="1638459"/>
-                </a:lnTo>
-                <a:lnTo>
-                  <a:pt x="119469" y="1569224"/>
-                </a:lnTo>
-                <a:lnTo>
-                  <a:pt x="143363" y="1503764"/>
-                </a:lnTo>
-                <a:lnTo>
-                  <a:pt x="167257" y="1441827"/>
-                </a:lnTo>
-                <a:lnTo>
-                  <a:pt x="191150" y="1383178"/>
-                </a:lnTo>
-                <a:lnTo>
-                  <a:pt x="215044" y="1327601"/>
-                </a:lnTo>
-                <a:lnTo>
-                  <a:pt x="238938" y="1274899"/>
-                </a:lnTo>
-                <a:lnTo>
-                  <a:pt x="262832" y="1224888"/>
-                </a:lnTo>
-                <a:lnTo>
-                  <a:pt x="286726" y="1177398"/>
-                </a:lnTo>
-                <a:lnTo>
-                  <a:pt x="310620" y="1132272"/>
-                </a:lnTo>
-                <a:lnTo>
-                  <a:pt x="334514" y="1089365"/>
-                </a:lnTo>
-                <a:lnTo>
-                  <a:pt x="358408" y="1048543"/>
-                </a:lnTo>
-                <a:lnTo>
-                  <a:pt x="382301" y="1009680"/>
-                </a:lnTo>
-                <a:lnTo>
-                  <a:pt x="406195" y="972659"/>
-                </a:lnTo>
-                <a:lnTo>
-                  <a:pt x="430089" y="937374"/>
-                </a:lnTo>
-                <a:lnTo>
-                  <a:pt x="453983" y="903724"/>
-                </a:lnTo>
-                <a:lnTo>
-                  <a:pt x="477877" y="871615"/>
-                </a:lnTo>
-                <a:lnTo>
-                  <a:pt x="501771" y="840959"/>
-                </a:lnTo>
-                <a:lnTo>
-                  <a:pt x="525665" y="811676"/>
-                </a:lnTo>
-                <a:lnTo>
-                  <a:pt x="549558" y="783690"/>
-                </a:lnTo>
-                <a:lnTo>
-                  <a:pt x="573452" y="756929"/>
-                </a:lnTo>
-                <a:lnTo>
-                  <a:pt x="597346" y="731327"/>
-                </a:lnTo>
-                <a:lnTo>
-                  <a:pt x="621240" y="706823"/>
-                </a:lnTo>
-                <a:lnTo>
-                  <a:pt x="645134" y="683357"/>
-                </a:lnTo>
-                <a:lnTo>
-                  <a:pt x="669028" y="660876"/>
-                </a:lnTo>
-                <a:lnTo>
-                  <a:pt x="692922" y="639328"/>
-                </a:lnTo>
-                <a:lnTo>
-                  <a:pt x="716816" y="618666"/>
-                </a:lnTo>
-                <a:lnTo>
-                  <a:pt x="740709" y="598844"/>
-                </a:lnTo>
-                <a:lnTo>
-                  <a:pt x="764603" y="579820"/>
-                </a:lnTo>
-                <a:lnTo>
-                  <a:pt x="788497" y="561555"/>
-                </a:lnTo>
-                <a:lnTo>
-                  <a:pt x="812391" y="544010"/>
-                </a:lnTo>
-                <a:lnTo>
-                  <a:pt x="836285" y="527152"/>
-                </a:lnTo>
-                <a:lnTo>
-                  <a:pt x="860179" y="510946"/>
-                </a:lnTo>
-                <a:lnTo>
-                  <a:pt x="884073" y="495361"/>
-                </a:lnTo>
-                <a:lnTo>
-                  <a:pt x="907967" y="480368"/>
-                </a:lnTo>
-                <a:lnTo>
-                  <a:pt x="931860" y="465938"/>
-                </a:lnTo>
-                <a:lnTo>
-                  <a:pt x="955754" y="452047"/>
-                </a:lnTo>
-                <a:lnTo>
-                  <a:pt x="979648" y="438668"/>
-                </a:lnTo>
-                <a:lnTo>
-                  <a:pt x="1003542" y="425779"/>
-                </a:lnTo>
-                <a:lnTo>
-                  <a:pt x="1027436" y="413357"/>
-                </a:lnTo>
-                <a:lnTo>
-                  <a:pt x="1051330" y="401382"/>
-                </a:lnTo>
-                <a:lnTo>
-                  <a:pt x="1075224" y="389832"/>
-                </a:lnTo>
-                <a:lnTo>
-                  <a:pt x="1099117" y="378691"/>
-                </a:lnTo>
-                <a:lnTo>
-                  <a:pt x="1123011" y="367939"/>
-                </a:lnTo>
-                <a:lnTo>
-                  <a:pt x="1146905" y="357560"/>
-                </a:lnTo>
-                <a:lnTo>
-                  <a:pt x="1170799" y="347538"/>
-                </a:lnTo>
-                <a:lnTo>
-                  <a:pt x="1194693" y="337857"/>
-                </a:lnTo>
-                <a:lnTo>
-                  <a:pt x="1218587" y="328504"/>
-                </a:lnTo>
-                <a:lnTo>
-                  <a:pt x="1242481" y="319464"/>
-                </a:lnTo>
-                <a:lnTo>
-                  <a:pt x="1266375" y="310725"/>
-                </a:lnTo>
-                <a:lnTo>
-                  <a:pt x="1290268" y="302273"/>
-                </a:lnTo>
-                <a:lnTo>
-                  <a:pt x="1314162" y="294099"/>
-                </a:lnTo>
-                <a:lnTo>
-                  <a:pt x="1338056" y="286189"/>
-                </a:lnTo>
-                <a:lnTo>
-                  <a:pt x="1361950" y="278533"/>
-                </a:lnTo>
-                <a:lnTo>
-                  <a:pt x="1385844" y="271122"/>
-                </a:lnTo>
-                <a:lnTo>
-                  <a:pt x="1409738" y="263946"/>
-                </a:lnTo>
-                <a:lnTo>
-                  <a:pt x="1433632" y="256995"/>
-                </a:lnTo>
-                <a:lnTo>
-                  <a:pt x="1457526" y="250261"/>
-                </a:lnTo>
-                <a:lnTo>
-                  <a:pt x="1481419" y="243735"/>
-                </a:lnTo>
-                <a:lnTo>
-                  <a:pt x="1505313" y="237409"/>
-                </a:lnTo>
-                <a:lnTo>
-                  <a:pt x="1529207" y="231276"/>
-                </a:lnTo>
-                <a:lnTo>
-                  <a:pt x="1553101" y="225328"/>
-                </a:lnTo>
-                <a:lnTo>
-                  <a:pt x="1576995" y="219559"/>
-                </a:lnTo>
-                <a:lnTo>
-                  <a:pt x="1600889" y="213961"/>
-                </a:lnTo>
-                <a:lnTo>
-                  <a:pt x="1624783" y="208529"/>
-                </a:lnTo>
-                <a:lnTo>
-                  <a:pt x="1648676" y="203256"/>
-                </a:lnTo>
-                <a:lnTo>
-                  <a:pt x="1672570" y="198137"/>
-                </a:lnTo>
-                <a:lnTo>
-                  <a:pt x="1696464" y="193166"/>
-                </a:lnTo>
-                <a:lnTo>
-                  <a:pt x="1720358" y="188337"/>
-                </a:lnTo>
-                <a:lnTo>
-                  <a:pt x="1744252" y="183647"/>
-                </a:lnTo>
-                <a:lnTo>
-                  <a:pt x="1768146" y="179088"/>
-                </a:lnTo>
-                <a:lnTo>
-                  <a:pt x="1792040" y="174658"/>
-                </a:lnTo>
-                <a:lnTo>
-                  <a:pt x="1815934" y="170352"/>
-                </a:lnTo>
-                <a:lnTo>
-                  <a:pt x="1839827" y="166165"/>
-                </a:lnTo>
-                <a:lnTo>
-                  <a:pt x="1863721" y="162093"/>
-                </a:lnTo>
-                <a:lnTo>
-                  <a:pt x="1887615" y="158133"/>
-                </a:lnTo>
-                <a:lnTo>
-                  <a:pt x="1911509" y="154280"/>
-                </a:lnTo>
-                <a:lnTo>
-                  <a:pt x="1935403" y="150531"/>
-                </a:lnTo>
-                <a:lnTo>
-                  <a:pt x="1959297" y="146882"/>
-                </a:lnTo>
-                <a:lnTo>
-                  <a:pt x="1983191" y="143331"/>
-                </a:lnTo>
-                <a:lnTo>
-                  <a:pt x="2007085" y="139873"/>
-                </a:lnTo>
-                <a:lnTo>
-                  <a:pt x="2030978" y="136506"/>
-                </a:lnTo>
-                <a:lnTo>
-                  <a:pt x="2054872" y="133227"/>
-                </a:lnTo>
-                <a:lnTo>
-                  <a:pt x="2078766" y="130033"/>
-                </a:lnTo>
-                <a:lnTo>
-                  <a:pt x="2102660" y="126921"/>
-                </a:lnTo>
-                <a:lnTo>
-                  <a:pt x="2126554" y="123889"/>
-                </a:lnTo>
-                <a:lnTo>
-                  <a:pt x="2150448" y="120933"/>
-                </a:lnTo>
-                <a:lnTo>
-                  <a:pt x="2174342" y="118053"/>
-                </a:lnTo>
-                <a:lnTo>
-                  <a:pt x="2198235" y="115245"/>
-                </a:lnTo>
-                <a:lnTo>
-                  <a:pt x="2222129" y="112507"/>
-                </a:lnTo>
-                <a:lnTo>
-                  <a:pt x="2246023" y="109836"/>
-                </a:lnTo>
-                <a:lnTo>
-                  <a:pt x="2269917" y="107232"/>
-                </a:lnTo>
-                <a:lnTo>
-                  <a:pt x="2293811" y="104691"/>
-                </a:lnTo>
-                <a:lnTo>
-                  <a:pt x="2317705" y="102212"/>
-                </a:lnTo>
-                <a:lnTo>
-                  <a:pt x="2341599" y="99794"/>
-                </a:lnTo>
-                <a:lnTo>
-                  <a:pt x="2365493" y="97433"/>
-                </a:lnTo>
-                <a:lnTo>
-                  <a:pt x="2389386" y="95129"/>
-                </a:lnTo>
-                <a:lnTo>
-                  <a:pt x="2413280" y="92879"/>
-                </a:lnTo>
-                <a:lnTo>
-                  <a:pt x="2437174" y="90683"/>
-                </a:lnTo>
-                <a:lnTo>
-                  <a:pt x="2461068" y="88538"/>
-                </a:lnTo>
-                <a:lnTo>
-                  <a:pt x="2484962" y="86443"/>
-                </a:lnTo>
-                <a:lnTo>
-                  <a:pt x="2508856" y="84397"/>
-                </a:lnTo>
-                <a:lnTo>
-                  <a:pt x="2532750" y="82398"/>
-                </a:lnTo>
-                <a:lnTo>
-                  <a:pt x="2556644" y="80445"/>
-                </a:lnTo>
-                <a:lnTo>
-                  <a:pt x="2580537" y="78537"/>
-                </a:lnTo>
-                <a:lnTo>
-                  <a:pt x="2604431" y="76672"/>
-                </a:lnTo>
-                <a:lnTo>
-                  <a:pt x="2628325" y="74849"/>
-                </a:lnTo>
-                <a:lnTo>
-                  <a:pt x="2652219" y="73066"/>
-                </a:lnTo>
-                <a:lnTo>
-                  <a:pt x="2676113" y="71324"/>
-                </a:lnTo>
-                <a:lnTo>
-                  <a:pt x="2700007" y="69620"/>
-                </a:lnTo>
-                <a:lnTo>
-                  <a:pt x="2723901" y="67954"/>
-                </a:lnTo>
-                <a:lnTo>
-                  <a:pt x="2747794" y="66324"/>
-                </a:lnTo>
-                <a:lnTo>
-                  <a:pt x="2771688" y="64730"/>
-                </a:lnTo>
-                <a:lnTo>
-                  <a:pt x="2795582" y="63170"/>
-                </a:lnTo>
-                <a:lnTo>
-                  <a:pt x="2819476" y="61645"/>
-                </a:lnTo>
-                <a:lnTo>
-                  <a:pt x="2843370" y="60151"/>
-                </a:lnTo>
-                <a:lnTo>
-                  <a:pt x="2867264" y="58690"/>
-                </a:lnTo>
-                <a:lnTo>
-                  <a:pt x="2891158" y="57260"/>
-                </a:lnTo>
-                <a:lnTo>
-                  <a:pt x="2915052" y="55860"/>
-                </a:lnTo>
-                <a:lnTo>
-                  <a:pt x="2938945" y="54489"/>
-                </a:lnTo>
-                <a:lnTo>
-                  <a:pt x="2962839" y="53148"/>
-                </a:lnTo>
-                <a:lnTo>
-                  <a:pt x="2986733" y="51833"/>
-                </a:lnTo>
-                <a:lnTo>
-                  <a:pt x="3010627" y="50547"/>
-                </a:lnTo>
-                <a:lnTo>
-                  <a:pt x="3034521" y="49286"/>
-                </a:lnTo>
-                <a:lnTo>
-                  <a:pt x="3058415" y="48052"/>
-                </a:lnTo>
-                <a:lnTo>
-                  <a:pt x="3082309" y="46842"/>
-                </a:lnTo>
-                <a:lnTo>
-                  <a:pt x="3106203" y="45658"/>
-                </a:lnTo>
-                <a:lnTo>
-                  <a:pt x="3130096" y="44497"/>
-                </a:lnTo>
-                <a:lnTo>
-                  <a:pt x="3153990" y="43359"/>
-                </a:lnTo>
-                <a:lnTo>
-                  <a:pt x="3177884" y="42244"/>
-                </a:lnTo>
-                <a:lnTo>
-                  <a:pt x="3201778" y="41151"/>
-                </a:lnTo>
-                <a:lnTo>
-                  <a:pt x="3225672" y="40080"/>
-                </a:lnTo>
-                <a:lnTo>
-                  <a:pt x="3249566" y="39030"/>
-                </a:lnTo>
-                <a:lnTo>
-                  <a:pt x="3273460" y="38000"/>
-                </a:lnTo>
-                <a:lnTo>
-                  <a:pt x="3297353" y="36991"/>
-                </a:lnTo>
-                <a:lnTo>
-                  <a:pt x="3321247" y="36001"/>
-                </a:lnTo>
-                <a:lnTo>
-                  <a:pt x="3345141" y="35030"/>
-                </a:lnTo>
-                <a:lnTo>
-                  <a:pt x="3369035" y="34078"/>
-                </a:lnTo>
-                <a:lnTo>
-                  <a:pt x="3392929" y="33144"/>
-                </a:lnTo>
-                <a:lnTo>
-                  <a:pt x="3416823" y="32227"/>
-                </a:lnTo>
-                <a:lnTo>
-                  <a:pt x="3440717" y="31329"/>
-                </a:lnTo>
-                <a:lnTo>
-                  <a:pt x="3464611" y="30447"/>
-                </a:lnTo>
-                <a:lnTo>
-                  <a:pt x="3488504" y="29581"/>
-                </a:lnTo>
-                <a:lnTo>
-                  <a:pt x="3512398" y="28732"/>
-                </a:lnTo>
-                <a:lnTo>
-                  <a:pt x="3536292" y="27898"/>
-                </a:lnTo>
-                <a:lnTo>
-                  <a:pt x="3560186" y="27080"/>
-                </a:lnTo>
-                <a:lnTo>
-                  <a:pt x="3584080" y="26277"/>
-                </a:lnTo>
-                <a:lnTo>
-                  <a:pt x="3607974" y="25489"/>
-                </a:lnTo>
-                <a:lnTo>
-                  <a:pt x="3631868" y="24715"/>
-                </a:lnTo>
-                <a:lnTo>
-                  <a:pt x="3655762" y="23955"/>
-                </a:lnTo>
-                <a:lnTo>
-                  <a:pt x="3679655" y="23209"/>
-                </a:lnTo>
-                <a:lnTo>
-                  <a:pt x="3703549" y="22476"/>
-                </a:lnTo>
-                <a:lnTo>
-                  <a:pt x="3727443" y="21756"/>
-                </a:lnTo>
-                <a:lnTo>
-                  <a:pt x="3751337" y="21050"/>
-                </a:lnTo>
-                <a:lnTo>
-                  <a:pt x="3775231" y="20355"/>
-                </a:lnTo>
-                <a:lnTo>
-                  <a:pt x="3799125" y="19673"/>
-                </a:lnTo>
-                <a:lnTo>
-                  <a:pt x="3823019" y="19003"/>
-                </a:lnTo>
-                <a:lnTo>
-                  <a:pt x="3846912" y="18345"/>
-                </a:lnTo>
-                <a:lnTo>
-                  <a:pt x="3870806" y="17698"/>
-                </a:lnTo>
-                <a:lnTo>
-                  <a:pt x="3894700" y="17063"/>
-                </a:lnTo>
-                <a:lnTo>
-                  <a:pt x="3918594" y="16438"/>
-                </a:lnTo>
-                <a:lnTo>
-                  <a:pt x="3942488" y="15825"/>
-                </a:lnTo>
-                <a:lnTo>
-                  <a:pt x="3966382" y="15221"/>
-                </a:lnTo>
-                <a:lnTo>
-                  <a:pt x="3990276" y="14628"/>
-                </a:lnTo>
-                <a:lnTo>
-                  <a:pt x="4014170" y="14045"/>
-                </a:lnTo>
-                <a:lnTo>
-                  <a:pt x="4038063" y="13472"/>
-                </a:lnTo>
-                <a:lnTo>
-                  <a:pt x="4061957" y="12909"/>
-                </a:lnTo>
-                <a:lnTo>
-                  <a:pt x="4085851" y="12355"/>
-                </a:lnTo>
-                <a:lnTo>
-                  <a:pt x="4109745" y="11811"/>
-                </a:lnTo>
-                <a:lnTo>
-                  <a:pt x="4133639" y="11275"/>
-                </a:lnTo>
-                <a:lnTo>
-                  <a:pt x="4157533" y="10748"/>
-                </a:lnTo>
-                <a:lnTo>
-                  <a:pt x="4181427" y="10230"/>
-                </a:lnTo>
-                <a:lnTo>
-                  <a:pt x="4205321" y="9721"/>
-                </a:lnTo>
-                <a:lnTo>
-                  <a:pt x="4229214" y="9220"/>
-                </a:lnTo>
-                <a:lnTo>
-                  <a:pt x="4253108" y="8727"/>
-                </a:lnTo>
-                <a:lnTo>
-                  <a:pt x="4277002" y="8242"/>
-                </a:lnTo>
-                <a:lnTo>
-                  <a:pt x="4300896" y="7764"/>
-                </a:lnTo>
-                <a:lnTo>
-                  <a:pt x="4324790" y="7295"/>
-                </a:lnTo>
-                <a:lnTo>
-                  <a:pt x="4348684" y="6833"/>
-                </a:lnTo>
-                <a:lnTo>
-                  <a:pt x="4372578" y="6378"/>
-                </a:lnTo>
-                <a:lnTo>
-                  <a:pt x="4396471" y="5931"/>
-                </a:lnTo>
-                <a:lnTo>
-                  <a:pt x="4420365" y="5491"/>
-                </a:lnTo>
-                <a:lnTo>
-                  <a:pt x="4444259" y="5058"/>
-                </a:lnTo>
-                <a:lnTo>
-                  <a:pt x="4468153" y="4631"/>
-                </a:lnTo>
-                <a:lnTo>
-                  <a:pt x="4492047" y="4211"/>
-                </a:lnTo>
-                <a:lnTo>
-                  <a:pt x="4515941" y="3798"/>
-                </a:lnTo>
-                <a:lnTo>
-                  <a:pt x="4539835" y="3391"/>
-                </a:lnTo>
-                <a:lnTo>
-                  <a:pt x="4563729" y="2991"/>
-                </a:lnTo>
-                <a:lnTo>
-                  <a:pt x="4587622" y="2597"/>
-                </a:lnTo>
-                <a:lnTo>
-                  <a:pt x="4611516" y="2208"/>
-                </a:lnTo>
-                <a:lnTo>
-                  <a:pt x="4635410" y="1826"/>
-                </a:lnTo>
-                <a:lnTo>
-                  <a:pt x="4659304" y="1450"/>
-                </a:lnTo>
-                <a:lnTo>
-                  <a:pt x="4683198" y="1079"/>
-                </a:lnTo>
-                <a:lnTo>
-                  <a:pt x="4707092" y="714"/>
-                </a:lnTo>
-                <a:lnTo>
-                  <a:pt x="4730986" y="354"/>
-                </a:lnTo>
-                <a:lnTo>
-                  <a:pt x="4754880" y="0"/>
-                </a:lnTo>
-              </a:path>
-            </a:pathLst>
-          </a:custGeom>
-          <a:noFill/>
-          <a:ln w="38100">
-            <a:solidFill>
-              <a:srgbClr val="F28BA0"/>
-            </a:solidFill>
-          </a:ln>
-          <a:effectLst/>
-        </p:spPr>
-        <p:txBody>
-          <a:bodyPr rtlCol="0" anchor="ctr"/>
-          <a:lstStyle/>
-          <a:p>
-            <a:pPr algn="ctr"/>
-          </a:p>
-        </p:txBody>
-      </p:sp>
-      <p:sp>
-        <p:nvSpPr>
-          <p:cNvPr id="33" name="C1-E12 polygon 31" descr="sci-ppt:o031"/>
-          <p:cNvSpPr/>
-          <p:nvPr/>
-        </p:nvSpPr>
-        <p:spPr>
-          <a:xfrm>
-            <a:off x="914400" y="1616336"/>
-            <a:ext cx="4754880" cy="979534"/>
-          </a:xfrm>
-          <a:custGeom>
-            <a:avLst/>
-            <a:gdLst/>
-            <a:ahLst/>
-            <a:cxnLst/>
-            <a:rect l="l" t="t" r="r" b="b"/>
-            <a:pathLst>
-              <a:path w="4754880" h="979534">
+              <a:path w="5436499" h="3395663">
                 <a:moveTo>
                   <a:pt x="0" y="0"/>
                 </a:moveTo>
                 <a:lnTo>
-                  <a:pt x="23893" y="43680"/>
-                </a:lnTo>
-                <a:lnTo>
-                  <a:pt x="47787" y="84841"/>
-                </a:lnTo>
-                <a:lnTo>
-                  <a:pt x="71681" y="123661"/>
-                </a:lnTo>
-                <a:lnTo>
-                  <a:pt x="95575" y="160305"/>
-                </a:lnTo>
-                <a:lnTo>
-                  <a:pt x="119469" y="194922"/>
-                </a:lnTo>
-                <a:lnTo>
-                  <a:pt x="143363" y="227652"/>
-                </a:lnTo>
-                <a:lnTo>
-                  <a:pt x="167257" y="258621"/>
-                </a:lnTo>
-                <a:lnTo>
-                  <a:pt x="191150" y="287945"/>
-                </a:lnTo>
-                <a:lnTo>
-                  <a:pt x="215044" y="315733"/>
-                </a:lnTo>
-                <a:lnTo>
-                  <a:pt x="238938" y="342084"/>
-                </a:lnTo>
-                <a:lnTo>
-                  <a:pt x="262832" y="367090"/>
-                </a:lnTo>
-                <a:lnTo>
-                  <a:pt x="286726" y="390835"/>
-                </a:lnTo>
-                <a:lnTo>
-                  <a:pt x="310620" y="413398"/>
-                </a:lnTo>
-                <a:lnTo>
-                  <a:pt x="334514" y="434851"/>
-                </a:lnTo>
-                <a:lnTo>
-                  <a:pt x="358408" y="455263"/>
-                </a:lnTo>
-                <a:lnTo>
-                  <a:pt x="382301" y="474694"/>
-                </a:lnTo>
-                <a:lnTo>
-                  <a:pt x="406195" y="493204"/>
-                </a:lnTo>
-                <a:lnTo>
-                  <a:pt x="430089" y="510847"/>
-                </a:lnTo>
-                <a:lnTo>
-                  <a:pt x="453983" y="527672"/>
-                </a:lnTo>
-                <a:lnTo>
-                  <a:pt x="477877" y="543727"/>
-                </a:lnTo>
-                <a:lnTo>
-                  <a:pt x="501771" y="559054"/>
-                </a:lnTo>
-                <a:lnTo>
-                  <a:pt x="525665" y="573696"/>
-                </a:lnTo>
-                <a:lnTo>
-                  <a:pt x="549558" y="587689"/>
-                </a:lnTo>
-                <a:lnTo>
-                  <a:pt x="573452" y="601069"/>
-                </a:lnTo>
-                <a:lnTo>
-                  <a:pt x="597346" y="613870"/>
-                </a:lnTo>
-                <a:lnTo>
-                  <a:pt x="621240" y="626123"/>
-                </a:lnTo>
-                <a:lnTo>
-                  <a:pt x="645134" y="637855"/>
-                </a:lnTo>
-                <a:lnTo>
-                  <a:pt x="669028" y="649096"/>
-                </a:lnTo>
-                <a:lnTo>
-                  <a:pt x="692922" y="659870"/>
-                </a:lnTo>
-                <a:lnTo>
-                  <a:pt x="716816" y="670201"/>
-                </a:lnTo>
-                <a:lnTo>
-                  <a:pt x="740709" y="680112"/>
-                </a:lnTo>
-                <a:lnTo>
-                  <a:pt x="764603" y="689624"/>
-                </a:lnTo>
-                <a:lnTo>
-                  <a:pt x="788497" y="698757"/>
-                </a:lnTo>
-                <a:lnTo>
-                  <a:pt x="812391" y="707529"/>
-                </a:lnTo>
-                <a:lnTo>
-                  <a:pt x="836285" y="715958"/>
-                </a:lnTo>
-                <a:lnTo>
-                  <a:pt x="860179" y="724061"/>
-                </a:lnTo>
-                <a:lnTo>
-                  <a:pt x="884073" y="731854"/>
-                </a:lnTo>
-                <a:lnTo>
-                  <a:pt x="907967" y="739350"/>
-                </a:lnTo>
-                <a:lnTo>
-                  <a:pt x="931860" y="746565"/>
-                </a:lnTo>
-                <a:lnTo>
-                  <a:pt x="955754" y="753511"/>
-                </a:lnTo>
-                <a:lnTo>
-                  <a:pt x="979648" y="760200"/>
-                </a:lnTo>
-                <a:lnTo>
-                  <a:pt x="1003542" y="766644"/>
-                </a:lnTo>
-                <a:lnTo>
-                  <a:pt x="1027436" y="772855"/>
-                </a:lnTo>
-                <a:lnTo>
-                  <a:pt x="1051330" y="778843"/>
-                </a:lnTo>
-                <a:lnTo>
-                  <a:pt x="1075224" y="784618"/>
-                </a:lnTo>
-                <a:lnTo>
-                  <a:pt x="1099117" y="790189"/>
-                </a:lnTo>
-                <a:lnTo>
-                  <a:pt x="1123011" y="795565"/>
-                </a:lnTo>
-                <a:lnTo>
-                  <a:pt x="1146905" y="800754"/>
-                </a:lnTo>
-                <a:lnTo>
-                  <a:pt x="1170799" y="805765"/>
-                </a:lnTo>
-                <a:lnTo>
-                  <a:pt x="1194693" y="810605"/>
-                </a:lnTo>
-                <a:lnTo>
-                  <a:pt x="1218587" y="815282"/>
-                </a:lnTo>
-                <a:lnTo>
-                  <a:pt x="1242481" y="819802"/>
-                </a:lnTo>
-                <a:lnTo>
-                  <a:pt x="1266375" y="824172"/>
-                </a:lnTo>
-                <a:lnTo>
-                  <a:pt x="1290268" y="828397"/>
-                </a:lnTo>
-                <a:lnTo>
-                  <a:pt x="1314162" y="832485"/>
-                </a:lnTo>
-                <a:lnTo>
-                  <a:pt x="1338056" y="836440"/>
-                </a:lnTo>
-                <a:lnTo>
-                  <a:pt x="1361950" y="840267"/>
-                </a:lnTo>
-                <a:lnTo>
-                  <a:pt x="1385844" y="843973"/>
-                </a:lnTo>
-                <a:lnTo>
-                  <a:pt x="1409738" y="847561"/>
-                </a:lnTo>
-                <a:lnTo>
-                  <a:pt x="1433632" y="851037"/>
-                </a:lnTo>
-                <a:lnTo>
-                  <a:pt x="1457526" y="854404"/>
-                </a:lnTo>
-                <a:lnTo>
-                  <a:pt x="1481419" y="857667"/>
-                </a:lnTo>
-                <a:lnTo>
-                  <a:pt x="1505313" y="860830"/>
-                </a:lnTo>
-                <a:lnTo>
-                  <a:pt x="1529207" y="863896"/>
-                </a:lnTo>
-                <a:lnTo>
-                  <a:pt x="1553101" y="866870"/>
-                </a:lnTo>
-                <a:lnTo>
-                  <a:pt x="1576995" y="869755"/>
-                </a:lnTo>
-                <a:lnTo>
-                  <a:pt x="1600889" y="872553"/>
-                </a:lnTo>
-                <a:lnTo>
-                  <a:pt x="1624783" y="875270"/>
-                </a:lnTo>
-                <a:lnTo>
-                  <a:pt x="1648676" y="877906"/>
-                </a:lnTo>
-                <a:lnTo>
-                  <a:pt x="1672570" y="880466"/>
-                </a:lnTo>
-                <a:lnTo>
-                  <a:pt x="1696464" y="882951"/>
-                </a:lnTo>
-                <a:lnTo>
-                  <a:pt x="1720358" y="885365"/>
-                </a:lnTo>
-                <a:lnTo>
-                  <a:pt x="1744252" y="887711"/>
-                </a:lnTo>
-                <a:lnTo>
-                  <a:pt x="1768146" y="889990"/>
-                </a:lnTo>
-                <a:lnTo>
-                  <a:pt x="1792040" y="892205"/>
-                </a:lnTo>
-                <a:lnTo>
-                  <a:pt x="1815934" y="894358"/>
-                </a:lnTo>
-                <a:lnTo>
-                  <a:pt x="1839827" y="896451"/>
-                </a:lnTo>
-                <a:lnTo>
-                  <a:pt x="1863721" y="898487"/>
-                </a:lnTo>
-                <a:lnTo>
-                  <a:pt x="1887615" y="900468"/>
-                </a:lnTo>
-                <a:lnTo>
-                  <a:pt x="1911509" y="902394"/>
-                </a:lnTo>
-                <a:lnTo>
-                  <a:pt x="1935403" y="904269"/>
-                </a:lnTo>
-                <a:lnTo>
-                  <a:pt x="1959297" y="906093"/>
-                </a:lnTo>
-                <a:lnTo>
-                  <a:pt x="1983191" y="907869"/>
-                </a:lnTo>
-                <a:lnTo>
-                  <a:pt x="2007085" y="909598"/>
-                </a:lnTo>
-                <a:lnTo>
-                  <a:pt x="2030978" y="911281"/>
-                </a:lnTo>
-                <a:lnTo>
-                  <a:pt x="2054872" y="912921"/>
-                </a:lnTo>
-                <a:lnTo>
-                  <a:pt x="2078766" y="914518"/>
-                </a:lnTo>
-                <a:lnTo>
-                  <a:pt x="2102660" y="916074"/>
-                </a:lnTo>
-                <a:lnTo>
-                  <a:pt x="2126554" y="917590"/>
-                </a:lnTo>
-                <a:lnTo>
-                  <a:pt x="2150448" y="919067"/>
-                </a:lnTo>
-                <a:lnTo>
-                  <a:pt x="2174342" y="920507"/>
-                </a:lnTo>
-                <a:lnTo>
-                  <a:pt x="2198235" y="921912"/>
-                </a:lnTo>
-                <a:lnTo>
-                  <a:pt x="2222129" y="923281"/>
-                </a:lnTo>
-                <a:lnTo>
-                  <a:pt x="2246023" y="924616"/>
-                </a:lnTo>
-                <a:lnTo>
-                  <a:pt x="2269917" y="925918"/>
-                </a:lnTo>
-                <a:lnTo>
-                  <a:pt x="2293811" y="927188"/>
-                </a:lnTo>
-                <a:lnTo>
-                  <a:pt x="2317705" y="928428"/>
-                </a:lnTo>
-                <a:lnTo>
-                  <a:pt x="2341599" y="929637"/>
-                </a:lnTo>
-                <a:lnTo>
-                  <a:pt x="2365493" y="930818"/>
-                </a:lnTo>
-                <a:lnTo>
-                  <a:pt x="2389386" y="931970"/>
-                </a:lnTo>
-                <a:lnTo>
-                  <a:pt x="2413280" y="933094"/>
-                </a:lnTo>
-                <a:lnTo>
-                  <a:pt x="2437174" y="934193"/>
-                </a:lnTo>
-                <a:lnTo>
-                  <a:pt x="2461068" y="935265"/>
-                </a:lnTo>
-                <a:lnTo>
-                  <a:pt x="2484962" y="936312"/>
-                </a:lnTo>
-                <a:lnTo>
-                  <a:pt x="2508856" y="937335"/>
-                </a:lnTo>
-                <a:lnTo>
-                  <a:pt x="2532750" y="938335"/>
-                </a:lnTo>
-                <a:lnTo>
-                  <a:pt x="2556644" y="939311"/>
-                </a:lnTo>
-                <a:lnTo>
-                  <a:pt x="2580537" y="940266"/>
-                </a:lnTo>
-                <a:lnTo>
-                  <a:pt x="2604431" y="941198"/>
-                </a:lnTo>
-                <a:lnTo>
-                  <a:pt x="2628325" y="942110"/>
-                </a:lnTo>
-                <a:lnTo>
-                  <a:pt x="2652219" y="943001"/>
-                </a:lnTo>
-                <a:lnTo>
-                  <a:pt x="2676113" y="943872"/>
-                </a:lnTo>
-                <a:lnTo>
-                  <a:pt x="2700007" y="944724"/>
-                </a:lnTo>
-                <a:lnTo>
-                  <a:pt x="2723901" y="945557"/>
-                </a:lnTo>
-                <a:lnTo>
-                  <a:pt x="2747794" y="946372"/>
-                </a:lnTo>
-                <a:lnTo>
-                  <a:pt x="2771688" y="947169"/>
-                </a:lnTo>
-                <a:lnTo>
-                  <a:pt x="2795582" y="947949"/>
-                </a:lnTo>
-                <a:lnTo>
-                  <a:pt x="2819476" y="948712"/>
-                </a:lnTo>
-                <a:lnTo>
-                  <a:pt x="2843370" y="949458"/>
-                </a:lnTo>
-                <a:lnTo>
-                  <a:pt x="2867264" y="950189"/>
-                </a:lnTo>
-                <a:lnTo>
-                  <a:pt x="2891158" y="950904"/>
-                </a:lnTo>
-                <a:lnTo>
-                  <a:pt x="2915052" y="951604"/>
-                </a:lnTo>
-                <a:lnTo>
-                  <a:pt x="2938945" y="952289"/>
-                </a:lnTo>
-                <a:lnTo>
-                  <a:pt x="2962839" y="952960"/>
-                </a:lnTo>
-                <a:lnTo>
-                  <a:pt x="2986733" y="953617"/>
-                </a:lnTo>
-                <a:lnTo>
-                  <a:pt x="3010627" y="954261"/>
-                </a:lnTo>
-                <a:lnTo>
-                  <a:pt x="3034521" y="954891"/>
-                </a:lnTo>
-                <a:lnTo>
-                  <a:pt x="3058415" y="955508"/>
-                </a:lnTo>
-                <a:lnTo>
-                  <a:pt x="3082309" y="956113"/>
-                </a:lnTo>
-                <a:lnTo>
-                  <a:pt x="3106203" y="956705"/>
-                </a:lnTo>
-                <a:lnTo>
-                  <a:pt x="3130096" y="957286"/>
-                </a:lnTo>
-                <a:lnTo>
-                  <a:pt x="3153990" y="957855"/>
-                </a:lnTo>
-                <a:lnTo>
-                  <a:pt x="3177884" y="958412"/>
-                </a:lnTo>
-                <a:lnTo>
-                  <a:pt x="3201778" y="958958"/>
-                </a:lnTo>
-                <a:lnTo>
-                  <a:pt x="3225672" y="959494"/>
-                </a:lnTo>
-                <a:lnTo>
-                  <a:pt x="3249566" y="960019"/>
-                </a:lnTo>
-                <a:lnTo>
-                  <a:pt x="3273460" y="960534"/>
-                </a:lnTo>
-                <a:lnTo>
-                  <a:pt x="3297353" y="961039"/>
-                </a:lnTo>
-                <a:lnTo>
-                  <a:pt x="3321247" y="961534"/>
-                </a:lnTo>
-                <a:lnTo>
-                  <a:pt x="3345141" y="962019"/>
-                </a:lnTo>
-                <a:lnTo>
-                  <a:pt x="3369035" y="962495"/>
-                </a:lnTo>
-                <a:lnTo>
-                  <a:pt x="3392929" y="962962"/>
-                </a:lnTo>
-                <a:lnTo>
-                  <a:pt x="3416823" y="963420"/>
-                </a:lnTo>
-                <a:lnTo>
-                  <a:pt x="3440717" y="963870"/>
-                </a:lnTo>
-                <a:lnTo>
-                  <a:pt x="3464611" y="964311"/>
-                </a:lnTo>
-                <a:lnTo>
-                  <a:pt x="3488504" y="964743"/>
-                </a:lnTo>
-                <a:lnTo>
-                  <a:pt x="3512398" y="965168"/>
-                </a:lnTo>
-                <a:lnTo>
-                  <a:pt x="3536292" y="965585"/>
-                </a:lnTo>
-                <a:lnTo>
-                  <a:pt x="3560186" y="965994"/>
-                </a:lnTo>
-                <a:lnTo>
-                  <a:pt x="3584080" y="966395"/>
-                </a:lnTo>
-                <a:lnTo>
-                  <a:pt x="3607974" y="966790"/>
-                </a:lnTo>
-                <a:lnTo>
-                  <a:pt x="3631868" y="967177"/>
-                </a:lnTo>
-                <a:lnTo>
-                  <a:pt x="3655762" y="967556"/>
-                </a:lnTo>
-                <a:lnTo>
-                  <a:pt x="3679655" y="967930"/>
-                </a:lnTo>
-                <a:lnTo>
-                  <a:pt x="3703549" y="968296"/>
-                </a:lnTo>
-                <a:lnTo>
-                  <a:pt x="3727443" y="968656"/>
-                </a:lnTo>
-                <a:lnTo>
-                  <a:pt x="3751337" y="969009"/>
-                </a:lnTo>
-                <a:lnTo>
-                  <a:pt x="3775231" y="969356"/>
-                </a:lnTo>
-                <a:lnTo>
-                  <a:pt x="3799125" y="969697"/>
-                </a:lnTo>
-                <a:lnTo>
-                  <a:pt x="3823019" y="970032"/>
-                </a:lnTo>
-                <a:lnTo>
-                  <a:pt x="3846912" y="970361"/>
-                </a:lnTo>
-                <a:lnTo>
-                  <a:pt x="3870806" y="970685"/>
-                </a:lnTo>
-                <a:lnTo>
-                  <a:pt x="3894700" y="971003"/>
-                </a:lnTo>
-                <a:lnTo>
-                  <a:pt x="3918594" y="971315"/>
-                </a:lnTo>
-                <a:lnTo>
-                  <a:pt x="3942488" y="971622"/>
-                </a:lnTo>
-                <a:lnTo>
-                  <a:pt x="3966382" y="971923"/>
-                </a:lnTo>
-                <a:lnTo>
-                  <a:pt x="3990276" y="972220"/>
-                </a:lnTo>
-                <a:lnTo>
-                  <a:pt x="4014170" y="972511"/>
-                </a:lnTo>
-                <a:lnTo>
-                  <a:pt x="4038063" y="972798"/>
-                </a:lnTo>
-                <a:lnTo>
-                  <a:pt x="4061957" y="973079"/>
-                </a:lnTo>
-                <a:lnTo>
-                  <a:pt x="4085851" y="973356"/>
-                </a:lnTo>
-                <a:lnTo>
-                  <a:pt x="4109745" y="973629"/>
-                </a:lnTo>
-                <a:lnTo>
-                  <a:pt x="4133639" y="973897"/>
-                </a:lnTo>
-                <a:lnTo>
-                  <a:pt x="4157533" y="974160"/>
-                </a:lnTo>
-                <a:lnTo>
-                  <a:pt x="4181427" y="974419"/>
-                </a:lnTo>
-                <a:lnTo>
-                  <a:pt x="4205321" y="974674"/>
-                </a:lnTo>
-                <a:lnTo>
-                  <a:pt x="4229214" y="974924"/>
-                </a:lnTo>
-                <a:lnTo>
-                  <a:pt x="4253108" y="975171"/>
-                </a:lnTo>
-                <a:lnTo>
-                  <a:pt x="4277002" y="975413"/>
-                </a:lnTo>
-                <a:lnTo>
-                  <a:pt x="4300896" y="975652"/>
-                </a:lnTo>
-                <a:lnTo>
-                  <a:pt x="4324790" y="975887"/>
-                </a:lnTo>
-                <a:lnTo>
-                  <a:pt x="4348684" y="976117"/>
-                </a:lnTo>
-                <a:lnTo>
-                  <a:pt x="4372578" y="976345"/>
-                </a:lnTo>
-                <a:lnTo>
-                  <a:pt x="4396471" y="976568"/>
-                </a:lnTo>
-                <a:lnTo>
-                  <a:pt x="4420365" y="976789"/>
-                </a:lnTo>
-                <a:lnTo>
-                  <a:pt x="4444259" y="977005"/>
-                </a:lnTo>
-                <a:lnTo>
-                  <a:pt x="4468153" y="977218"/>
-                </a:lnTo>
-                <a:lnTo>
-                  <a:pt x="4492047" y="977428"/>
-                </a:lnTo>
-                <a:lnTo>
-                  <a:pt x="4515941" y="977635"/>
-                </a:lnTo>
-                <a:lnTo>
-                  <a:pt x="4539835" y="977838"/>
-                </a:lnTo>
-                <a:lnTo>
-                  <a:pt x="4563729" y="978039"/>
-                </a:lnTo>
-                <a:lnTo>
-                  <a:pt x="4587622" y="978236"/>
-                </a:lnTo>
-                <a:lnTo>
-                  <a:pt x="4611516" y="978430"/>
-                </a:lnTo>
-                <a:lnTo>
-                  <a:pt x="4635410" y="978621"/>
-                </a:lnTo>
-                <a:lnTo>
-                  <a:pt x="4659304" y="978809"/>
-                </a:lnTo>
-                <a:lnTo>
-                  <a:pt x="4683198" y="978995"/>
-                </a:lnTo>
-                <a:lnTo>
-                  <a:pt x="4707092" y="979177"/>
-                </a:lnTo>
-                <a:lnTo>
-                  <a:pt x="4730986" y="979357"/>
-                </a:lnTo>
-                <a:lnTo>
-                  <a:pt x="4754880" y="979534"/>
+                  <a:pt x="56123" y="151"/>
+                </a:lnTo>
+                <a:lnTo>
+                  <a:pt x="112242" y="605"/>
+                </a:lnTo>
+                <a:lnTo>
+                  <a:pt x="168351" y="1362"/>
+                </a:lnTo>
+                <a:lnTo>
+                  <a:pt x="224445" y="2422"/>
+                </a:lnTo>
+                <a:lnTo>
+                  <a:pt x="280519" y="3785"/>
+                </a:lnTo>
+                <a:lnTo>
+                  <a:pt x="336568" y="5451"/>
+                </a:lnTo>
+                <a:lnTo>
+                  <a:pt x="392586" y="7419"/>
+                </a:lnTo>
+                <a:lnTo>
+                  <a:pt x="448570" y="9691"/>
+                </a:lnTo>
+                <a:lnTo>
+                  <a:pt x="504514" y="12265"/>
+                </a:lnTo>
+                <a:lnTo>
+                  <a:pt x="560412" y="15142"/>
+                </a:lnTo>
+                <a:lnTo>
+                  <a:pt x="616261" y="18322"/>
+                </a:lnTo>
+                <a:lnTo>
+                  <a:pt x="672054" y="21805"/>
+                </a:lnTo>
+                <a:lnTo>
+                  <a:pt x="727787" y="25590"/>
+                </a:lnTo>
+                <a:lnTo>
+                  <a:pt x="783455" y="29678"/>
+                </a:lnTo>
+                <a:lnTo>
+                  <a:pt x="839052" y="34070"/>
+                </a:lnTo>
+                <a:lnTo>
+                  <a:pt x="894575" y="38764"/>
+                </a:lnTo>
+                <a:lnTo>
+                  <a:pt x="950016" y="43761"/>
+                </a:lnTo>
+                <a:lnTo>
+                  <a:pt x="1005373" y="49061"/>
+                </a:lnTo>
+                <a:lnTo>
+                  <a:pt x="1060639" y="54663"/>
+                </a:lnTo>
+                <a:lnTo>
+                  <a:pt x="1115809" y="60569"/>
+                </a:lnTo>
+                <a:lnTo>
+                  <a:pt x="1170879" y="66777"/>
+                </a:lnTo>
+                <a:lnTo>
+                  <a:pt x="1225843" y="73288"/>
+                </a:lnTo>
+                <a:lnTo>
+                  <a:pt x="1280696" y="80102"/>
+                </a:lnTo>
+                <a:lnTo>
+                  <a:pt x="1335432" y="87219"/>
+                </a:lnTo>
+                <a:lnTo>
+                  <a:pt x="1390048" y="94639"/>
+                </a:lnTo>
+                <a:lnTo>
+                  <a:pt x="1444538" y="102361"/>
+                </a:lnTo>
+                <a:lnTo>
+                  <a:pt x="1498896" y="110387"/>
+                </a:lnTo>
+                <a:lnTo>
+                  <a:pt x="1553117" y="118715"/>
+                </a:lnTo>
+                <a:lnTo>
+                  <a:pt x="1607197" y="127346"/>
+                </a:lnTo>
+                <a:lnTo>
+                  <a:pt x="1661130" y="136280"/>
+                </a:lnTo>
+                <a:lnTo>
+                  <a:pt x="1714911" y="145517"/>
+                </a:lnTo>
+                <a:lnTo>
+                  <a:pt x="1768534" y="155056"/>
+                </a:lnTo>
+                <a:lnTo>
+                  <a:pt x="1821995" y="164899"/>
+                </a:lnTo>
+                <a:lnTo>
+                  <a:pt x="1875288" y="175044"/>
+                </a:lnTo>
+                <a:lnTo>
+                  <a:pt x="1928408" y="185492"/>
+                </a:lnTo>
+                <a:lnTo>
+                  <a:pt x="1981349" y="196243"/>
+                </a:lnTo>
+                <a:lnTo>
+                  <a:pt x="2034107" y="207297"/>
+                </a:lnTo>
+                <a:lnTo>
+                  <a:pt x="2086676" y="218654"/>
+                </a:lnTo>
+                <a:lnTo>
+                  <a:pt x="2139051" y="230314"/>
+                </a:lnTo>
+                <a:lnTo>
+                  <a:pt x="2191226" y="242276"/>
+                </a:lnTo>
+                <a:lnTo>
+                  <a:pt x="2243196" y="254541"/>
+                </a:lnTo>
+                <a:lnTo>
+                  <a:pt x="2294956" y="267109"/>
+                </a:lnTo>
+                <a:lnTo>
+                  <a:pt x="2346500" y="279980"/>
+                </a:lnTo>
+                <a:lnTo>
+                  <a:pt x="2397823" y="293154"/>
+                </a:lnTo>
+                <a:lnTo>
+                  <a:pt x="2448920" y="306631"/>
+                </a:lnTo>
+                <a:lnTo>
+                  <a:pt x="2499784" y="320410"/>
+                </a:lnTo>
+                <a:lnTo>
+                  <a:pt x="2550412" y="334492"/>
+                </a:lnTo>
+                <a:lnTo>
+                  <a:pt x="2600796" y="348878"/>
+                </a:lnTo>
+                <a:lnTo>
+                  <a:pt x="2650932" y="363566"/>
+                </a:lnTo>
+                <a:lnTo>
+                  <a:pt x="2700814" y="378556"/>
+                </a:lnTo>
+                <a:lnTo>
+                  <a:pt x="2750436" y="393850"/>
+                </a:lnTo>
+                <a:lnTo>
+                  <a:pt x="2799794" y="409447"/>
+                </a:lnTo>
+                <a:lnTo>
+                  <a:pt x="2848881" y="425346"/>
+                </a:lnTo>
+                <a:lnTo>
+                  <a:pt x="2897692" y="441548"/>
+                </a:lnTo>
+                <a:lnTo>
+                  <a:pt x="2946221" y="458053"/>
+                </a:lnTo>
+                <a:lnTo>
+                  <a:pt x="2994462" y="474861"/>
+                </a:lnTo>
+                <a:lnTo>
+                  <a:pt x="3042410" y="491972"/>
+                </a:lnTo>
+                <a:lnTo>
+                  <a:pt x="3090060" y="509386"/>
+                </a:lnTo>
+                <a:lnTo>
+                  <a:pt x="3137404" y="527102"/>
+                </a:lnTo>
+                <a:lnTo>
+                  <a:pt x="3184439" y="545121"/>
+                </a:lnTo>
+                <a:lnTo>
+                  <a:pt x="3231157" y="563444"/>
+                </a:lnTo>
+                <a:lnTo>
+                  <a:pt x="3277554" y="582069"/>
+                </a:lnTo>
+                <a:lnTo>
+                  <a:pt x="3323623" y="600996"/>
+                </a:lnTo>
+                <a:lnTo>
+                  <a:pt x="3369358" y="620227"/>
+                </a:lnTo>
+                <a:lnTo>
+                  <a:pt x="3414754" y="639761"/>
+                </a:lnTo>
+                <a:lnTo>
+                  <a:pt x="3459805" y="659597"/>
+                </a:lnTo>
+                <a:lnTo>
+                  <a:pt x="3504504" y="679736"/>
+                </a:lnTo>
+                <a:lnTo>
+                  <a:pt x="3548847" y="700178"/>
+                </a:lnTo>
+                <a:lnTo>
+                  <a:pt x="3592826" y="720923"/>
+                </a:lnTo>
+                <a:lnTo>
+                  <a:pt x="3636436" y="741971"/>
+                </a:lnTo>
+                <a:lnTo>
+                  <a:pt x="3679672" y="763321"/>
+                </a:lnTo>
+                <a:lnTo>
+                  <a:pt x="3722526" y="784975"/>
+                </a:lnTo>
+                <a:lnTo>
+                  <a:pt x="3764993" y="806931"/>
+                </a:lnTo>
+                <a:lnTo>
+                  <a:pt x="3807067" y="829190"/>
+                </a:lnTo>
+                <a:lnTo>
+                  <a:pt x="3848742" y="851752"/>
+                </a:lnTo>
+                <a:lnTo>
+                  <a:pt x="3890012" y="874617"/>
+                </a:lnTo>
+                <a:lnTo>
+                  <a:pt x="3930870" y="897785"/>
+                </a:lnTo>
+                <a:lnTo>
+                  <a:pt x="3971310" y="921255"/>
+                </a:lnTo>
+                <a:lnTo>
+                  <a:pt x="4011327" y="945029"/>
+                </a:lnTo>
+                <a:lnTo>
+                  <a:pt x="4050913" y="969105"/>
+                </a:lnTo>
+                <a:lnTo>
+                  <a:pt x="4090064" y="993484"/>
+                </a:lnTo>
+                <a:lnTo>
+                  <a:pt x="4128772" y="1018166"/>
+                </a:lnTo>
+                <a:lnTo>
+                  <a:pt x="4167032" y="1043151"/>
+                </a:lnTo>
+                <a:lnTo>
+                  <a:pt x="4204836" y="1068438"/>
+                </a:lnTo>
+                <a:lnTo>
+                  <a:pt x="4242180" y="1094029"/>
+                </a:lnTo>
+                <a:lnTo>
+                  <a:pt x="4279056" y="1119922"/>
+                </a:lnTo>
+                <a:lnTo>
+                  <a:pt x="4315458" y="1146118"/>
+                </a:lnTo>
+                <a:lnTo>
+                  <a:pt x="4351381" y="1172617"/>
+                </a:lnTo>
+                <a:lnTo>
+                  <a:pt x="4386817" y="1199419"/>
+                </a:lnTo>
+                <a:lnTo>
+                  <a:pt x="4421761" y="1226524"/>
+                </a:lnTo>
+                <a:lnTo>
+                  <a:pt x="4456206" y="1253931"/>
+                </a:lnTo>
+                <a:lnTo>
+                  <a:pt x="4490145" y="1281641"/>
+                </a:lnTo>
+                <a:lnTo>
+                  <a:pt x="4523574" y="1309655"/>
+                </a:lnTo>
+                <a:lnTo>
+                  <a:pt x="4556484" y="1337971"/>
+                </a:lnTo>
+                <a:lnTo>
+                  <a:pt x="4588871" y="1366590"/>
+                </a:lnTo>
+                <a:lnTo>
+                  <a:pt x="4620728" y="1395511"/>
+                </a:lnTo>
+                <a:lnTo>
+                  <a:pt x="4652048" y="1424736"/>
+                </a:lnTo>
+                <a:lnTo>
+                  <a:pt x="4682825" y="1454263"/>
+                </a:lnTo>
+                <a:lnTo>
+                  <a:pt x="4713054" y="1484094"/>
+                </a:lnTo>
+                <a:lnTo>
+                  <a:pt x="4742728" y="1514227"/>
+                </a:lnTo>
+                <a:lnTo>
+                  <a:pt x="4771841" y="1544663"/>
+                </a:lnTo>
+                <a:lnTo>
+                  <a:pt x="4800387" y="1575401"/>
+                </a:lnTo>
+                <a:lnTo>
+                  <a:pt x="4828359" y="1606443"/>
+                </a:lnTo>
+                <a:lnTo>
+                  <a:pt x="4855753" y="1637788"/>
+                </a:lnTo>
+                <a:lnTo>
+                  <a:pt x="4882562" y="1669435"/>
+                </a:lnTo>
+                <a:lnTo>
+                  <a:pt x="4908780" y="1701385"/>
+                </a:lnTo>
+                <a:lnTo>
+                  <a:pt x="4934402" y="1733638"/>
+                </a:lnTo>
+                <a:lnTo>
+                  <a:pt x="4959422" y="1766194"/>
+                </a:lnTo>
+                <a:lnTo>
+                  <a:pt x="4983834" y="1799053"/>
+                </a:lnTo>
+                <a:lnTo>
+                  <a:pt x="5007634" y="1832214"/>
+                </a:lnTo>
+                <a:lnTo>
+                  <a:pt x="5030815" y="1865679"/>
+                </a:lnTo>
+                <a:lnTo>
+                  <a:pt x="5053373" y="1899446"/>
+                </a:lnTo>
+                <a:lnTo>
+                  <a:pt x="5075303" y="1933516"/>
+                </a:lnTo>
+                <a:lnTo>
+                  <a:pt x="5096600" y="1967889"/>
+                </a:lnTo>
+                <a:lnTo>
+                  <a:pt x="5117259" y="2002565"/>
+                </a:lnTo>
+                <a:lnTo>
+                  <a:pt x="5137276" y="2037544"/>
+                </a:lnTo>
+                <a:lnTo>
+                  <a:pt x="5156647" y="2072825"/>
+                </a:lnTo>
+                <a:lnTo>
+                  <a:pt x="5175368" y="2108409"/>
+                </a:lnTo>
+                <a:lnTo>
+                  <a:pt x="5193434" y="2144297"/>
+                </a:lnTo>
+                <a:lnTo>
+                  <a:pt x="5210844" y="2180487"/>
+                </a:lnTo>
+                <a:lnTo>
+                  <a:pt x="5227594" y="2216979"/>
+                </a:lnTo>
+                <a:lnTo>
+                  <a:pt x="5243680" y="2253775"/>
+                </a:lnTo>
+                <a:lnTo>
+                  <a:pt x="5259101" y="2290874"/>
+                </a:lnTo>
+                <a:lnTo>
+                  <a:pt x="5273856" y="2328275"/>
+                </a:lnTo>
+                <a:lnTo>
+                  <a:pt x="5287941" y="2365979"/>
+                </a:lnTo>
+                <a:lnTo>
+                  <a:pt x="5301357" y="2403987"/>
+                </a:lnTo>
+                <a:lnTo>
+                  <a:pt x="5314103" y="2442296"/>
+                </a:lnTo>
+                <a:lnTo>
+                  <a:pt x="5326180" y="2480909"/>
+                </a:lnTo>
+                <a:lnTo>
+                  <a:pt x="5337587" y="2519825"/>
+                </a:lnTo>
+                <a:lnTo>
+                  <a:pt x="5348327" y="2559043"/>
+                </a:lnTo>
+                <a:lnTo>
+                  <a:pt x="5358402" y="2598565"/>
+                </a:lnTo>
+                <a:lnTo>
+                  <a:pt x="5367816" y="2638389"/>
+                </a:lnTo>
+                <a:lnTo>
+                  <a:pt x="5376571" y="2678516"/>
+                </a:lnTo>
+                <a:lnTo>
+                  <a:pt x="5384674" y="2718946"/>
+                </a:lnTo>
+                <a:lnTo>
+                  <a:pt x="5392130" y="2759678"/>
+                </a:lnTo>
+                <a:lnTo>
+                  <a:pt x="5398947" y="2800714"/>
+                </a:lnTo>
+                <a:lnTo>
+                  <a:pt x="5405135" y="2842052"/>
+                </a:lnTo>
+                <a:lnTo>
+                  <a:pt x="5410703" y="2883694"/>
+                </a:lnTo>
+                <a:lnTo>
+                  <a:pt x="5415663" y="2925638"/>
+                </a:lnTo>
+                <a:lnTo>
+                  <a:pt x="5420030" y="2967885"/>
+                </a:lnTo>
+                <a:lnTo>
+                  <a:pt x="5423821" y="3010434"/>
+                </a:lnTo>
+                <a:lnTo>
+                  <a:pt x="5427053" y="3053287"/>
+                </a:lnTo>
+                <a:lnTo>
+                  <a:pt x="5429750" y="3096443"/>
+                </a:lnTo>
+                <a:lnTo>
+                  <a:pt x="5431935" y="3139901"/>
+                </a:lnTo>
+                <a:lnTo>
+                  <a:pt x="5433640" y="3183662"/>
+                </a:lnTo>
+                <a:lnTo>
+                  <a:pt x="5434898" y="3227726"/>
+                </a:lnTo>
+                <a:lnTo>
+                  <a:pt x="5435752" y="3272093"/>
+                </a:lnTo>
+                <a:lnTo>
+                  <a:pt x="5436253" y="3316763"/>
+                </a:lnTo>
+                <a:lnTo>
+                  <a:pt x="5436468" y="3361735"/>
+                </a:lnTo>
+                <a:lnTo>
+                  <a:pt x="5436499" y="3395663"/>
                 </a:lnTo>
               </a:path>
             </a:pathLst>
@@ -5230,16 +4949,39 @@
           </a:p>
         </p:txBody>
       </p:sp>
-      <p:sp>
-        <p:nvSpPr>
-          <p:cNvPr id="34" name="C1-E12 text 32" descr="sci-ppt:o032"/>
+      <p:cxnSp>
+        <p:nvCxnSpPr>
+          <p:cNvPr id="49" name="C1-E12 line 47" descr="sci-ppt:o047"/>
+          <p:cNvCxnSpPr/>
+          <p:nvPr/>
+        </p:nvCxnSpPr>
+        <p:spPr>
+          <a:xfrm>
+            <a:off x="11014339" y="1371600"/>
+            <a:ext cx="0" cy="3566160"/>
+          </a:xfrm>
+          <a:prstGeom prst="line">
+            <a:avLst/>
+          </a:prstGeom>
+          <a:ln w="16510">
+            <a:solidFill>
+              <a:srgbClr val="F2B880"/>
+            </a:solidFill>
+            <a:prstDash val="dash"/>
+          </a:ln>
+          <a:effectLst/>
+        </p:spPr>
+      </p:cxnSp>
+      <p:sp>
+        <p:nvSpPr>
+          <p:cNvPr id="50" name="C1-E12 text 48" descr="sci-ppt:o048"/>
           <p:cNvSpPr txBox="1"/>
           <p:nvPr/>
         </p:nvSpPr>
         <p:spPr>
           <a:xfrm>
-            <a:off x="1463040" y="3962848"/>
-            <a:ext cx="2743200" cy="231648"/>
+            <a:off x="9231259" y="3069771"/>
+            <a:ext cx="1737360" cy="247142"/>
           </a:xfrm>
           <a:prstGeom prst="rect">
             <a:avLst/>
@@ -5259,27 +5001,99 @@
               </a:spcAft>
             </a:pPr>
             <a:r>
-              <a:rPr sz="1200" b="0" i="0">
+              <a:rPr sz="1300" b="0" i="0">
                 <a:solidFill>
-                  <a:srgbClr val="F28BA0"/>
+                  <a:srgbClr val="F2B880"/>
                 </a:solidFill>
                 <a:latin typeface="Arial"/>
               </a:rPr>
-              <a:t>Dᵣᵣ = −2R²Ṙ/r³ (radial)</a:t>
-            </a:r>
-          </a:p>
-        </p:txBody>
-      </p:sp>
-      <p:sp>
-        <p:nvSpPr>
-          <p:cNvPr id="35" name="C1-E12 text 33" descr="sci-ppt:o033"/>
+              <a:t>t_c = 2.74 µs</a:t>
+            </a:r>
+          </a:p>
+        </p:txBody>
+      </p:sp>
+      <p:sp>
+        <p:nvSpPr>
+          <p:cNvPr id="51" name="C1-E12 ellipse 49" descr="sci-ppt:o049"/>
+          <p:cNvSpPr/>
+          <p:nvPr/>
+        </p:nvSpPr>
+        <p:spPr>
+          <a:xfrm>
+            <a:off x="5504688" y="1468265"/>
+            <a:ext cx="146304" cy="146304"/>
+          </a:xfrm>
+          <a:prstGeom prst="ellipse">
+            <a:avLst/>
+          </a:prstGeom>
+          <a:solidFill>
+            <a:srgbClr val="F2B880"/>
+          </a:solidFill>
+          <a:ln w="12700">
+            <a:solidFill>
+              <a:srgbClr val="F2B880"/>
+            </a:solidFill>
+          </a:ln>
+          <a:effectLst/>
+        </p:spPr>
+        <p:txBody>
+          <a:bodyPr rtlCol="0" anchor="ctr"/>
+          <a:lstStyle/>
+          <a:p>
+            <a:pPr algn="ctr"/>
+          </a:p>
+        </p:txBody>
+      </p:sp>
+      <p:sp>
+        <p:nvSpPr>
+          <p:cNvPr id="52" name="C1-E12 text 50" descr="sci-ppt:o050"/>
           <p:cNvSpPr txBox="1"/>
           <p:nvPr/>
         </p:nvSpPr>
         <p:spPr>
           <a:xfrm>
-            <a:off x="1780032" y="1532964"/>
-            <a:ext cx="3108960" cy="231648"/>
+            <a:off x="5786628" y="1632857"/>
+            <a:ext cx="2011680" cy="231648"/>
+          </a:xfrm>
+          <a:prstGeom prst="rect">
+            <a:avLst/>
+          </a:prstGeom>
+          <a:noFill/>
+          <a:effectLst/>
+        </p:spPr>
+        <p:txBody>
+          <a:bodyPr wrap="none" lIns="18288" rIns="18288" tIns="18288" bIns="18288" anchor="t">
+            <a:spAutoFit/>
+          </a:bodyPr>
+          <a:lstStyle/>
+          <a:p>
+            <a:pPr algn="l">
+              <a:spcAft>
+                <a:spcPts val="0"/>
+              </a:spcAft>
+            </a:pPr>
+            <a:r>
+              <a:rPr sz="1200" b="0" i="0">
+                <a:solidFill>
+                  <a:srgbClr val="F2B880"/>
+                </a:solidFill>
+                <a:latin typeface="Arial"/>
+              </a:rPr>
+              <a:t>flat start (Ṙ = 0)</a:t>
+            </a:r>
+          </a:p>
+        </p:txBody>
+      </p:sp>
+      <p:sp>
+        <p:nvSpPr>
+          <p:cNvPr id="53" name="C1-E12 text 51" descr="sci-ppt:o051"/>
+          <p:cNvSpPr txBox="1"/>
+          <p:nvPr/>
+        </p:nvSpPr>
+        <p:spPr>
+          <a:xfrm>
+            <a:off x="8325612" y="4438758"/>
+            <a:ext cx="2011680" cy="231648"/>
           </a:xfrm>
           <a:prstGeom prst="rect">
             <a:avLst/>
@@ -5305,21 +5119,21 @@
                 </a:solidFill>
                 <a:latin typeface="Arial"/>
               </a:rPr>
-              <a:t>D_θθ = D_ψψ = R²Ṙ/r³ (tangential)</a:t>
-            </a:r>
-          </a:p>
-        </p:txBody>
-      </p:sp>
-      <p:sp>
-        <p:nvSpPr>
-          <p:cNvPr id="36" name="C1-E12 text 34" descr="sci-ppt:o034"/>
+              <a:t>steepest at the end</a:t>
+            </a:r>
+          </a:p>
+        </p:txBody>
+      </p:sp>
+      <p:sp>
+        <p:nvSpPr>
+          <p:cNvPr id="54" name="C1-E12 text 52" descr="sci-ppt:o052"/>
           <p:cNvSpPr txBox="1"/>
           <p:nvPr/>
         </p:nvSpPr>
         <p:spPr>
           <a:xfrm>
-            <a:off x="914400" y="5440680"/>
-            <a:ext cx="4846320" cy="239395"/>
+            <a:off x="5577840" y="5733288"/>
+            <a:ext cx="6035040" cy="254889"/>
           </a:xfrm>
           <a:prstGeom prst="rect">
             <a:avLst/>
@@ -5339,805 +5153,27 @@
               </a:spcAft>
             </a:pPr>
             <a:r>
-              <a:rPr sz="1250" b="0" i="0">
+              <a:rPr sz="1350" b="1" i="0">
                 <a:solidFill>
                   <a:srgbClr val="E7F0F3"/>
                 </a:solidFill>
                 <a:latin typeface="Arial"/>
               </a:rPr>
-              <a:t>Dᵣᵣ + 2D_θθ = 0: no net volume change (incompressible).</a:t>
-            </a:r>
-          </a:p>
-        </p:txBody>
-      </p:sp>
-      <p:cxnSp>
-        <p:nvCxnSpPr>
-          <p:cNvPr id="37" name="C1-E12 line 35" descr="sci-ppt:o035"/>
-          <p:cNvCxnSpPr/>
-          <p:nvPr/>
-        </p:nvCxnSpPr>
-        <p:spPr>
-          <a:xfrm>
-            <a:off x="6583680" y="4800600"/>
-            <a:ext cx="5120640" cy="0"/>
-          </a:xfrm>
-          <a:prstGeom prst="line">
-            <a:avLst/>
-          </a:prstGeom>
-          <a:ln w="19050">
-            <a:solidFill>
-              <a:srgbClr val="B4C7D2"/>
-            </a:solidFill>
-          </a:ln>
-          <a:effectLst/>
-        </p:spPr>
-      </p:cxnSp>
-      <p:cxnSp>
-        <p:nvCxnSpPr>
-          <p:cNvPr id="38" name="C1-E12 line 36" descr="sci-ppt:o036"/>
-          <p:cNvCxnSpPr/>
-          <p:nvPr/>
-        </p:nvCxnSpPr>
-        <p:spPr>
-          <a:xfrm>
-            <a:off x="6583680" y="1417320"/>
-            <a:ext cx="0" cy="3383280"/>
-          </a:xfrm>
-          <a:prstGeom prst="line">
-            <a:avLst/>
-          </a:prstGeom>
-          <a:ln w="19050">
-            <a:solidFill>
-              <a:srgbClr val="B4C7D2"/>
-            </a:solidFill>
-          </a:ln>
-          <a:effectLst/>
-        </p:spPr>
-      </p:cxnSp>
-      <p:cxnSp>
-        <p:nvCxnSpPr>
-          <p:cNvPr id="39" name="C1-E12 line 37" descr="sci-ppt:o037"/>
-          <p:cNvCxnSpPr/>
-          <p:nvPr/>
-        </p:nvCxnSpPr>
-        <p:spPr>
-          <a:xfrm>
-            <a:off x="6583680" y="4800600"/>
-            <a:ext cx="0" cy="64008"/>
-          </a:xfrm>
-          <a:prstGeom prst="line">
-            <a:avLst/>
-          </a:prstGeom>
-          <a:ln w="12700">
-            <a:solidFill>
-              <a:srgbClr val="B4C7D2"/>
-            </a:solidFill>
-          </a:ln>
-          <a:effectLst/>
-        </p:spPr>
-      </p:cxnSp>
-      <p:cxnSp>
-        <p:nvCxnSpPr>
-          <p:cNvPr id="40" name="C1-E12 line 38" descr="sci-ppt:o038"/>
-          <p:cNvCxnSpPr/>
-          <p:nvPr/>
-        </p:nvCxnSpPr>
-        <p:spPr>
-          <a:xfrm>
-            <a:off x="6583680" y="1417320"/>
-            <a:ext cx="0" cy="3383280"/>
-          </a:xfrm>
-          <a:prstGeom prst="line">
-            <a:avLst/>
-          </a:prstGeom>
-          <a:ln w="7620">
-            <a:solidFill>
-              <a:srgbClr val="2E4756"/>
-            </a:solidFill>
-          </a:ln>
-          <a:effectLst/>
-        </p:spPr>
-      </p:cxnSp>
-      <p:sp>
-        <p:nvSpPr>
-          <p:cNvPr id="41" name="C1-E12 text 39" descr="sci-ppt:o039"/>
+              <a:t>R R̈ + (3/2)Ṙ² = −Δp_c/ρ,  R(0) = Rₘₐₓ,  Ṙ(0) = 0</a:t>
+            </a:r>
+          </a:p>
+        </p:txBody>
+      </p:sp>
+      <p:sp>
+        <p:nvSpPr>
+          <p:cNvPr id="55" name="C1-E12 text 53" descr="sci-ppt:o053"/>
           <p:cNvSpPr txBox="1"/>
           <p:nvPr/>
         </p:nvSpPr>
         <p:spPr>
           <a:xfrm>
-            <a:off x="6126480" y="4882896"/>
-            <a:ext cx="914400" cy="208407"/>
-          </a:xfrm>
-          <a:prstGeom prst="rect">
-            <a:avLst/>
-          </a:prstGeom>
-          <a:noFill/>
-          <a:effectLst/>
-        </p:spPr>
-        <p:txBody>
-          <a:bodyPr wrap="none" lIns="18288" rIns="18288" tIns="18288" bIns="18288" anchor="t">
-            <a:spAutoFit/>
-          </a:bodyPr>
-          <a:lstStyle/>
-          <a:p>
-            <a:pPr algn="ctr">
-              <a:spcAft>
-                <a:spcPts val="0"/>
-              </a:spcAft>
-            </a:pPr>
-            <a:r>
-              <a:rPr sz="1050" b="0" i="0">
-                <a:solidFill>
-                  <a:srgbClr val="B4C7D2"/>
-                </a:solidFill>
-                <a:latin typeface="Arial"/>
-              </a:rPr>
-              <a:t>1</a:t>
-            </a:r>
-          </a:p>
-        </p:txBody>
-      </p:sp>
-      <p:cxnSp>
-        <p:nvCxnSpPr>
-          <p:cNvPr id="42" name="C1-E12 line 40" descr="sci-ppt:o040"/>
-          <p:cNvCxnSpPr/>
-          <p:nvPr/>
-        </p:nvCxnSpPr>
-        <p:spPr>
-          <a:xfrm>
-            <a:off x="8290560" y="4800600"/>
-            <a:ext cx="0" cy="64008"/>
-          </a:xfrm>
-          <a:prstGeom prst="line">
-            <a:avLst/>
-          </a:prstGeom>
-          <a:ln w="12700">
-            <a:solidFill>
-              <a:srgbClr val="B4C7D2"/>
-            </a:solidFill>
-          </a:ln>
-          <a:effectLst/>
-        </p:spPr>
-      </p:cxnSp>
-      <p:cxnSp>
-        <p:nvCxnSpPr>
-          <p:cNvPr id="43" name="C1-E12 line 41" descr="sci-ppt:o041"/>
-          <p:cNvCxnSpPr/>
-          <p:nvPr/>
-        </p:nvCxnSpPr>
-        <p:spPr>
-          <a:xfrm>
-            <a:off x="8290560" y="1417320"/>
-            <a:ext cx="0" cy="3383280"/>
-          </a:xfrm>
-          <a:prstGeom prst="line">
-            <a:avLst/>
-          </a:prstGeom>
-          <a:ln w="7620">
-            <a:solidFill>
-              <a:srgbClr val="2E4756"/>
-            </a:solidFill>
-          </a:ln>
-          <a:effectLst/>
-        </p:spPr>
-      </p:cxnSp>
-      <p:sp>
-        <p:nvSpPr>
-          <p:cNvPr id="44" name="C1-E12 text 42" descr="sci-ppt:o042"/>
-          <p:cNvSpPr txBox="1"/>
-          <p:nvPr/>
-        </p:nvSpPr>
-        <p:spPr>
-          <a:xfrm>
-            <a:off x="7833360" y="4882896"/>
-            <a:ext cx="914400" cy="208407"/>
-          </a:xfrm>
-          <a:prstGeom prst="rect">
-            <a:avLst/>
-          </a:prstGeom>
-          <a:noFill/>
-          <a:effectLst/>
-        </p:spPr>
-        <p:txBody>
-          <a:bodyPr wrap="none" lIns="18288" rIns="18288" tIns="18288" bIns="18288" anchor="t">
-            <a:spAutoFit/>
-          </a:bodyPr>
-          <a:lstStyle/>
-          <a:p>
-            <a:pPr algn="ctr">
-              <a:spcAft>
-                <a:spcPts val="0"/>
-              </a:spcAft>
-            </a:pPr>
-            <a:r>
-              <a:rPr sz="1050" b="0" i="0">
-                <a:solidFill>
-                  <a:srgbClr val="B4C7D2"/>
-                </a:solidFill>
-                <a:latin typeface="Arial"/>
-              </a:rPr>
-              <a:t>2</a:t>
-            </a:r>
-          </a:p>
-        </p:txBody>
-      </p:sp>
-      <p:cxnSp>
-        <p:nvCxnSpPr>
-          <p:cNvPr id="45" name="C1-E12 line 43" descr="sci-ppt:o043"/>
-          <p:cNvCxnSpPr/>
-          <p:nvPr/>
-        </p:nvCxnSpPr>
-        <p:spPr>
-          <a:xfrm>
-            <a:off x="9997440" y="4800600"/>
-            <a:ext cx="0" cy="64008"/>
-          </a:xfrm>
-          <a:prstGeom prst="line">
-            <a:avLst/>
-          </a:prstGeom>
-          <a:ln w="12700">
-            <a:solidFill>
-              <a:srgbClr val="B4C7D2"/>
-            </a:solidFill>
-          </a:ln>
-          <a:effectLst/>
-        </p:spPr>
-      </p:cxnSp>
-      <p:cxnSp>
-        <p:nvCxnSpPr>
-          <p:cNvPr id="46" name="C1-E12 line 44" descr="sci-ppt:o044"/>
-          <p:cNvCxnSpPr/>
-          <p:nvPr/>
-        </p:nvCxnSpPr>
-        <p:spPr>
-          <a:xfrm>
-            <a:off x="9997440" y="1417320"/>
-            <a:ext cx="0" cy="3383280"/>
-          </a:xfrm>
-          <a:prstGeom prst="line">
-            <a:avLst/>
-          </a:prstGeom>
-          <a:ln w="7620">
-            <a:solidFill>
-              <a:srgbClr val="2E4756"/>
-            </a:solidFill>
-          </a:ln>
-          <a:effectLst/>
-        </p:spPr>
-      </p:cxnSp>
-      <p:sp>
-        <p:nvSpPr>
-          <p:cNvPr id="47" name="C1-E12 text 45" descr="sci-ppt:o045"/>
-          <p:cNvSpPr txBox="1"/>
-          <p:nvPr/>
-        </p:nvSpPr>
-        <p:spPr>
-          <a:xfrm>
-            <a:off x="9540240" y="4882896"/>
-            <a:ext cx="914400" cy="208407"/>
-          </a:xfrm>
-          <a:prstGeom prst="rect">
-            <a:avLst/>
-          </a:prstGeom>
-          <a:noFill/>
-          <a:effectLst/>
-        </p:spPr>
-        <p:txBody>
-          <a:bodyPr wrap="none" lIns="18288" rIns="18288" tIns="18288" bIns="18288" anchor="t">
-            <a:spAutoFit/>
-          </a:bodyPr>
-          <a:lstStyle/>
-          <a:p>
-            <a:pPr algn="ctr">
-              <a:spcAft>
-                <a:spcPts val="0"/>
-              </a:spcAft>
-            </a:pPr>
-            <a:r>
-              <a:rPr sz="1050" b="0" i="0">
-                <a:solidFill>
-                  <a:srgbClr val="B4C7D2"/>
-                </a:solidFill>
-                <a:latin typeface="Arial"/>
-              </a:rPr>
-              <a:t>3</a:t>
-            </a:r>
-          </a:p>
-        </p:txBody>
-      </p:sp>
-      <p:cxnSp>
-        <p:nvCxnSpPr>
-          <p:cNvPr id="48" name="C1-E12 line 46" descr="sci-ppt:o046"/>
-          <p:cNvCxnSpPr/>
-          <p:nvPr/>
-        </p:nvCxnSpPr>
-        <p:spPr>
-          <a:xfrm>
-            <a:off x="11704320" y="4800600"/>
-            <a:ext cx="0" cy="64008"/>
-          </a:xfrm>
-          <a:prstGeom prst="line">
-            <a:avLst/>
-          </a:prstGeom>
-          <a:ln w="12700">
-            <a:solidFill>
-              <a:srgbClr val="B4C7D2"/>
-            </a:solidFill>
-          </a:ln>
-          <a:effectLst/>
-        </p:spPr>
-      </p:cxnSp>
-      <p:cxnSp>
-        <p:nvCxnSpPr>
-          <p:cNvPr id="49" name="C1-E12 line 47" descr="sci-ppt:o047"/>
-          <p:cNvCxnSpPr/>
-          <p:nvPr/>
-        </p:nvCxnSpPr>
-        <p:spPr>
-          <a:xfrm>
-            <a:off x="11704320" y="1417320"/>
-            <a:ext cx="0" cy="3383280"/>
-          </a:xfrm>
-          <a:prstGeom prst="line">
-            <a:avLst/>
-          </a:prstGeom>
-          <a:ln w="7620">
-            <a:solidFill>
-              <a:srgbClr val="2E4756"/>
-            </a:solidFill>
-          </a:ln>
-          <a:effectLst/>
-        </p:spPr>
-      </p:cxnSp>
-      <p:sp>
-        <p:nvSpPr>
-          <p:cNvPr id="50" name="C1-E12 text 48" descr="sci-ppt:o048"/>
-          <p:cNvSpPr txBox="1"/>
-          <p:nvPr/>
-        </p:nvSpPr>
-        <p:spPr>
-          <a:xfrm>
-            <a:off x="11247120" y="4882896"/>
-            <a:ext cx="914400" cy="208407"/>
-          </a:xfrm>
-          <a:prstGeom prst="rect">
-            <a:avLst/>
-          </a:prstGeom>
-          <a:noFill/>
-          <a:effectLst/>
-        </p:spPr>
-        <p:txBody>
-          <a:bodyPr wrap="none" lIns="18288" rIns="18288" tIns="18288" bIns="18288" anchor="t">
-            <a:spAutoFit/>
-          </a:bodyPr>
-          <a:lstStyle/>
-          <a:p>
-            <a:pPr algn="ctr">
-              <a:spcAft>
-                <a:spcPts val="0"/>
-              </a:spcAft>
-            </a:pPr>
-            <a:r>
-              <a:rPr sz="1050" b="0" i="0">
-                <a:solidFill>
-                  <a:srgbClr val="B4C7D2"/>
-                </a:solidFill>
-                <a:latin typeface="Arial"/>
-              </a:rPr>
-              <a:t>4</a:t>
-            </a:r>
-          </a:p>
-        </p:txBody>
-      </p:sp>
-      <p:cxnSp>
-        <p:nvCxnSpPr>
-          <p:cNvPr id="51" name="C1-E12 line 49" descr="sci-ppt:o049"/>
-          <p:cNvCxnSpPr/>
-          <p:nvPr/>
-        </p:nvCxnSpPr>
-        <p:spPr>
-          <a:xfrm>
-            <a:off x="6519672" y="4800600"/>
-            <a:ext cx="64008" cy="0"/>
-          </a:xfrm>
-          <a:prstGeom prst="line">
-            <a:avLst/>
-          </a:prstGeom>
-          <a:ln w="12700">
-            <a:solidFill>
-              <a:srgbClr val="B4C7D2"/>
-            </a:solidFill>
-          </a:ln>
-          <a:effectLst/>
-        </p:spPr>
-      </p:cxnSp>
-      <p:cxnSp>
-        <p:nvCxnSpPr>
-          <p:cNvPr id="52" name="C1-E12 line 50" descr="sci-ppt:o050"/>
-          <p:cNvCxnSpPr/>
-          <p:nvPr/>
-        </p:nvCxnSpPr>
-        <p:spPr>
-          <a:xfrm>
-            <a:off x="6519672" y="3995057"/>
-            <a:ext cx="64008" cy="0"/>
-          </a:xfrm>
-          <a:prstGeom prst="line">
-            <a:avLst/>
-          </a:prstGeom>
-          <a:ln w="12700">
-            <a:solidFill>
-              <a:srgbClr val="B4C7D2"/>
-            </a:solidFill>
-          </a:ln>
-          <a:effectLst/>
-        </p:spPr>
-      </p:cxnSp>
-      <p:cxnSp>
-        <p:nvCxnSpPr>
-          <p:cNvPr id="53" name="C1-E12 line 51" descr="sci-ppt:o051"/>
-          <p:cNvCxnSpPr/>
-          <p:nvPr/>
-        </p:nvCxnSpPr>
-        <p:spPr>
-          <a:xfrm>
-            <a:off x="6583680" y="3995057"/>
-            <a:ext cx="5120640" cy="0"/>
-          </a:xfrm>
-          <a:prstGeom prst="line">
-            <a:avLst/>
-          </a:prstGeom>
-          <a:ln w="7620">
-            <a:solidFill>
-              <a:srgbClr val="2E4756"/>
-            </a:solidFill>
-          </a:ln>
-          <a:effectLst/>
-        </p:spPr>
-      </p:cxnSp>
-      <p:sp>
-        <p:nvSpPr>
-          <p:cNvPr id="54" name="C1-E12 text 52" descr="sci-ppt:o052"/>
-          <p:cNvSpPr txBox="1"/>
-          <p:nvPr/>
-        </p:nvSpPr>
-        <p:spPr>
-          <a:xfrm>
-            <a:off x="5715000" y="3912761"/>
-            <a:ext cx="777240" cy="208407"/>
-          </a:xfrm>
-          <a:prstGeom prst="rect">
-            <a:avLst/>
-          </a:prstGeom>
-          <a:noFill/>
-          <a:effectLst/>
-        </p:spPr>
-        <p:txBody>
-          <a:bodyPr wrap="none" lIns="18288" rIns="18288" tIns="18288" bIns="18288" anchor="t">
-            <a:spAutoFit/>
-          </a:bodyPr>
-          <a:lstStyle/>
-          <a:p>
-            <a:pPr algn="r">
-              <a:spcAft>
-                <a:spcPts val="0"/>
-              </a:spcAft>
-            </a:pPr>
-            <a:r>
-              <a:rPr sz="1050" b="0" i="0">
-                <a:solidFill>
-                  <a:srgbClr val="B4C7D2"/>
-                </a:solidFill>
-                <a:latin typeface="Arial"/>
-              </a:rPr>
-              <a:t>0.25</a:t>
-            </a:r>
-          </a:p>
-        </p:txBody>
-      </p:sp>
-      <p:cxnSp>
-        <p:nvCxnSpPr>
-          <p:cNvPr id="55" name="C1-E12 line 53" descr="sci-ppt:o053"/>
-          <p:cNvCxnSpPr/>
-          <p:nvPr/>
-        </p:nvCxnSpPr>
-        <p:spPr>
-          <a:xfrm>
-            <a:off x="6519672" y="3189514"/>
-            <a:ext cx="64008" cy="0"/>
-          </a:xfrm>
-          <a:prstGeom prst="line">
-            <a:avLst/>
-          </a:prstGeom>
-          <a:ln w="12700">
-            <a:solidFill>
-              <a:srgbClr val="B4C7D2"/>
-            </a:solidFill>
-          </a:ln>
-          <a:effectLst/>
-        </p:spPr>
-      </p:cxnSp>
-      <p:cxnSp>
-        <p:nvCxnSpPr>
-          <p:cNvPr id="56" name="C1-E12 line 54" descr="sci-ppt:o054"/>
-          <p:cNvCxnSpPr/>
-          <p:nvPr/>
-        </p:nvCxnSpPr>
-        <p:spPr>
-          <a:xfrm>
-            <a:off x="6583680" y="3189514"/>
-            <a:ext cx="5120640" cy="0"/>
-          </a:xfrm>
-          <a:prstGeom prst="line">
-            <a:avLst/>
-          </a:prstGeom>
-          <a:ln w="7620">
-            <a:solidFill>
-              <a:srgbClr val="2E4756"/>
-            </a:solidFill>
-          </a:ln>
-          <a:effectLst/>
-        </p:spPr>
-      </p:cxnSp>
-      <p:sp>
-        <p:nvSpPr>
-          <p:cNvPr id="57" name="C1-E12 text 55" descr="sci-ppt:o055"/>
-          <p:cNvSpPr txBox="1"/>
-          <p:nvPr/>
-        </p:nvSpPr>
-        <p:spPr>
-          <a:xfrm>
-            <a:off x="5715000" y="3107218"/>
-            <a:ext cx="777240" cy="208407"/>
-          </a:xfrm>
-          <a:prstGeom prst="rect">
-            <a:avLst/>
-          </a:prstGeom>
-          <a:noFill/>
-          <a:effectLst/>
-        </p:spPr>
-        <p:txBody>
-          <a:bodyPr wrap="none" lIns="18288" rIns="18288" tIns="18288" bIns="18288" anchor="t">
-            <a:spAutoFit/>
-          </a:bodyPr>
-          <a:lstStyle/>
-          <a:p>
-            <a:pPr algn="r">
-              <a:spcAft>
-                <a:spcPts val="0"/>
-              </a:spcAft>
-            </a:pPr>
-            <a:r>
-              <a:rPr sz="1050" b="0" i="0">
-                <a:solidFill>
-                  <a:srgbClr val="B4C7D2"/>
-                </a:solidFill>
-                <a:latin typeface="Arial"/>
-              </a:rPr>
-              <a:t>0.50</a:t>
-            </a:r>
-          </a:p>
-        </p:txBody>
-      </p:sp>
-      <p:cxnSp>
-        <p:nvCxnSpPr>
-          <p:cNvPr id="58" name="C1-E12 line 56" descr="sci-ppt:o056"/>
-          <p:cNvCxnSpPr/>
-          <p:nvPr/>
-        </p:nvCxnSpPr>
-        <p:spPr>
-          <a:xfrm>
-            <a:off x="6519672" y="2383971"/>
-            <a:ext cx="64008" cy="0"/>
-          </a:xfrm>
-          <a:prstGeom prst="line">
-            <a:avLst/>
-          </a:prstGeom>
-          <a:ln w="12700">
-            <a:solidFill>
-              <a:srgbClr val="B4C7D2"/>
-            </a:solidFill>
-          </a:ln>
-          <a:effectLst/>
-        </p:spPr>
-      </p:cxnSp>
-      <p:cxnSp>
-        <p:nvCxnSpPr>
-          <p:cNvPr id="59" name="C1-E12 line 57" descr="sci-ppt:o057"/>
-          <p:cNvCxnSpPr/>
-          <p:nvPr/>
-        </p:nvCxnSpPr>
-        <p:spPr>
-          <a:xfrm>
-            <a:off x="6583680" y="2383971"/>
-            <a:ext cx="5120640" cy="0"/>
-          </a:xfrm>
-          <a:prstGeom prst="line">
-            <a:avLst/>
-          </a:prstGeom>
-          <a:ln w="7620">
-            <a:solidFill>
-              <a:srgbClr val="2E4756"/>
-            </a:solidFill>
-          </a:ln>
-          <a:effectLst/>
-        </p:spPr>
-      </p:cxnSp>
-      <p:sp>
-        <p:nvSpPr>
-          <p:cNvPr id="60" name="C1-E12 text 58" descr="sci-ppt:o058"/>
-          <p:cNvSpPr txBox="1"/>
-          <p:nvPr/>
-        </p:nvSpPr>
-        <p:spPr>
-          <a:xfrm>
-            <a:off x="5715000" y="2301675"/>
-            <a:ext cx="777240" cy="208407"/>
-          </a:xfrm>
-          <a:prstGeom prst="rect">
-            <a:avLst/>
-          </a:prstGeom>
-          <a:noFill/>
-          <a:effectLst/>
-        </p:spPr>
-        <p:txBody>
-          <a:bodyPr wrap="none" lIns="18288" rIns="18288" tIns="18288" bIns="18288" anchor="t">
-            <a:spAutoFit/>
-          </a:bodyPr>
-          <a:lstStyle/>
-          <a:p>
-            <a:pPr algn="r">
-              <a:spcAft>
-                <a:spcPts val="0"/>
-              </a:spcAft>
-            </a:pPr>
-            <a:r>
-              <a:rPr sz="1050" b="0" i="0">
-                <a:solidFill>
-                  <a:srgbClr val="B4C7D2"/>
-                </a:solidFill>
-                <a:latin typeface="Arial"/>
-              </a:rPr>
-              <a:t>0.75</a:t>
-            </a:r>
-          </a:p>
-        </p:txBody>
-      </p:sp>
-      <p:cxnSp>
-        <p:nvCxnSpPr>
-          <p:cNvPr id="61" name="C1-E12 line 59" descr="sci-ppt:o059"/>
-          <p:cNvCxnSpPr/>
-          <p:nvPr/>
-        </p:nvCxnSpPr>
-        <p:spPr>
-          <a:xfrm>
-            <a:off x="6519672" y="1578428"/>
-            <a:ext cx="64008" cy="0"/>
-          </a:xfrm>
-          <a:prstGeom prst="line">
-            <a:avLst/>
-          </a:prstGeom>
-          <a:ln w="12700">
-            <a:solidFill>
-              <a:srgbClr val="B4C7D2"/>
-            </a:solidFill>
-          </a:ln>
-          <a:effectLst/>
-        </p:spPr>
-      </p:cxnSp>
-      <p:cxnSp>
-        <p:nvCxnSpPr>
-          <p:cNvPr id="62" name="C1-E12 line 60" descr="sci-ppt:o060"/>
-          <p:cNvCxnSpPr/>
-          <p:nvPr/>
-        </p:nvCxnSpPr>
-        <p:spPr>
-          <a:xfrm>
-            <a:off x="6583680" y="1578428"/>
-            <a:ext cx="5120640" cy="0"/>
-          </a:xfrm>
-          <a:prstGeom prst="line">
-            <a:avLst/>
-          </a:prstGeom>
-          <a:ln w="7620">
-            <a:solidFill>
-              <a:srgbClr val="2E4756"/>
-            </a:solidFill>
-          </a:ln>
-          <a:effectLst/>
-        </p:spPr>
-      </p:cxnSp>
-      <p:sp>
-        <p:nvSpPr>
-          <p:cNvPr id="63" name="C1-E12 text 61" descr="sci-ppt:o061"/>
-          <p:cNvSpPr txBox="1"/>
-          <p:nvPr/>
-        </p:nvSpPr>
-        <p:spPr>
-          <a:xfrm>
-            <a:off x="5715000" y="1496132"/>
-            <a:ext cx="777240" cy="208407"/>
-          </a:xfrm>
-          <a:prstGeom prst="rect">
-            <a:avLst/>
-          </a:prstGeom>
-          <a:noFill/>
-          <a:effectLst/>
-        </p:spPr>
-        <p:txBody>
-          <a:bodyPr wrap="none" lIns="18288" rIns="18288" tIns="18288" bIns="18288" anchor="t">
-            <a:spAutoFit/>
-          </a:bodyPr>
-          <a:lstStyle/>
-          <a:p>
-            <a:pPr algn="r">
-              <a:spcAft>
-                <a:spcPts val="0"/>
-              </a:spcAft>
-            </a:pPr>
-            <a:r>
-              <a:rPr sz="1050" b="0" i="0">
-                <a:solidFill>
-                  <a:srgbClr val="B4C7D2"/>
-                </a:solidFill>
-                <a:latin typeface="Arial"/>
-              </a:rPr>
-              <a:t>1.00</a:t>
-            </a:r>
-          </a:p>
-        </p:txBody>
-      </p:sp>
-      <p:sp>
-        <p:nvSpPr>
-          <p:cNvPr id="64" name="C1-E12 text 62" descr="sci-ppt:o062"/>
-          <p:cNvSpPr txBox="1"/>
-          <p:nvPr/>
-        </p:nvSpPr>
-        <p:spPr>
-          <a:xfrm>
-            <a:off x="6583680" y="5084064"/>
-            <a:ext cx="5120640" cy="231648"/>
-          </a:xfrm>
-          <a:prstGeom prst="rect">
-            <a:avLst/>
-          </a:prstGeom>
-          <a:noFill/>
-          <a:effectLst/>
-        </p:spPr>
-        <p:txBody>
-          <a:bodyPr wrap="none" lIns="18288" rIns="18288" tIns="18288" bIns="18288" anchor="t">
-            <a:spAutoFit/>
-          </a:bodyPr>
-          <a:lstStyle/>
-          <a:p>
-            <a:pPr algn="ctr">
-              <a:spcAft>
-                <a:spcPts val="0"/>
-              </a:spcAft>
-            </a:pPr>
-            <a:r>
-              <a:rPr sz="1200" b="0" i="0">
-                <a:solidFill>
-                  <a:srgbClr val="E7F0F3"/>
-                </a:solidFill>
-                <a:latin typeface="Arial"/>
-              </a:rPr>
-              <a:t>r / R</a:t>
-            </a:r>
-          </a:p>
-        </p:txBody>
-      </p:sp>
-      <p:sp>
-        <p:nvSpPr>
-          <p:cNvPr id="65" name="C1-E12 text 63" descr="sci-ppt:o063"/>
-          <p:cNvSpPr txBox="1"/>
-          <p:nvPr/>
-        </p:nvSpPr>
-        <p:spPr>
-          <a:xfrm>
-            <a:off x="6035040" y="1069848"/>
-            <a:ext cx="5120640" cy="231648"/>
+            <a:off x="5577840" y="6108192"/>
+            <a:ext cx="6035040" cy="433070"/>
           </a:xfrm>
           <a:prstGeom prst="rect">
             <a:avLst/>
@@ -6157,709 +5193,15 @@
               </a:spcAft>
             </a:pPr>
             <a:r>
-              <a:rPr sz="1200" b="0" i="0">
+              <a:rPr sz="1250" b="0" i="0">
                 <a:solidFill>
-                  <a:srgbClr val="E7F0F3"/>
+                  <a:srgbClr val="F2B880"/>
                 </a:solidFill>
                 <a:latin typeface="Arial"/>
               </a:rPr>
-              <a:t>dissipation inside r</a:t>
-            </a:r>
-          </a:p>
-        </p:txBody>
-      </p:sp>
-      <p:sp>
-        <p:nvSpPr>
-          <p:cNvPr id="66" name="C1-E12 polygon 64" descr="sci-ppt:o064"/>
-          <p:cNvSpPr/>
-          <p:nvPr/>
-        </p:nvSpPr>
-        <p:spPr>
-          <a:xfrm>
-            <a:off x="6583680" y="1628775"/>
-            <a:ext cx="5120640" cy="3171825"/>
-          </a:xfrm>
-          <a:custGeom>
-            <a:avLst/>
-            <a:gdLst/>
-            <a:ahLst/>
-            <a:cxnLst/>
-            <a:rect l="l" t="t" r="r" b="b"/>
-            <a:pathLst>
-              <a:path w="5120640" h="3171825">
-                <a:moveTo>
-                  <a:pt x="0" y="3171825"/>
-                </a:moveTo>
-                <a:lnTo>
-                  <a:pt x="25731" y="3030384"/>
-                </a:lnTo>
-                <a:lnTo>
-                  <a:pt x="51463" y="2897102"/>
-                </a:lnTo>
-                <a:lnTo>
-                  <a:pt x="77195" y="2771399"/>
-                </a:lnTo>
-                <a:lnTo>
-                  <a:pt x="102927" y="2652743"/>
-                </a:lnTo>
-                <a:lnTo>
-                  <a:pt x="128659" y="2540648"/>
-                </a:lnTo>
-                <a:lnTo>
-                  <a:pt x="154391" y="2434666"/>
-                </a:lnTo>
-                <a:lnTo>
-                  <a:pt x="180123" y="2334386"/>
-                </a:lnTo>
-                <a:lnTo>
-                  <a:pt x="205854" y="2239431"/>
-                </a:lnTo>
-                <a:lnTo>
-                  <a:pt x="231586" y="2149450"/>
-                </a:lnTo>
-                <a:lnTo>
-                  <a:pt x="257318" y="2064123"/>
-                </a:lnTo>
-                <a:lnTo>
-                  <a:pt x="283050" y="1983152"/>
-                </a:lnTo>
-                <a:lnTo>
-                  <a:pt x="308782" y="1906263"/>
-                </a:lnTo>
-                <a:lnTo>
-                  <a:pt x="334514" y="1833202"/>
-                </a:lnTo>
-                <a:lnTo>
-                  <a:pt x="360246" y="1763734"/>
-                </a:lnTo>
-                <a:lnTo>
-                  <a:pt x="385977" y="1697641"/>
-                </a:lnTo>
-                <a:lnTo>
-                  <a:pt x="411709" y="1634719"/>
-                </a:lnTo>
-                <a:lnTo>
-                  <a:pt x="437441" y="1574782"/>
-                </a:lnTo>
-                <a:lnTo>
-                  <a:pt x="463173" y="1517654"/>
-                </a:lnTo>
-                <a:lnTo>
-                  <a:pt x="488905" y="1463172"/>
-                </a:lnTo>
-                <a:lnTo>
-                  <a:pt x="514637" y="1411186"/>
-                </a:lnTo>
-                <a:lnTo>
-                  <a:pt x="540369" y="1361553"/>
-                </a:lnTo>
-                <a:lnTo>
-                  <a:pt x="566100" y="1314143"/>
-                </a:lnTo>
-                <a:lnTo>
-                  <a:pt x="591832" y="1268831"/>
-                </a:lnTo>
-                <a:lnTo>
-                  <a:pt x="617564" y="1225504"/>
-                </a:lnTo>
-                <a:lnTo>
-                  <a:pt x="643296" y="1184054"/>
-                </a:lnTo>
-                <a:lnTo>
-                  <a:pt x="669028" y="1144380"/>
-                </a:lnTo>
-                <a:lnTo>
-                  <a:pt x="694760" y="1106388"/>
-                </a:lnTo>
-                <a:lnTo>
-                  <a:pt x="720492" y="1069990"/>
-                </a:lnTo>
-                <a:lnTo>
-                  <a:pt x="746223" y="1035103"/>
-                </a:lnTo>
-                <a:lnTo>
-                  <a:pt x="771955" y="1001650"/>
-                </a:lnTo>
-                <a:lnTo>
-                  <a:pt x="797687" y="969557"/>
-                </a:lnTo>
-                <a:lnTo>
-                  <a:pt x="823419" y="938757"/>
-                </a:lnTo>
-                <a:lnTo>
-                  <a:pt x="849151" y="909184"/>
-                </a:lnTo>
-                <a:lnTo>
-                  <a:pt x="874883" y="880779"/>
-                </a:lnTo>
-                <a:lnTo>
-                  <a:pt x="900615" y="853484"/>
-                </a:lnTo>
-                <a:lnTo>
-                  <a:pt x="926346" y="827245"/>
-                </a:lnTo>
-                <a:lnTo>
-                  <a:pt x="952078" y="802013"/>
-                </a:lnTo>
-                <a:lnTo>
-                  <a:pt x="977810" y="777738"/>
-                </a:lnTo>
-                <a:lnTo>
-                  <a:pt x="1003542" y="754376"/>
-                </a:lnTo>
-                <a:lnTo>
-                  <a:pt x="1029274" y="731886"/>
-                </a:lnTo>
-                <a:lnTo>
-                  <a:pt x="1055006" y="710225"/>
-                </a:lnTo>
-                <a:lnTo>
-                  <a:pt x="1080738" y="689357"/>
-                </a:lnTo>
-                <a:lnTo>
-                  <a:pt x="1106469" y="669245"/>
-                </a:lnTo>
-                <a:lnTo>
-                  <a:pt x="1132201" y="649856"/>
-                </a:lnTo>
-                <a:lnTo>
-                  <a:pt x="1157933" y="631157"/>
-                </a:lnTo>
-                <a:lnTo>
-                  <a:pt x="1183665" y="613118"/>
-                </a:lnTo>
-                <a:lnTo>
-                  <a:pt x="1209397" y="595710"/>
-                </a:lnTo>
-                <a:lnTo>
-                  <a:pt x="1235129" y="578906"/>
-                </a:lnTo>
-                <a:lnTo>
-                  <a:pt x="1260861" y="562680"/>
-                </a:lnTo>
-                <a:lnTo>
-                  <a:pt x="1286592" y="547007"/>
-                </a:lnTo>
-                <a:lnTo>
-                  <a:pt x="1312324" y="531863"/>
-                </a:lnTo>
-                <a:lnTo>
-                  <a:pt x="1338056" y="517227"/>
-                </a:lnTo>
-                <a:lnTo>
-                  <a:pt x="1363788" y="503078"/>
-                </a:lnTo>
-                <a:lnTo>
-                  <a:pt x="1389520" y="489395"/>
-                </a:lnTo>
-                <a:lnTo>
-                  <a:pt x="1415252" y="476160"/>
-                </a:lnTo>
-                <a:lnTo>
-                  <a:pt x="1440984" y="463353"/>
-                </a:lnTo>
-                <a:lnTo>
-                  <a:pt x="1466715" y="450959"/>
-                </a:lnTo>
-                <a:lnTo>
-                  <a:pt x="1492447" y="438960"/>
-                </a:lnTo>
-                <a:lnTo>
-                  <a:pt x="1518179" y="427341"/>
-                </a:lnTo>
-                <a:lnTo>
-                  <a:pt x="1543911" y="416087"/>
-                </a:lnTo>
-                <a:lnTo>
-                  <a:pt x="1569643" y="405184"/>
-                </a:lnTo>
-                <a:lnTo>
-                  <a:pt x="1595375" y="394618"/>
-                </a:lnTo>
-                <a:lnTo>
-                  <a:pt x="1621107" y="384376"/>
-                </a:lnTo>
-                <a:lnTo>
-                  <a:pt x="1646838" y="374446"/>
-                </a:lnTo>
-                <a:lnTo>
-                  <a:pt x="1672570" y="364817"/>
-                </a:lnTo>
-                <a:lnTo>
-                  <a:pt x="1698302" y="355476"/>
-                </a:lnTo>
-                <a:lnTo>
-                  <a:pt x="1724034" y="346413"/>
-                </a:lnTo>
-                <a:lnTo>
-                  <a:pt x="1749766" y="337618"/>
-                </a:lnTo>
-                <a:lnTo>
-                  <a:pt x="1775498" y="329081"/>
-                </a:lnTo>
-                <a:lnTo>
-                  <a:pt x="1801230" y="320793"/>
-                </a:lnTo>
-                <a:lnTo>
-                  <a:pt x="1826962" y="312745"/>
-                </a:lnTo>
-                <a:lnTo>
-                  <a:pt x="1852693" y="304927"/>
-                </a:lnTo>
-                <a:lnTo>
-                  <a:pt x="1878425" y="297333"/>
-                </a:lnTo>
-                <a:lnTo>
-                  <a:pt x="1904157" y="289953"/>
-                </a:lnTo>
-                <a:lnTo>
-                  <a:pt x="1929889" y="282780"/>
-                </a:lnTo>
-                <a:lnTo>
-                  <a:pt x="1955621" y="275808"/>
-                </a:lnTo>
-                <a:lnTo>
-                  <a:pt x="1981353" y="269029"/>
-                </a:lnTo>
-                <a:lnTo>
-                  <a:pt x="2007085" y="262437"/>
-                </a:lnTo>
-                <a:lnTo>
-                  <a:pt x="2032816" y="256025"/>
-                </a:lnTo>
-                <a:lnTo>
-                  <a:pt x="2058548" y="249786"/>
-                </a:lnTo>
-                <a:lnTo>
-                  <a:pt x="2084280" y="243717"/>
-                </a:lnTo>
-                <a:lnTo>
-                  <a:pt x="2110012" y="237809"/>
-                </a:lnTo>
-                <a:lnTo>
-                  <a:pt x="2135744" y="232059"/>
-                </a:lnTo>
-                <a:lnTo>
-                  <a:pt x="2161476" y="226461"/>
-                </a:lnTo>
-                <a:lnTo>
-                  <a:pt x="2187208" y="221010"/>
-                </a:lnTo>
-                <a:lnTo>
-                  <a:pt x="2212939" y="215701"/>
-                </a:lnTo>
-                <a:lnTo>
-                  <a:pt x="2238671" y="210529"/>
-                </a:lnTo>
-                <a:lnTo>
-                  <a:pt x="2264403" y="205491"/>
-                </a:lnTo>
-                <a:lnTo>
-                  <a:pt x="2290135" y="200582"/>
-                </a:lnTo>
-                <a:lnTo>
-                  <a:pt x="2315867" y="195797"/>
-                </a:lnTo>
-                <a:lnTo>
-                  <a:pt x="2341599" y="191133"/>
-                </a:lnTo>
-                <a:lnTo>
-                  <a:pt x="2367331" y="186587"/>
-                </a:lnTo>
-                <a:lnTo>
-                  <a:pt x="2393062" y="182154"/>
-                </a:lnTo>
-                <a:lnTo>
-                  <a:pt x="2418794" y="177830"/>
-                </a:lnTo>
-                <a:lnTo>
-                  <a:pt x="2444526" y="173614"/>
-                </a:lnTo>
-                <a:lnTo>
-                  <a:pt x="2470258" y="169500"/>
-                </a:lnTo>
-                <a:lnTo>
-                  <a:pt x="2495990" y="165487"/>
-                </a:lnTo>
-                <a:lnTo>
-                  <a:pt x="2521722" y="161571"/>
-                </a:lnTo>
-                <a:lnTo>
-                  <a:pt x="2547454" y="157749"/>
-                </a:lnTo>
-                <a:lnTo>
-                  <a:pt x="2573185" y="154018"/>
-                </a:lnTo>
-                <a:lnTo>
-                  <a:pt x="2598917" y="150376"/>
-                </a:lnTo>
-                <a:lnTo>
-                  <a:pt x="2624649" y="146820"/>
-                </a:lnTo>
-                <a:lnTo>
-                  <a:pt x="2650381" y="143347"/>
-                </a:lnTo>
-                <a:lnTo>
-                  <a:pt x="2676113" y="139956"/>
-                </a:lnTo>
-                <a:lnTo>
-                  <a:pt x="2701845" y="136643"/>
-                </a:lnTo>
-                <a:lnTo>
-                  <a:pt x="2727577" y="133407"/>
-                </a:lnTo>
-                <a:lnTo>
-                  <a:pt x="2753308" y="130245"/>
-                </a:lnTo>
-                <a:lnTo>
-                  <a:pt x="2779040" y="127155"/>
-                </a:lnTo>
-                <a:lnTo>
-                  <a:pt x="2804772" y="124135"/>
-                </a:lnTo>
-                <a:lnTo>
-                  <a:pt x="2830504" y="121183"/>
-                </a:lnTo>
-                <a:lnTo>
-                  <a:pt x="2856236" y="118298"/>
-                </a:lnTo>
-                <a:lnTo>
-                  <a:pt x="2881968" y="115477"/>
-                </a:lnTo>
-                <a:lnTo>
-                  <a:pt x="2907700" y="112718"/>
-                </a:lnTo>
-                <a:lnTo>
-                  <a:pt x="2933431" y="110020"/>
-                </a:lnTo>
-                <a:lnTo>
-                  <a:pt x="2959163" y="107382"/>
-                </a:lnTo>
-                <a:lnTo>
-                  <a:pt x="2984895" y="104801"/>
-                </a:lnTo>
-                <a:lnTo>
-                  <a:pt x="3010627" y="102276"/>
-                </a:lnTo>
-                <a:lnTo>
-                  <a:pt x="3036359" y="99806"/>
-                </a:lnTo>
-                <a:lnTo>
-                  <a:pt x="3062091" y="97388"/>
-                </a:lnTo>
-                <a:lnTo>
-                  <a:pt x="3087823" y="95022"/>
-                </a:lnTo>
-                <a:lnTo>
-                  <a:pt x="3113554" y="92707"/>
-                </a:lnTo>
-                <a:lnTo>
-                  <a:pt x="3139286" y="90440"/>
-                </a:lnTo>
-                <a:lnTo>
-                  <a:pt x="3165018" y="88221"/>
-                </a:lnTo>
-                <a:lnTo>
-                  <a:pt x="3190750" y="86048"/>
-                </a:lnTo>
-                <a:lnTo>
-                  <a:pt x="3216482" y="83921"/>
-                </a:lnTo>
-                <a:lnTo>
-                  <a:pt x="3242214" y="81838"/>
-                </a:lnTo>
-                <a:lnTo>
-                  <a:pt x="3267946" y="79797"/>
-                </a:lnTo>
-                <a:lnTo>
-                  <a:pt x="3293677" y="77798"/>
-                </a:lnTo>
-                <a:lnTo>
-                  <a:pt x="3319409" y="75840"/>
-                </a:lnTo>
-                <a:lnTo>
-                  <a:pt x="3345141" y="73922"/>
-                </a:lnTo>
-                <a:lnTo>
-                  <a:pt x="3370873" y="72042"/>
-                </a:lnTo>
-                <a:lnTo>
-                  <a:pt x="3396605" y="70200"/>
-                </a:lnTo>
-                <a:lnTo>
-                  <a:pt x="3422337" y="68395"/>
-                </a:lnTo>
-                <a:lnTo>
-                  <a:pt x="3448069" y="66626"/>
-                </a:lnTo>
-                <a:lnTo>
-                  <a:pt x="3473801" y="64891"/>
-                </a:lnTo>
-                <a:lnTo>
-                  <a:pt x="3499532" y="63191"/>
-                </a:lnTo>
-                <a:lnTo>
-                  <a:pt x="3525264" y="61524"/>
-                </a:lnTo>
-                <a:lnTo>
-                  <a:pt x="3550996" y="59890"/>
-                </a:lnTo>
-                <a:lnTo>
-                  <a:pt x="3576728" y="58287"/>
-                </a:lnTo>
-                <a:lnTo>
-                  <a:pt x="3602460" y="56715"/>
-                </a:lnTo>
-                <a:lnTo>
-                  <a:pt x="3628192" y="55174"/>
-                </a:lnTo>
-                <a:lnTo>
-                  <a:pt x="3653924" y="53661"/>
-                </a:lnTo>
-                <a:lnTo>
-                  <a:pt x="3679655" y="52178"/>
-                </a:lnTo>
-                <a:lnTo>
-                  <a:pt x="3705387" y="50722"/>
-                </a:lnTo>
-                <a:lnTo>
-                  <a:pt x="3731119" y="49295"/>
-                </a:lnTo>
-                <a:lnTo>
-                  <a:pt x="3756851" y="47893"/>
-                </a:lnTo>
-                <a:lnTo>
-                  <a:pt x="3782583" y="46518"/>
-                </a:lnTo>
-                <a:lnTo>
-                  <a:pt x="3808315" y="45169"/>
-                </a:lnTo>
-                <a:lnTo>
-                  <a:pt x="3834047" y="43844"/>
-                </a:lnTo>
-                <a:lnTo>
-                  <a:pt x="3859778" y="42544"/>
-                </a:lnTo>
-                <a:lnTo>
-                  <a:pt x="3885510" y="41268"/>
-                </a:lnTo>
-                <a:lnTo>
-                  <a:pt x="3911242" y="40015"/>
-                </a:lnTo>
-                <a:lnTo>
-                  <a:pt x="3936974" y="38784"/>
-                </a:lnTo>
-                <a:lnTo>
-                  <a:pt x="3962706" y="37576"/>
-                </a:lnTo>
-                <a:lnTo>
-                  <a:pt x="3988438" y="36390"/>
-                </a:lnTo>
-                <a:lnTo>
-                  <a:pt x="4014170" y="35225"/>
-                </a:lnTo>
-                <a:lnTo>
-                  <a:pt x="4039901" y="34080"/>
-                </a:lnTo>
-                <a:lnTo>
-                  <a:pt x="4065633" y="32956"/>
-                </a:lnTo>
-                <a:lnTo>
-                  <a:pt x="4091365" y="31852"/>
-                </a:lnTo>
-                <a:lnTo>
-                  <a:pt x="4117097" y="30768"/>
-                </a:lnTo>
-                <a:lnTo>
-                  <a:pt x="4142829" y="29702"/>
-                </a:lnTo>
-                <a:lnTo>
-                  <a:pt x="4168561" y="28655"/>
-                </a:lnTo>
-                <a:lnTo>
-                  <a:pt x="4194293" y="27626"/>
-                </a:lnTo>
-                <a:lnTo>
-                  <a:pt x="4220024" y="26615"/>
-                </a:lnTo>
-                <a:lnTo>
-                  <a:pt x="4245756" y="25621"/>
-                </a:lnTo>
-                <a:lnTo>
-                  <a:pt x="4271488" y="24644"/>
-                </a:lnTo>
-                <a:lnTo>
-                  <a:pt x="4297220" y="23684"/>
-                </a:lnTo>
-                <a:lnTo>
-                  <a:pt x="4322952" y="22740"/>
-                </a:lnTo>
-                <a:lnTo>
-                  <a:pt x="4348684" y="21813"/>
-                </a:lnTo>
-                <a:lnTo>
-                  <a:pt x="4374416" y="20900"/>
-                </a:lnTo>
-                <a:lnTo>
-                  <a:pt x="4400147" y="20004"/>
-                </a:lnTo>
-                <a:lnTo>
-                  <a:pt x="4425879" y="19122"/>
-                </a:lnTo>
-                <a:lnTo>
-                  <a:pt x="4451611" y="18255"/>
-                </a:lnTo>
-                <a:lnTo>
-                  <a:pt x="4477343" y="17402"/>
-                </a:lnTo>
-                <a:lnTo>
-                  <a:pt x="4503075" y="16563"/>
-                </a:lnTo>
-                <a:lnTo>
-                  <a:pt x="4528807" y="15738"/>
-                </a:lnTo>
-                <a:lnTo>
-                  <a:pt x="4554539" y="14927"/>
-                </a:lnTo>
-                <a:lnTo>
-                  <a:pt x="4580270" y="14129"/>
-                </a:lnTo>
-                <a:lnTo>
-                  <a:pt x="4606002" y="13344"/>
-                </a:lnTo>
-                <a:lnTo>
-                  <a:pt x="4631734" y="12571"/>
-                </a:lnTo>
-                <a:lnTo>
-                  <a:pt x="4657466" y="11811"/>
-                </a:lnTo>
-                <a:lnTo>
-                  <a:pt x="4683198" y="11063"/>
-                </a:lnTo>
-                <a:lnTo>
-                  <a:pt x="4708930" y="10327"/>
-                </a:lnTo>
-                <a:lnTo>
-                  <a:pt x="4734662" y="9603"/>
-                </a:lnTo>
-                <a:lnTo>
-                  <a:pt x="4760393" y="8890"/>
-                </a:lnTo>
-                <a:lnTo>
-                  <a:pt x="4786125" y="8189"/>
-                </a:lnTo>
-                <a:lnTo>
-                  <a:pt x="4811857" y="7498"/>
-                </a:lnTo>
-                <a:lnTo>
-                  <a:pt x="4837589" y="6819"/>
-                </a:lnTo>
-                <a:lnTo>
-                  <a:pt x="4863321" y="6150"/>
-                </a:lnTo>
-                <a:lnTo>
-                  <a:pt x="4889053" y="5491"/>
-                </a:lnTo>
-                <a:lnTo>
-                  <a:pt x="4914785" y="4843"/>
-                </a:lnTo>
-                <a:lnTo>
-                  <a:pt x="4940516" y="4204"/>
-                </a:lnTo>
-                <a:lnTo>
-                  <a:pt x="4966248" y="3575"/>
-                </a:lnTo>
-                <a:lnTo>
-                  <a:pt x="4991980" y="2956"/>
-                </a:lnTo>
-                <a:lnTo>
-                  <a:pt x="5017712" y="2347"/>
-                </a:lnTo>
-                <a:lnTo>
-                  <a:pt x="5043444" y="1747"/>
-                </a:lnTo>
-                <a:lnTo>
-                  <a:pt x="5069176" y="1155"/>
-                </a:lnTo>
-                <a:lnTo>
-                  <a:pt x="5094908" y="573"/>
-                </a:lnTo>
-                <a:lnTo>
-                  <a:pt x="5120640" y="0"/>
-                </a:lnTo>
-              </a:path>
-            </a:pathLst>
-          </a:custGeom>
-          <a:noFill/>
-          <a:ln w="38100">
-            <a:solidFill>
-              <a:srgbClr val="F2B880"/>
-            </a:solidFill>
-          </a:ln>
-          <a:effectLst/>
-        </p:spPr>
-        <p:txBody>
-          <a:bodyPr rtlCol="0" anchor="ctr"/>
-          <a:lstStyle/>
-          <a:p>
-            <a:pPr algn="ctr"/>
-          </a:p>
-        </p:txBody>
-      </p:sp>
-      <p:sp>
-        <p:nvSpPr>
-          <p:cNvPr id="67" name="C1-E12 ellipse 65" descr="sci-ppt:o065"/>
-          <p:cNvSpPr/>
-          <p:nvPr/>
-        </p:nvSpPr>
-        <p:spPr>
-          <a:xfrm>
-            <a:off x="8217408" y="1908048"/>
-            <a:ext cx="146304" cy="146304"/>
-          </a:xfrm>
-          <a:prstGeom prst="ellipse">
-            <a:avLst/>
-          </a:prstGeom>
-          <a:solidFill>
-            <a:srgbClr val="8EDBD4"/>
-          </a:solidFill>
-          <a:ln w="12700">
-            <a:solidFill>
-              <a:srgbClr val="8EDBD4"/>
-            </a:solidFill>
-          </a:ln>
-          <a:effectLst/>
-        </p:spPr>
-        <p:txBody>
-          <a:bodyPr rtlCol="0" anchor="ctr"/>
-          <a:lstStyle/>
-          <a:p>
-            <a:pPr algn="ctr"/>
-          </a:p>
-        </p:txBody>
-      </p:sp>
-      <p:sp>
-        <p:nvSpPr>
-          <p:cNvPr id="68" name="C1-E12 text 66" descr="sci-ppt:o066"/>
-          <p:cNvSpPr txBox="1"/>
-          <p:nvPr/>
-        </p:nvSpPr>
-        <p:spPr>
-          <a:xfrm>
-            <a:off x="8418576" y="2026920"/>
-            <a:ext cx="2194560" cy="231648"/>
-          </a:xfrm>
-          <a:prstGeom prst="rect">
-            <a:avLst/>
-          </a:prstGeom>
-          <a:noFill/>
-          <a:effectLst/>
-        </p:spPr>
-        <p:txBody>
-          <a:bodyPr wrap="none" lIns="18288" rIns="18288" tIns="18288" bIns="18288" anchor="t">
-            <a:spAutoFit/>
-          </a:bodyPr>
-          <a:lstStyle/>
+              <a:t>The model has no gas, viscosity, tension or compressibility, so nothing</a:t>
+            </a:r>
+          </a:p>
           <a:p>
             <a:pPr algn="l">
               <a:spcAft>
@@ -6867,334 +5209,20 @@
               </a:spcAft>
             </a:pPr>
             <a:r>
-              <a:rPr sz="1200" b="0" i="0">
-                <a:solidFill>
-                  <a:srgbClr val="8EDBD4"/>
-                </a:solidFill>
-                <a:latin typeface="Arial"/>
-              </a:rPr>
-              <a:t>87.5 % inside r = 2R</a:t>
-            </a:r>
-          </a:p>
-        </p:txBody>
-      </p:sp>
-      <p:sp>
-        <p:nvSpPr>
-          <p:cNvPr id="69" name="C1-E12 text 67" descr="sci-ppt:o067"/>
-          <p:cNvSpPr txBox="1"/>
-          <p:nvPr/>
-        </p:nvSpPr>
-        <p:spPr>
-          <a:xfrm>
-            <a:off x="8705088" y="3581400"/>
-            <a:ext cx="3108960" cy="402081"/>
-          </a:xfrm>
-          <a:prstGeom prst="rect">
-            <a:avLst/>
-          </a:prstGeom>
-          <a:noFill/>
-          <a:effectLst/>
-        </p:spPr>
-        <p:txBody>
-          <a:bodyPr wrap="none" lIns="18288" rIns="18288" tIns="18288" bIns="18288" anchor="t">
-            <a:spAutoFit/>
-          </a:bodyPr>
-          <a:lstStyle/>
-          <a:p>
-            <a:pPr algn="l">
-              <a:spcAft>
-                <a:spcPts val="0"/>
-              </a:spcAft>
-            </a:pPr>
-            <a:r>
-              <a:rPr sz="1150" b="0" i="0">
-                <a:solidFill>
-                  <a:srgbClr val="E7F0F3"/>
-                </a:solidFill>
-                <a:latin typeface="Arial"/>
-              </a:rPr>
-              <a:t>𝒟 = ∫ 2μ(Dᵣᵣ² + 2D_θθ²) 4πr² dr</a:t>
-            </a:r>
-          </a:p>
-          <a:p>
-            <a:pPr algn="l">
-              <a:spcAft>
-                <a:spcPts val="0"/>
-              </a:spcAft>
-            </a:pPr>
-            <a:r>
-              <a:rPr sz="1150" b="0" i="0">
-                <a:solidFill>
-                  <a:srgbClr val="E7F0F3"/>
-                </a:solidFill>
-                <a:latin typeface="Arial"/>
-              </a:rPr>
-              <a:t>= 48πμR⁴Ṙ² ∫ r⁻⁴ dr = 16πμRṘ²</a:t>
-            </a:r>
-          </a:p>
-        </p:txBody>
-      </p:sp>
-      <p:sp>
-        <p:nvSpPr>
-          <p:cNvPr id="70" name="C1-E12 rect 68" descr="sci-ppt:o068"/>
-          <p:cNvSpPr/>
-          <p:nvPr/>
-        </p:nvSpPr>
-        <p:spPr>
-          <a:xfrm>
-            <a:off x="4114800" y="3063239"/>
-            <a:ext cx="457200" cy="457200"/>
-          </a:xfrm>
-          <a:prstGeom prst="rect">
-            <a:avLst/>
-          </a:prstGeom>
-          <a:noFill/>
-          <a:ln w="15240">
-            <a:solidFill>
-              <a:srgbClr val="B4C7D2"/>
-            </a:solidFill>
-          </a:ln>
-          <a:effectLst/>
-        </p:spPr>
-        <p:txBody>
-          <a:bodyPr rtlCol="0" anchor="ctr"/>
-          <a:lstStyle/>
-          <a:p>
-            <a:pPr algn="ctr"/>
-          </a:p>
-        </p:txBody>
-      </p:sp>
-      <p:sp>
-        <p:nvSpPr>
-          <p:cNvPr id="71" name="C1-E12 rect 69" descr="sci-ppt:o069"/>
-          <p:cNvSpPr/>
-          <p:nvPr/>
-        </p:nvSpPr>
-        <p:spPr>
-          <a:xfrm>
-            <a:off x="4023360" y="3200400"/>
-            <a:ext cx="713232" cy="182880"/>
-          </a:xfrm>
-          <a:prstGeom prst="rect">
-            <a:avLst/>
-          </a:prstGeom>
-          <a:solidFill>
-            <a:srgbClr val="2B6678">
-              <a:alpha val="90000"/>
-            </a:srgbClr>
-          </a:solidFill>
-          <a:ln w="22860">
-            <a:solidFill>
-              <a:srgbClr val="8EDBD4">
-                <a:alpha val="90000"/>
-              </a:srgbClr>
-            </a:solidFill>
-          </a:ln>
-          <a:effectLst/>
-        </p:spPr>
-        <p:txBody>
-          <a:bodyPr rtlCol="0" anchor="ctr"/>
-          <a:lstStyle/>
-          <a:p>
-            <a:pPr algn="ctr"/>
-          </a:p>
-        </p:txBody>
-      </p:sp>
-      <p:cxnSp>
-        <p:nvCxnSpPr>
-          <p:cNvPr id="72" name="C1-E12 arrow 70" descr="sci-ppt:o070"/>
-          <p:cNvCxnSpPr/>
-          <p:nvPr/>
-        </p:nvCxnSpPr>
-        <p:spPr>
-          <a:xfrm>
-            <a:off x="3794760" y="3291839"/>
-            <a:ext cx="210312" cy="0"/>
-          </a:xfrm>
-          <a:prstGeom prst="line">
-            <a:avLst/>
-          </a:prstGeom>
-          <a:ln w="25400">
-            <a:solidFill>
-              <a:srgbClr val="8EDBD4"/>
-            </a:solidFill>
-            <a:headEnd type="none" w="med" len="med"/>
-            <a:tailEnd type="triangle" w="med" len="med"/>
-          </a:ln>
-          <a:effectLst/>
-        </p:spPr>
-      </p:cxnSp>
-      <p:cxnSp>
-        <p:nvCxnSpPr>
-          <p:cNvPr id="73" name="C1-E12 arrow 71" descr="sci-ppt:o071"/>
-          <p:cNvCxnSpPr/>
-          <p:nvPr/>
-        </p:nvCxnSpPr>
-        <p:spPr>
-          <a:xfrm flipH="1">
-            <a:off x="4718304" y="3291839"/>
-            <a:ext cx="173736" cy="0"/>
-          </a:xfrm>
-          <a:prstGeom prst="line">
-            <a:avLst/>
-          </a:prstGeom>
-          <a:ln w="25400">
-            <a:solidFill>
-              <a:srgbClr val="8EDBD4"/>
-            </a:solidFill>
-            <a:headEnd type="none" w="med" len="med"/>
-            <a:tailEnd type="triangle" w="med" len="med"/>
-          </a:ln>
-          <a:effectLst/>
-        </p:spPr>
-      </p:cxnSp>
-      <p:cxnSp>
-        <p:nvCxnSpPr>
-          <p:cNvPr id="74" name="C1-E12 arrow 72" descr="sci-ppt:o072"/>
-          <p:cNvCxnSpPr/>
-          <p:nvPr/>
-        </p:nvCxnSpPr>
-        <p:spPr>
-          <a:xfrm>
-            <a:off x="4343400" y="2898648"/>
-            <a:ext cx="0" cy="164591"/>
-          </a:xfrm>
-          <a:prstGeom prst="line">
-            <a:avLst/>
-          </a:prstGeom>
-          <a:ln w="25400">
-            <a:solidFill>
-              <a:srgbClr val="F28BA0"/>
-            </a:solidFill>
-            <a:headEnd type="none" w="med" len="med"/>
-            <a:tailEnd type="triangle" w="med" len="med"/>
-          </a:ln>
-          <a:effectLst/>
-        </p:spPr>
-      </p:cxnSp>
-      <p:cxnSp>
-        <p:nvCxnSpPr>
-          <p:cNvPr id="75" name="C1-E12 arrow 73" descr="sci-ppt:o073"/>
-          <p:cNvCxnSpPr/>
-          <p:nvPr/>
-        </p:nvCxnSpPr>
-        <p:spPr>
-          <a:xfrm flipV="1">
-            <a:off x="4343400" y="3520439"/>
-            <a:ext cx="0" cy="164592"/>
-          </a:xfrm>
-          <a:prstGeom prst="line">
-            <a:avLst/>
-          </a:prstGeom>
-          <a:ln w="25400">
-            <a:solidFill>
-              <a:srgbClr val="F28BA0"/>
-            </a:solidFill>
-            <a:headEnd type="none" w="med" len="med"/>
-            <a:tailEnd type="triangle" w="med" len="med"/>
-          </a:ln>
-          <a:effectLst/>
-        </p:spPr>
-      </p:cxnSp>
-      <p:sp>
-        <p:nvSpPr>
-          <p:cNvPr id="76" name="C1-E12 text 74" descr="sci-ppt:o074"/>
-          <p:cNvSpPr txBox="1"/>
-          <p:nvPr/>
-        </p:nvSpPr>
-        <p:spPr>
-          <a:xfrm>
-            <a:off x="6583680" y="5349240"/>
-            <a:ext cx="5212080" cy="433070"/>
-          </a:xfrm>
-          <a:prstGeom prst="rect">
-            <a:avLst/>
-          </a:prstGeom>
-          <a:noFill/>
-          <a:effectLst/>
-        </p:spPr>
-        <p:txBody>
-          <a:bodyPr wrap="none" lIns="18288" rIns="18288" tIns="18288" bIns="18288" anchor="t">
-            <a:spAutoFit/>
-          </a:bodyPr>
-          <a:lstStyle/>
-          <a:p>
-            <a:pPr algn="l">
-              <a:spcAft>
-                <a:spcPts val="0"/>
-              </a:spcAft>
-            </a:pPr>
-            <a:r>
               <a:rPr sz="1250" b="0" i="0">
-                <a:solidFill>
-                  <a:srgbClr val="E7F0F3"/>
-                </a:solidFill>
-                <a:latin typeface="Arial"/>
-              </a:rPr>
-              <a:t>A shell element is squeezed radially and stretched around the</a:t>
-            </a:r>
-          </a:p>
-          <a:p>
-            <a:pPr algn="l">
-              <a:spcAft>
-                <a:spcPts val="0"/>
-              </a:spcAft>
-            </a:pPr>
-            <a:r>
-              <a:rPr sz="1250" b="0" i="0">
-                <a:solidFill>
-                  <a:srgbClr val="E7F0F3"/>
-                </a:solidFill>
-                <a:latin typeface="Arial"/>
-              </a:rPr>
-              <a:t>sphere; most of this shearing happens near the wall.</a:t>
-            </a:r>
-          </a:p>
-        </p:txBody>
-      </p:sp>
-      <p:sp>
-        <p:nvSpPr>
-          <p:cNvPr id="77" name="C1-E12 text 75" descr="sci-ppt:o075"/>
-          <p:cNvSpPr txBox="1"/>
-          <p:nvPr/>
-        </p:nvSpPr>
-        <p:spPr>
-          <a:xfrm>
-            <a:off x="914400" y="6035040"/>
-            <a:ext cx="10881360" cy="247142"/>
-          </a:xfrm>
-          <a:prstGeom prst="rect">
-            <a:avLst/>
-          </a:prstGeom>
-          <a:noFill/>
-          <a:effectLst/>
-        </p:spPr>
-        <p:txBody>
-          <a:bodyPr wrap="none" lIns="18288" rIns="18288" tIns="18288" bIns="18288" anchor="t">
-            <a:spAutoFit/>
-          </a:bodyPr>
-          <a:lstStyle/>
-          <a:p>
-            <a:pPr algn="l">
-              <a:spcAft>
-                <a:spcPts val="0"/>
-              </a:spcAft>
-            </a:pPr>
-            <a:r>
-              <a:rPr sz="1300" b="0" i="0">
                 <a:solidFill>
                   <a:srgbClr val="F2B880"/>
                 </a:solidFill>
                 <a:latin typeface="Arial"/>
               </a:rPr>
-              <a:t>Direct strain-rate integration reproduces the energy-balance loss of Eq. C1-E11 exactly.</a:t>
-            </a:r>
-          </a:p>
-        </p:txBody>
-      </p:sp>
-      <p:sp>
-        <p:nvSpPr>
-          <p:cNvPr id="78" name="C1-E12 text 76" descr="sci-ppt:o076"/>
+              <a:t>stops the collapse.</a:t>
+            </a:r>
+          </a:p>
+        </p:txBody>
+      </p:sp>
+      <p:sp>
+        <p:nvSpPr>
+          <p:cNvPr id="56" name="C1-E12 text 54" descr="sci-ppt:o054"/>
           <p:cNvSpPr txBox="1"/>
           <p:nvPr/>
         </p:nvSpPr>
@@ -7227,7 +5255,7 @@
                 </a:solidFill>
                 <a:latin typeface="Arial"/>
               </a:rPr>
-              <a:t>Profiles from Eq. C1-E12; the expanding case Ṙ &gt; 0 is drawn (signs flip for collapse).</a:t>
+              <a:t>R(t) from the quadrature of Eq. C1-E15; Rₘₐₓ = 30 µm, ρ = 1000 kg/m³, Δp_c = 100 kPa.</a:t>
             </a:r>
           </a:p>
         </p:txBody>
